--- a/OWV_リマインド・リポスト目標設計.pptx
+++ b/OWV_リマインド・リポスト目標設計.pptx
@@ -110,7 +110,7 @@
   <p:extLst>
     <p:ext uri="{521415D9-36F7-43E2-AB2F-B90AF26B5E84}">
       <p14:sectionLst xmlns:p14="http://schemas.microsoft.com/office/powerpoint/2010/main">
-        <p14:section name="OWV CP リマインド設計" id="{6d4d4044-e704-74b8-bfb2-659d3b5efa72}">
+        <p14:section name="OWV CP リマインド設計" id="{99e6fc45-0079-e9c9-aca9-c82862fdcb6f}">
           <p14:sldIdLst>
             <p14:sldId id="256"/>
             <p14:sldId id="257"/>
@@ -644,7 +644,7 @@
                 </a:solidFill>
                 <a:latin typeface="+mn-lt"/>
               </a:rPr>
-              <a:t>最初の48時間 インプレッション・累計割合</a:t>
+              <a:t>最初の48時間 1時間ごとのインプレッション（K）</a:t>
             </a:r>
           </a:p>
         </c:rich>
@@ -657,7 +657,7 @@
       <c:layout/>
       <c:barChart>
         <c:barDir val="col"/>
-        <c:grouping val="clustered"/>
+        <c:grouping val="stacked"/>
         <c:varyColors val="0"/>
         <c:ser>
           <c:idx val="0"/>
@@ -668,7 +668,7 @@
               <c:strCache>
                 <c:ptCount val="1"/>
                 <c:pt idx="0">
-                  <c:v>インプレッション（K）</c:v>
+                  <c:v>実績</c:v>
                 </c:pt>
               </c:strCache>
             </c:strRef>
@@ -1012,38 +1012,6 @@
             </c:numRef>
           </c:val>
         </c:ser>
-        <c:dLbls>
-          <c:numFmt formatCode="#,##0" sourceLinked="0"/>
-          <c:txPr>
-            <a:bodyPr/>
-            <a:lstStyle/>
-            <a:p>
-              <a:pPr>
-                <a:defRPr b="0" i="0" strike="noStrike" sz="1100" u="none">
-                  <a:solidFill>
-                    <a:srgbClr val="000000"/>
-                  </a:solidFill>
-                  <a:latin typeface="+mn-lt"/>
-                </a:defRPr>
-              </a:pPr>
-            </a:p>
-          </c:txPr>
-          <c:showLegendKey val="0"/>
-          <c:showVal val="0"/>
-          <c:showCatName val="0"/>
-          <c:showSerName val="0"/>
-          <c:showPercent val="0"/>
-          <c:showBubbleSize val="0"/>
-          <c:showLeaderLines val="0"/>
-        </c:dLbls>
-        <c:gapWidth val="30"/>
-        <c:overlap val="0"/>
-        <c:axId val="2094734554"/>
-        <c:axId val="2094734552"/>
-        <c:axId val="2094734556"/>
-      </c:barChart>
-      <c:lineChart>
-        <c:varyColors val="0"/>
         <c:ser>
           <c:idx val="1"/>
           <c:order val="1"/>
@@ -1053,7 +1021,7 @@
               <c:strCache>
                 <c:ptCount val="1"/>
                 <c:pt idx="0">
-                  <c:v>累計割合（%）</c:v>
+                  <c:v>17時投稿の上乗せ（想定）</c:v>
                 </c:pt>
               </c:strCache>
             </c:strRef>
@@ -1062,13 +1030,6 @@
             <a:solidFill>
               <a:srgbClr val="C8102E"/>
             </a:solidFill>
-            <a:ln w="31750" cap="flat">
-              <a:solidFill>
-                <a:srgbClr val="C8102E"/>
-              </a:solidFill>
-              <a:prstDash val="solid"/>
-              <a:round/>
-            </a:ln>
             <a:effectLst/>
           </c:spPr>
           <c:invertIfNegative val="0"/>
@@ -1096,23 +1057,6 @@
             <c:showBubbleSize val="0"/>
             <c:showLeaderLines val="0"/>
           </c:dLbls>
-          <c:marker>
-            <c:symbol val="none"/>
-            <c:size val="6"/>
-            <c:spPr>
-              <a:solidFill>
-                <a:srgbClr val="C8102E"/>
-              </a:solidFill>
-              <a:ln w="9525" cap="flat">
-                <a:solidFill>
-                  <a:srgbClr val="C8102E"/>
-                </a:solidFill>
-                <a:prstDash val="solid"/>
-                <a:round/>
-              </a:ln>
-              <a:effectLst/>
-            </c:spPr>
-          </c:marker>
           <c:cat>
             <c:multiLvlStrRef>
               <c:f>Sheet1!$A$2:$A$49</c:f>
@@ -1274,153 +1218,152 @@
                 <c:formatCode>General</c:formatCode>
                 <c:ptCount val="48"/>
                 <c:pt idx="0">
-                  <c:v>5</c:v>
+                  <c:v>0.69</c:v>
                 </c:pt>
                 <c:pt idx="1">
-                  <c:v>26</c:v>
+                  <c:v>2.68</c:v>
                 </c:pt>
                 <c:pt idx="2">
-                  <c:v>34</c:v>
+                  <c:v>1.1</c:v>
                 </c:pt>
                 <c:pt idx="3">
-                  <c:v>41</c:v>
+                  <c:v>0.89</c:v>
                 </c:pt>
                 <c:pt idx="4">
-                  <c:v>47</c:v>
+                  <c:v>0.79</c:v>
                 </c:pt>
                 <c:pt idx="5">
-                  <c:v>53</c:v>
+                  <c:v>0.72</c:v>
                 </c:pt>
                 <c:pt idx="6">
-                  <c:v>59</c:v>
+                  <c:v>0.72</c:v>
                 </c:pt>
                 <c:pt idx="7">
-                  <c:v>65</c:v>
+                  <c:v>0.82</c:v>
                 </c:pt>
                 <c:pt idx="8">
-                  <c:v>70</c:v>
+                  <c:v>0.69</c:v>
                 </c:pt>
                 <c:pt idx="9">
-                  <c:v>76</c:v>
+                  <c:v>0.79</c:v>
                 </c:pt>
                 <c:pt idx="10">
-                  <c:v>81</c:v>
+                  <c:v>0.58</c:v>
                 </c:pt>
                 <c:pt idx="11">
-                  <c:v>84</c:v>
+                  <c:v>0.41</c:v>
                 </c:pt>
                 <c:pt idx="12">
-                  <c:v>86</c:v>
+                  <c:v>0.27</c:v>
                 </c:pt>
                 <c:pt idx="13">
-                  <c:v>88</c:v>
+                  <c:v>0.21</c:v>
                 </c:pt>
                 <c:pt idx="14">
-                  <c:v>89</c:v>
+                  <c:v>0.14</c:v>
                 </c:pt>
                 <c:pt idx="15">
-                  <c:v>90</c:v>
+                  <c:v>0.1</c:v>
                 </c:pt>
                 <c:pt idx="16">
-                  <c:v>90</c:v>
+                  <c:v>0.08</c:v>
                 </c:pt>
                 <c:pt idx="17">
-                  <c:v>91</c:v>
+                  <c:v>0.07</c:v>
                 </c:pt>
                 <c:pt idx="18">
-                  <c:v>91</c:v>
+                  <c:v>0.07</c:v>
                 </c:pt>
                 <c:pt idx="19">
-                  <c:v>92</c:v>
+                  <c:v>0.07</c:v>
                 </c:pt>
                 <c:pt idx="20">
-                  <c:v>92</c:v>
+                  <c:v>0.07</c:v>
                 </c:pt>
                 <c:pt idx="21">
-                  <c:v>93</c:v>
+                  <c:v>0.07</c:v>
                 </c:pt>
                 <c:pt idx="22">
-                  <c:v>93</c:v>
+                  <c:v>0.07</c:v>
                 </c:pt>
                 <c:pt idx="23">
-                  <c:v>94</c:v>
+                  <c:v>0.07</c:v>
                 </c:pt>
                 <c:pt idx="24">
-                  <c:v>95</c:v>
+                  <c:v>0.08</c:v>
                 </c:pt>
                 <c:pt idx="25">
-                  <c:v>95</c:v>
+                  <c:v>0.07</c:v>
                 </c:pt>
                 <c:pt idx="26">
-                  <c:v>96</c:v>
+                  <c:v>0.05</c:v>
                 </c:pt>
                 <c:pt idx="27">
-                  <c:v>96</c:v>
+                  <c:v>0.05</c:v>
                 </c:pt>
                 <c:pt idx="28">
-                  <c:v>96</c:v>
+                  <c:v>0.04</c:v>
                 </c:pt>
                 <c:pt idx="29">
-                  <c:v>97</c:v>
+                  <c:v>0.04</c:v>
                 </c:pt>
                 <c:pt idx="30">
-                  <c:v>97</c:v>
+                  <c:v>0.04</c:v>
                 </c:pt>
                 <c:pt idx="31">
-                  <c:v>97</c:v>
+                  <c:v>0.04</c:v>
                 </c:pt>
                 <c:pt idx="32">
-                  <c:v>98</c:v>
+                  <c:v>0.03</c:v>
                 </c:pt>
                 <c:pt idx="33">
-                  <c:v>98</c:v>
+                  <c:v>0.03</c:v>
                 </c:pt>
                 <c:pt idx="34">
-                  <c:v>98</c:v>
+                  <c:v>0.03</c:v>
                 </c:pt>
                 <c:pt idx="35">
-                  <c:v>98</c:v>
+                  <c:v>0.04</c:v>
                 </c:pt>
                 <c:pt idx="36">
-                  <c:v>99</c:v>
+                  <c:v>0.03</c:v>
                 </c:pt>
                 <c:pt idx="37">
-                  <c:v>99</c:v>
+                  <c:v>0.03</c:v>
                 </c:pt>
                 <c:pt idx="38">
-                  <c:v>99</c:v>
+                  <c:v>0.02</c:v>
                 </c:pt>
                 <c:pt idx="39">
-                  <c:v>99</c:v>
+                  <c:v>0.02</c:v>
                 </c:pt>
                 <c:pt idx="40">
-                  <c:v>99</c:v>
+                  <c:v>0.01</c:v>
                 </c:pt>
                 <c:pt idx="41">
-                  <c:v>99</c:v>
+                  <c:v>0.01</c:v>
                 </c:pt>
                 <c:pt idx="42">
-                  <c:v>99</c:v>
+                  <c:v>0.01</c:v>
                 </c:pt>
                 <c:pt idx="43">
-                  <c:v>100</c:v>
+                  <c:v>0.01</c:v>
                 </c:pt>
                 <c:pt idx="44">
-                  <c:v>100</c:v>
+                  <c:v>0.01</c:v>
                 </c:pt>
                 <c:pt idx="45">
-                  <c:v>100</c:v>
+                  <c:v>0.01</c:v>
                 </c:pt>
                 <c:pt idx="46">
-                  <c:v>100</c:v>
+                  <c:v>0.01</c:v>
                 </c:pt>
                 <c:pt idx="47">
-                  <c:v>100</c:v>
+                  <c:v>0.01</c:v>
                 </c:pt>
               </c:numCache>
             </c:numRef>
           </c:val>
-          <c:smooth val="0"/>
         </c:ser>
         <c:dLbls>
           <c:numFmt formatCode="#,##0" sourceLinked="0"/>
@@ -1446,11 +1389,12 @@
           <c:showBubbleSize val="0"/>
           <c:showLeaderLines val="0"/>
         </c:dLbls>
-        <c:marker val="1"/>
-        <c:axId val="2094734555"/>
-        <c:axId val="2094734553"/>
+        <c:gapWidth val="30"/>
+        <c:overlap val="100"/>
+        <c:axId val="2094734554"/>
+        <c:axId val="2094734552"/>
         <c:axId val="2094734556"/>
-      </c:lineChart>
+      </c:barChart>
       <c:catAx>
         <c:axId val="2094734554"/>
         <c:scaling>
@@ -1497,7 +1441,7 @@
         <c:axId val="2094734552"/>
         <c:scaling>
           <c:orientation val="minMax"/>
-          <c:max val="4"/>
+          <c:max val="7"/>
           <c:min val="0"/>
         </c:scaling>
         <c:delete val="0"/>
@@ -1546,89 +1490,6 @@
         <c:crossBetween val="between"/>
         <c:majorUnit val="1"/>
       </c:valAx>
-      <c:valAx>
-        <c:axId val="2094734553"/>
-        <c:scaling>
-          <c:orientation val="minMax"/>
-          <c:max val="100"/>
-          <c:min val="0"/>
-        </c:scaling>
-        <c:delete val="0"/>
-        <c:axPos val="r"/>
-        <c:numFmt formatCode="General" sourceLinked="0"/>
-        <c:majorTickMark val="out"/>
-        <c:minorTickMark val="none"/>
-        <c:tickLblPos val="nextTo"/>
-        <c:spPr>
-          <a:ln w="12700" cap="flat">
-            <a:solidFill>
-              <a:srgbClr val="888888"/>
-            </a:solidFill>
-            <a:prstDash val="solid"/>
-            <a:round/>
-          </a:ln>
-        </c:spPr>
-        <c:txPr>
-          <a:bodyPr/>
-          <a:lstStyle/>
-          <a:p>
-            <a:pPr>
-              <a:defRPr sz="1000" b="0" i="0" u="none" strike="noStrike">
-                <a:solidFill>
-                  <a:srgbClr val="C8102E"/>
-                </a:solidFill>
-                <a:latin typeface="+mn-lt"/>
-              </a:defRPr>
-            </a:pPr>
-            <a:endParaRPr lang="en-US"/>
-          </a:p>
-        </c:txPr>
-        <c:crossAx val="2094734555"/>
-        <c:crosses val="max"/>
-        <c:crossBetween val="between"/>
-        <c:majorUnit val="25"/>
-      </c:valAx>
-      <c:catAx>
-        <c:axId val="2094734555"/>
-        <c:scaling>
-          <c:orientation val="minMax"/>
-        </c:scaling>
-        <c:delete val="1"/>
-        <c:axPos val="b"/>
-        <c:numFmt formatCode="General" sourceLinked="1"/>
-        <c:majorTickMark val="out"/>
-        <c:minorTickMark val="none"/>
-        <c:tickLblPos val="low"/>
-        <c:spPr>
-          <a:ln w="12700" cap="flat">
-            <a:solidFill>
-              <a:srgbClr val="888888"/>
-            </a:solidFill>
-            <a:prstDash val="solid"/>
-            <a:round/>
-          </a:ln>
-        </c:spPr>
-        <c:txPr>
-          <a:bodyPr/>
-          <a:lstStyle/>
-          <a:p>
-            <a:pPr>
-              <a:defRPr sz="1100" b="0" i="0" u="none" strike="noStrike">
-                <a:solidFill>
-                  <a:srgbClr val="404040"/>
-                </a:solidFill>
-                <a:latin typeface="+mn-lt"/>
-              </a:defRPr>
-            </a:pPr>
-            <a:endParaRPr lang="en-US"/>
-          </a:p>
-        </c:txPr>
-        <c:crossAx val="2094734553"/>
-        <c:crosses val="autoZero"/>
-        <c:auto val="1"/>
-        <c:lblAlgn val="ctr"/>
-        <c:noMultiLvlLbl val="1"/>
-      </c:catAx>
       <c:spPr>
         <a:noFill/>
         <a:ln>
@@ -5484,7 +5345,74 @@
       </p:graphicFrame>
       <p:sp>
         <p:nvSpPr>
-          <p:cNvPr id="7" name="Text 3"/>
+          <p:cNvPr id="7" name="uplift-callout"/>
+          <p:cNvSpPr txBox="1"/>
+          <p:nvPr/>
+        </p:nvSpPr>
+        <p:spPr>
+          <a:xfrm>
+            <a:off x="8412480" y="3429000"/>
+            <a:ext cx="3200400" cy="548640"/>
+          </a:xfrm>
+          <a:prstGeom prst="rect">
+            <a:avLst/>
+          </a:prstGeom>
+          <a:solidFill>
+            <a:srgbClr val="FFFFFF"/>
+          </a:solidFill>
+          <a:ln w="9525">
+            <a:solidFill>
+              <a:srgbClr val="D9D9D9"/>
+            </a:solidFill>
+          </a:ln>
+        </p:spPr>
+        <p:txBody>
+          <a:bodyPr wrap="square" lIns="25400" tIns="76200" rIns="76200" bIns="25400" rtlCol="0" anchor="ctr"/>
+          <a:lstStyle/>
+          <a:p>
+            <a:pPr indent="0" marL="0">
+              <a:buNone/>
+            </a:pPr>
+            <a:r>
+              <a:rPr lang="en-US" sz="1000" dirty="0">
+                <a:solidFill>
+                  <a:srgbClr val="404040"/>
+                </a:solidFill>
+              </a:rPr>
+              <a:t>48時間合計（概算）</a:t>
+            </a:r>
+            <a:endParaRPr lang="en-US" sz="1000" dirty="0"/>
+          </a:p>
+          <a:p>
+            <a:pPr indent="0" marL="0">
+              <a:buNone/>
+            </a:pPr>
+            <a:r>
+              <a:rPr lang="en-US" sz="1200" dirty="0">
+                <a:solidFill>
+                  <a:srgbClr val="222222"/>
+                </a:solidFill>
+              </a:rPr>
+              <a:t>実績 18.9K → </a:t>
+            </a:r>
+            <a:pPr indent="0" marL="0">
+              <a:buNone/>
+            </a:pPr>
+            <a:r>
+              <a:rPr lang="en-US" sz="1200" b="1" dirty="0">
+                <a:solidFill>
+                  <a:srgbClr val="C8102E"/>
+                </a:solidFill>
+              </a:rPr>
+              <a:t>31.8K（約1.7倍）</a:t>
+            </a:r>
+            <a:endParaRPr lang="en-US" sz="1000" dirty="0"/>
+          </a:p>
+        </p:txBody>
+      </p:sp>
+      <p:sp>
+        <p:nvSpPr>
+          <p:cNvPr id="8" name="Text 4"/>
           <p:cNvSpPr txBox="1"/>
           <p:nvPr/>
         </p:nvSpPr>
@@ -5512,7 +5440,7 @@
                   <a:srgbClr val="7F7F7F"/>
                 </a:solidFill>
               </a:rPr>
-              <a:t>※日別・時間別の値はXアナリティクスのグラフからの目視読み取りによる概算（10/14はツールチップ実数）。10/23はイベント動画投稿、10/26はリマインド＋本家グッズアカウントRP</a:t>
+              <a:t>※値はXアナリティクスのグラフ目視読み取りの概算。17時投稿の想定は、実績を12-14時台投稿と仮定し、競合調査の平均ビュー比（15-17時台÷12-14時台＝1.69倍）で換算</a:t>
             </a:r>
             <a:endParaRPr lang="en-US" sz="1000" dirty="0"/>
           </a:p>

--- a/OWV_リマインド・リポスト目標設計.pptx
+++ b/OWV_リマインド・リポスト目標設計.pptx
@@ -110,7 +110,7 @@
   <p:extLst>
     <p:ext uri="{521415D9-36F7-43E2-AB2F-B90AF26B5E84}">
       <p14:sectionLst xmlns:p14="http://schemas.microsoft.com/office/powerpoint/2010/main">
-        <p14:section name="OWV CP リマインド設計" id="{99e6fc45-0079-e9c9-aca9-c82862fdcb6f}">
+        <p14:section name="OWV CP リマインド設計" id="{34a514e6-1b76-8762-a47e-18358f3372b0}">
           <p14:sldIdLst>
             <p14:sldId id="256"/>
             <p14:sldId id="257"/>
@@ -644,7 +644,7 @@
                 </a:solidFill>
                 <a:latin typeface="+mn-lt"/>
               </a:rPr>
-              <a:t>最初の48時間 1時間ごとのインプレッション（K）</a:t>
+              <a:t>最初の48時間 インプレッション（K）と累計割合</a:t>
             </a:r>
           </a:p>
         </c:rich>
@@ -1395,6 +1395,415 @@
         <c:axId val="2094734552"/>
         <c:axId val="2094734556"/>
       </c:barChart>
+      <c:lineChart>
+        <c:varyColors val="0"/>
+        <c:ser>
+          <c:idx val="2"/>
+          <c:order val="2"/>
+          <c:tx>
+            <c:strRef>
+              <c:f>Sheet1!$D$1</c:f>
+              <c:strCache>
+                <c:ptCount val="1"/>
+                <c:pt idx="0">
+                  <c:v>累計割合（%）</c:v>
+                </c:pt>
+              </c:strCache>
+            </c:strRef>
+          </c:tx>
+          <c:spPr>
+            <a:solidFill>
+              <a:srgbClr val="E89A2C"/>
+            </a:solidFill>
+            <a:ln w="31750" cap="flat">
+              <a:solidFill>
+                <a:srgbClr val="E89A2C"/>
+              </a:solidFill>
+              <a:prstDash val="solid"/>
+              <a:round/>
+            </a:ln>
+            <a:effectLst/>
+          </c:spPr>
+          <c:invertIfNegative val="0"/>
+          <c:dLbls>
+            <c:numFmt formatCode="#,##0" sourceLinked="0"/>
+            <c:txPr>
+              <a:bodyPr/>
+              <a:lstStyle/>
+              <a:p>
+                <a:pPr>
+                  <a:defRPr b="0" i="0" strike="noStrike" sz="1100" u="none">
+                    <a:solidFill>
+                      <a:srgbClr val="000000"/>
+                    </a:solidFill>
+                    <a:latin typeface="+mn-lt"/>
+                  </a:defRPr>
+                </a:pPr>
+              </a:p>
+            </c:txPr>
+            <c:showLegendKey val="0"/>
+            <c:showVal val="0"/>
+            <c:showCatName val="0"/>
+            <c:showSerName val="0"/>
+            <c:showPercent val="0"/>
+            <c:showBubbleSize val="0"/>
+            <c:showLeaderLines val="0"/>
+          </c:dLbls>
+          <c:marker>
+            <c:symbol val="none"/>
+            <c:size val="6"/>
+            <c:spPr>
+              <a:solidFill>
+                <a:srgbClr val="E89A2C"/>
+              </a:solidFill>
+              <a:ln w="9525" cap="flat">
+                <a:solidFill>
+                  <a:srgbClr val="E89A2C"/>
+                </a:solidFill>
+                <a:prstDash val="solid"/>
+                <a:round/>
+              </a:ln>
+              <a:effectLst/>
+            </c:spPr>
+          </c:marker>
+          <c:cat>
+            <c:multiLvlStrRef>
+              <c:f>Sheet1!$A$2:$A$49</c:f>
+              <c:multiLvlStrCache>
+                <c:ptCount val="48"/>
+                <c:lvl>
+                  <c:pt idx="0">
+                    <c:v>0h</c:v>
+                  </c:pt>
+                  <c:pt idx="1">
+                    <c:v>1h</c:v>
+                  </c:pt>
+                  <c:pt idx="2">
+                    <c:v>2h</c:v>
+                  </c:pt>
+                  <c:pt idx="3">
+                    <c:v>3h</c:v>
+                  </c:pt>
+                  <c:pt idx="4">
+                    <c:v>4h</c:v>
+                  </c:pt>
+                  <c:pt idx="5">
+                    <c:v>5h</c:v>
+                  </c:pt>
+                  <c:pt idx="6">
+                    <c:v>6h</c:v>
+                  </c:pt>
+                  <c:pt idx="7">
+                    <c:v>7h</c:v>
+                  </c:pt>
+                  <c:pt idx="8">
+                    <c:v>8h</c:v>
+                  </c:pt>
+                  <c:pt idx="9">
+                    <c:v>9h</c:v>
+                  </c:pt>
+                  <c:pt idx="10">
+                    <c:v>10h</c:v>
+                  </c:pt>
+                  <c:pt idx="11">
+                    <c:v>11h</c:v>
+                  </c:pt>
+                  <c:pt idx="12">
+                    <c:v>12h</c:v>
+                  </c:pt>
+                  <c:pt idx="13">
+                    <c:v>13h</c:v>
+                  </c:pt>
+                  <c:pt idx="14">
+                    <c:v>14h</c:v>
+                  </c:pt>
+                  <c:pt idx="15">
+                    <c:v>15h</c:v>
+                  </c:pt>
+                  <c:pt idx="16">
+                    <c:v>16h</c:v>
+                  </c:pt>
+                  <c:pt idx="17">
+                    <c:v>17h</c:v>
+                  </c:pt>
+                  <c:pt idx="18">
+                    <c:v>18h</c:v>
+                  </c:pt>
+                  <c:pt idx="19">
+                    <c:v>19h</c:v>
+                  </c:pt>
+                  <c:pt idx="20">
+                    <c:v>20h</c:v>
+                  </c:pt>
+                  <c:pt idx="21">
+                    <c:v>21h</c:v>
+                  </c:pt>
+                  <c:pt idx="22">
+                    <c:v>22h</c:v>
+                  </c:pt>
+                  <c:pt idx="23">
+                    <c:v>23h</c:v>
+                  </c:pt>
+                  <c:pt idx="24">
+                    <c:v>24h</c:v>
+                  </c:pt>
+                  <c:pt idx="25">
+                    <c:v>25h</c:v>
+                  </c:pt>
+                  <c:pt idx="26">
+                    <c:v>26h</c:v>
+                  </c:pt>
+                  <c:pt idx="27">
+                    <c:v>27h</c:v>
+                  </c:pt>
+                  <c:pt idx="28">
+                    <c:v>28h</c:v>
+                  </c:pt>
+                  <c:pt idx="29">
+                    <c:v>29h</c:v>
+                  </c:pt>
+                  <c:pt idx="30">
+                    <c:v>30h</c:v>
+                  </c:pt>
+                  <c:pt idx="31">
+                    <c:v>31h</c:v>
+                  </c:pt>
+                  <c:pt idx="32">
+                    <c:v>32h</c:v>
+                  </c:pt>
+                  <c:pt idx="33">
+                    <c:v>33h</c:v>
+                  </c:pt>
+                  <c:pt idx="34">
+                    <c:v>34h</c:v>
+                  </c:pt>
+                  <c:pt idx="35">
+                    <c:v>35h</c:v>
+                  </c:pt>
+                  <c:pt idx="36">
+                    <c:v>36h</c:v>
+                  </c:pt>
+                  <c:pt idx="37">
+                    <c:v>37h</c:v>
+                  </c:pt>
+                  <c:pt idx="38">
+                    <c:v>38h</c:v>
+                  </c:pt>
+                  <c:pt idx="39">
+                    <c:v>39h</c:v>
+                  </c:pt>
+                  <c:pt idx="40">
+                    <c:v>40h</c:v>
+                  </c:pt>
+                  <c:pt idx="41">
+                    <c:v>41h</c:v>
+                  </c:pt>
+                  <c:pt idx="42">
+                    <c:v>42h</c:v>
+                  </c:pt>
+                  <c:pt idx="43">
+                    <c:v>43h</c:v>
+                  </c:pt>
+                  <c:pt idx="44">
+                    <c:v>44h</c:v>
+                  </c:pt>
+                  <c:pt idx="45">
+                    <c:v>45h</c:v>
+                  </c:pt>
+                  <c:pt idx="46">
+                    <c:v>46h</c:v>
+                  </c:pt>
+                  <c:pt idx="47">
+                    <c:v>47h</c:v>
+                  </c:pt>
+                </c:lvl>
+              </c:multiLvlStrCache>
+            </c:multiLvlStrRef>
+          </c:cat>
+          <c:val>
+            <c:numRef>
+              <c:f>Sheet1!$D$2:$D$49</c:f>
+              <c:numCache>
+                <c:formatCode>General</c:formatCode>
+                <c:ptCount val="48"/>
+                <c:pt idx="0">
+                  <c:v>5</c:v>
+                </c:pt>
+                <c:pt idx="1">
+                  <c:v>26</c:v>
+                </c:pt>
+                <c:pt idx="2">
+                  <c:v>34</c:v>
+                </c:pt>
+                <c:pt idx="3">
+                  <c:v>41</c:v>
+                </c:pt>
+                <c:pt idx="4">
+                  <c:v>47</c:v>
+                </c:pt>
+                <c:pt idx="5">
+                  <c:v>53</c:v>
+                </c:pt>
+                <c:pt idx="6">
+                  <c:v>59</c:v>
+                </c:pt>
+                <c:pt idx="7">
+                  <c:v>65</c:v>
+                </c:pt>
+                <c:pt idx="8">
+                  <c:v>70</c:v>
+                </c:pt>
+                <c:pt idx="9">
+                  <c:v>76</c:v>
+                </c:pt>
+                <c:pt idx="10">
+                  <c:v>81</c:v>
+                </c:pt>
+                <c:pt idx="11">
+                  <c:v>84</c:v>
+                </c:pt>
+                <c:pt idx="12">
+                  <c:v>86</c:v>
+                </c:pt>
+                <c:pt idx="13">
+                  <c:v>88</c:v>
+                </c:pt>
+                <c:pt idx="14">
+                  <c:v>89</c:v>
+                </c:pt>
+                <c:pt idx="15">
+                  <c:v>90</c:v>
+                </c:pt>
+                <c:pt idx="16">
+                  <c:v>90</c:v>
+                </c:pt>
+                <c:pt idx="17">
+                  <c:v>91</c:v>
+                </c:pt>
+                <c:pt idx="18">
+                  <c:v>91</c:v>
+                </c:pt>
+                <c:pt idx="19">
+                  <c:v>92</c:v>
+                </c:pt>
+                <c:pt idx="20">
+                  <c:v>92</c:v>
+                </c:pt>
+                <c:pt idx="21">
+                  <c:v>93</c:v>
+                </c:pt>
+                <c:pt idx="22">
+                  <c:v>93</c:v>
+                </c:pt>
+                <c:pt idx="23">
+                  <c:v>94</c:v>
+                </c:pt>
+                <c:pt idx="24">
+                  <c:v>95</c:v>
+                </c:pt>
+                <c:pt idx="25">
+                  <c:v>95</c:v>
+                </c:pt>
+                <c:pt idx="26">
+                  <c:v>96</c:v>
+                </c:pt>
+                <c:pt idx="27">
+                  <c:v>96</c:v>
+                </c:pt>
+                <c:pt idx="28">
+                  <c:v>96</c:v>
+                </c:pt>
+                <c:pt idx="29">
+                  <c:v>97</c:v>
+                </c:pt>
+                <c:pt idx="30">
+                  <c:v>97</c:v>
+                </c:pt>
+                <c:pt idx="31">
+                  <c:v>97</c:v>
+                </c:pt>
+                <c:pt idx="32">
+                  <c:v>98</c:v>
+                </c:pt>
+                <c:pt idx="33">
+                  <c:v>98</c:v>
+                </c:pt>
+                <c:pt idx="34">
+                  <c:v>98</c:v>
+                </c:pt>
+                <c:pt idx="35">
+                  <c:v>98</c:v>
+                </c:pt>
+                <c:pt idx="36">
+                  <c:v>99</c:v>
+                </c:pt>
+                <c:pt idx="37">
+                  <c:v>99</c:v>
+                </c:pt>
+                <c:pt idx="38">
+                  <c:v>99</c:v>
+                </c:pt>
+                <c:pt idx="39">
+                  <c:v>99</c:v>
+                </c:pt>
+                <c:pt idx="40">
+                  <c:v>99</c:v>
+                </c:pt>
+                <c:pt idx="41">
+                  <c:v>99</c:v>
+                </c:pt>
+                <c:pt idx="42">
+                  <c:v>99</c:v>
+                </c:pt>
+                <c:pt idx="43">
+                  <c:v>100</c:v>
+                </c:pt>
+                <c:pt idx="44">
+                  <c:v>100</c:v>
+                </c:pt>
+                <c:pt idx="45">
+                  <c:v>100</c:v>
+                </c:pt>
+                <c:pt idx="46">
+                  <c:v>100</c:v>
+                </c:pt>
+                <c:pt idx="47">
+                  <c:v>100</c:v>
+                </c:pt>
+              </c:numCache>
+            </c:numRef>
+          </c:val>
+          <c:smooth val="0"/>
+        </c:ser>
+        <c:dLbls>
+          <c:numFmt formatCode="#,##0" sourceLinked="0"/>
+          <c:txPr>
+            <a:bodyPr/>
+            <a:lstStyle/>
+            <a:p>
+              <a:pPr>
+                <a:defRPr b="0" i="0" strike="noStrike" sz="1100" u="none">
+                  <a:solidFill>
+                    <a:srgbClr val="000000"/>
+                  </a:solidFill>
+                  <a:latin typeface="+mn-lt"/>
+                </a:defRPr>
+              </a:pPr>
+            </a:p>
+          </c:txPr>
+          <c:showLegendKey val="0"/>
+          <c:showVal val="0"/>
+          <c:showCatName val="0"/>
+          <c:showSerName val="0"/>
+          <c:showPercent val="0"/>
+          <c:showBubbleSize val="0"/>
+          <c:showLeaderLines val="0"/>
+        </c:dLbls>
+        <c:marker val="1"/>
+        <c:axId val="2094734555"/>
+        <c:axId val="2094734553"/>
+        <c:axId val="2094734556"/>
+      </c:lineChart>
       <c:catAx>
         <c:axId val="2094734554"/>
         <c:scaling>
@@ -1490,6 +1899,89 @@
         <c:crossBetween val="between"/>
         <c:majorUnit val="1"/>
       </c:valAx>
+      <c:valAx>
+        <c:axId val="2094734553"/>
+        <c:scaling>
+          <c:orientation val="minMax"/>
+          <c:max val="100"/>
+          <c:min val="0"/>
+        </c:scaling>
+        <c:delete val="0"/>
+        <c:axPos val="r"/>
+        <c:numFmt formatCode="General" sourceLinked="0"/>
+        <c:majorTickMark val="out"/>
+        <c:minorTickMark val="none"/>
+        <c:tickLblPos val="nextTo"/>
+        <c:spPr>
+          <a:ln w="12700" cap="flat">
+            <a:solidFill>
+              <a:srgbClr val="888888"/>
+            </a:solidFill>
+            <a:prstDash val="solid"/>
+            <a:round/>
+          </a:ln>
+        </c:spPr>
+        <c:txPr>
+          <a:bodyPr/>
+          <a:lstStyle/>
+          <a:p>
+            <a:pPr>
+              <a:defRPr sz="1000" b="0" i="0" u="none" strike="noStrike">
+                <a:solidFill>
+                  <a:srgbClr val="C0761A"/>
+                </a:solidFill>
+                <a:latin typeface="+mn-lt"/>
+              </a:defRPr>
+            </a:pPr>
+            <a:endParaRPr lang="en-US"/>
+          </a:p>
+        </c:txPr>
+        <c:crossAx val="2094734555"/>
+        <c:crosses val="max"/>
+        <c:crossBetween val="between"/>
+        <c:majorUnit val="25"/>
+      </c:valAx>
+      <c:catAx>
+        <c:axId val="2094734555"/>
+        <c:scaling>
+          <c:orientation val="minMax"/>
+        </c:scaling>
+        <c:delete val="1"/>
+        <c:axPos val="b"/>
+        <c:numFmt formatCode="General" sourceLinked="1"/>
+        <c:majorTickMark val="out"/>
+        <c:minorTickMark val="none"/>
+        <c:tickLblPos val="low"/>
+        <c:spPr>
+          <a:ln w="12700" cap="flat">
+            <a:solidFill>
+              <a:srgbClr val="888888"/>
+            </a:solidFill>
+            <a:prstDash val="solid"/>
+            <a:round/>
+          </a:ln>
+        </c:spPr>
+        <c:txPr>
+          <a:bodyPr/>
+          <a:lstStyle/>
+          <a:p>
+            <a:pPr>
+              <a:defRPr sz="1100" b="0" i="0" u="none" strike="noStrike">
+                <a:solidFill>
+                  <a:srgbClr val="404040"/>
+                </a:solidFill>
+                <a:latin typeface="+mn-lt"/>
+              </a:defRPr>
+            </a:pPr>
+            <a:endParaRPr lang="en-US"/>
+          </a:p>
+        </c:txPr>
+        <c:crossAx val="2094734553"/>
+        <c:crosses val="autoZero"/>
+        <c:auto val="1"/>
+        <c:lblAlgn val="ctr"/>
+        <c:noMultiLvlLbl val="1"/>
+      </c:catAx>
       <c:spPr>
         <a:noFill/>
         <a:ln>
@@ -1506,7 +1998,7 @@
         <a:lstStyle/>
         <a:p>
           <a:pPr>
-            <a:defRPr sz="1100">
+            <a:defRPr sz="1000">
               <a:latin typeface="+mn-lt"/>
               <a:cs typeface="+mn-lt"/>
             </a:defRPr>
@@ -5351,8 +5843,8 @@
         </p:nvSpPr>
         <p:spPr>
           <a:xfrm>
-            <a:off x="8412480" y="3429000"/>
-            <a:ext cx="3200400" cy="548640"/>
+            <a:off x="8229600" y="4617720"/>
+            <a:ext cx="3017520" cy="548640"/>
           </a:xfrm>
           <a:prstGeom prst="rect">
             <a:avLst/>
@@ -5440,7 +5932,7 @@
                   <a:srgbClr val="7F7F7F"/>
                 </a:solidFill>
               </a:rPr>
-              <a:t>※値はXアナリティクスのグラフ目視読み取りの概算。17時投稿の想定は、実績を12-14時台投稿と仮定し、競合調査の平均ビュー比（15-17時台÷12-14時台＝1.69倍）で換算</a:t>
+              <a:t>※値はグラフ目視読み取りの概算。17時投稿の想定：実績を12-14時台投稿と仮定し、競合調査の平均ビュー比1.69倍（15-17時台÷12-14時台）で換算</a:t>
             </a:r>
             <a:endParaRPr lang="en-US" sz="1000" dirty="0"/>
           </a:p>

--- a/OWV_リマインド・リポスト目標設計.pptx
+++ b/OWV_リマインド・リポスト目標設計.pptx
@@ -9,9 +9,10 @@
     <p:sldId id="257" r:id="rId3"/>
     <p:sldId id="258" r:id="rId4"/>
     <p:sldId id="259" r:id="rId5"/>
+    <p:sldId id="260" r:id="rId6"/>
   </p:sldIdLst>
   <p:notesMasterIdLst>
-    <p:notesMasterId r:id="rId6"/>
+    <p:notesMasterId r:id="rId7"/>
   </p:notesMasterIdLst>
   <p:sldSz cx="12192000" cy="6858000"/>
   <p:notesSz cx="6858000" cy="12192000"/>
@@ -110,12 +111,13 @@
   <p:extLst>
     <p:ext uri="{521415D9-36F7-43E2-AB2F-B90AF26B5E84}">
       <p14:sectionLst xmlns:p14="http://schemas.microsoft.com/office/powerpoint/2010/main">
-        <p14:section name="OWV CP リマインド設計" id="{34a514e6-1b76-8762-a47e-18358f3372b0}">
+        <p14:section name="OWV CP リマインド設計" id="{1ce354cd-c976-dfff-a999-663c8ae2090b}">
           <p14:sldIdLst>
             <p14:sldId id="256"/>
             <p14:sldId id="257"/>
             <p14:sldId id="258"/>
             <p14:sldId id="259"/>
+            <p14:sldId id="260"/>
           </p14:sldIdLst>
         </p14:section>
       </p14:sectionLst>
@@ -2387,6 +2389,894 @@
                 </a:solidFill>
                 <a:latin typeface="+mn-lt"/>
               </a:rPr>
+              <a:t>日別リポスト数の想定（新スケジュール）</a:t>
+            </a:r>
+          </a:p>
+        </c:rich>
+      </c:tx>
+      <c:layout/>
+      <c:overlay val="0"/>
+    </c:title>
+    <c:autoTitleDeleted val="0"/>
+    <c:plotArea>
+      <c:layout/>
+      <c:barChart>
+        <c:barDir val="col"/>
+        <c:grouping val="stacked"/>
+        <c:varyColors val="0"/>
+        <c:ser>
+          <c:idx val="0"/>
+          <c:order val="0"/>
+          <c:tx>
+            <c:strRef>
+              <c:f>Sheet1!$B$1</c:f>
+              <c:strCache>
+                <c:ptCount val="1"/>
+                <c:pt idx="0">
+                  <c:v>自然減衰（ベース）</c:v>
+                </c:pt>
+              </c:strCache>
+            </c:strRef>
+          </c:tx>
+          <c:spPr>
+            <a:solidFill>
+              <a:srgbClr val="A6A6A6"/>
+            </a:solidFill>
+            <a:effectLst/>
+          </c:spPr>
+          <c:invertIfNegative val="0"/>
+          <c:dLbls>
+            <c:numFmt formatCode="#,##0" sourceLinked="0"/>
+            <c:txPr>
+              <a:bodyPr/>
+              <a:lstStyle/>
+              <a:p>
+                <a:pPr>
+                  <a:defRPr b="0" i="0" strike="noStrike" sz="1100" u="none">
+                    <a:solidFill>
+                      <a:srgbClr val="000000"/>
+                    </a:solidFill>
+                    <a:latin typeface="+mn-lt"/>
+                  </a:defRPr>
+                </a:pPr>
+              </a:p>
+            </c:txPr>
+            <c:showLegendKey val="0"/>
+            <c:showVal val="0"/>
+            <c:showCatName val="0"/>
+            <c:showSerName val="0"/>
+            <c:showPercent val="0"/>
+            <c:showBubbleSize val="0"/>
+            <c:showLeaderLines val="0"/>
+          </c:dLbls>
+          <c:cat>
+            <c:multiLvlStrRef>
+              <c:f>Sheet1!$A$2:$A$28</c:f>
+              <c:multiLvlStrCache>
+                <c:ptCount val="27"/>
+                <c:lvl>
+                  <c:pt idx="0">
+                    <c:v>11/16</c:v>
+                  </c:pt>
+                  <c:pt idx="1">
+                    <c:v>11/17</c:v>
+                  </c:pt>
+                  <c:pt idx="2">
+                    <c:v>11/18</c:v>
+                  </c:pt>
+                  <c:pt idx="3">
+                    <c:v>11/19</c:v>
+                  </c:pt>
+                  <c:pt idx="4">
+                    <c:v>11/20</c:v>
+                  </c:pt>
+                  <c:pt idx="5">
+                    <c:v>11/21</c:v>
+                  </c:pt>
+                  <c:pt idx="6">
+                    <c:v>11/22</c:v>
+                  </c:pt>
+                  <c:pt idx="7">
+                    <c:v>11/23</c:v>
+                  </c:pt>
+                  <c:pt idx="8">
+                    <c:v>11/24</c:v>
+                  </c:pt>
+                  <c:pt idx="9">
+                    <c:v>11/25</c:v>
+                  </c:pt>
+                  <c:pt idx="10">
+                    <c:v>11/26</c:v>
+                  </c:pt>
+                  <c:pt idx="11">
+                    <c:v>11/27</c:v>
+                  </c:pt>
+                  <c:pt idx="12">
+                    <c:v>11/28</c:v>
+                  </c:pt>
+                  <c:pt idx="13">
+                    <c:v>11/29</c:v>
+                  </c:pt>
+                  <c:pt idx="14">
+                    <c:v>11/30</c:v>
+                  </c:pt>
+                  <c:pt idx="15">
+                    <c:v>12/1</c:v>
+                  </c:pt>
+                  <c:pt idx="16">
+                    <c:v>12/2</c:v>
+                  </c:pt>
+                  <c:pt idx="17">
+                    <c:v>12/3</c:v>
+                  </c:pt>
+                  <c:pt idx="18">
+                    <c:v>12/4</c:v>
+                  </c:pt>
+                  <c:pt idx="19">
+                    <c:v>12/5</c:v>
+                  </c:pt>
+                  <c:pt idx="20">
+                    <c:v>12/6</c:v>
+                  </c:pt>
+                  <c:pt idx="21">
+                    <c:v>12/7</c:v>
+                  </c:pt>
+                  <c:pt idx="22">
+                    <c:v>12/8</c:v>
+                  </c:pt>
+                  <c:pt idx="23">
+                    <c:v>12/9</c:v>
+                  </c:pt>
+                  <c:pt idx="24">
+                    <c:v>12/10</c:v>
+                  </c:pt>
+                  <c:pt idx="25">
+                    <c:v>12/11</c:v>
+                  </c:pt>
+                  <c:pt idx="26">
+                    <c:v>12/12</c:v>
+                  </c:pt>
+                </c:lvl>
+              </c:multiLvlStrCache>
+            </c:multiLvlStrRef>
+          </c:cat>
+          <c:val>
+            <c:numRef>
+              <c:f>Sheet1!$B$2:$B$28</c:f>
+              <c:numCache>
+                <c:formatCode>General</c:formatCode>
+                <c:ptCount val="27"/>
+                <c:pt idx="0">
+                  <c:v>650</c:v>
+                </c:pt>
+                <c:pt idx="1">
+                  <c:v>52</c:v>
+                </c:pt>
+                <c:pt idx="2">
+                  <c:v>26</c:v>
+                </c:pt>
+                <c:pt idx="3">
+                  <c:v>13</c:v>
+                </c:pt>
+                <c:pt idx="4">
+                  <c:v>13</c:v>
+                </c:pt>
+                <c:pt idx="5">
+                  <c:v>13</c:v>
+                </c:pt>
+                <c:pt idx="6">
+                  <c:v>13</c:v>
+                </c:pt>
+                <c:pt idx="7">
+                  <c:v>13</c:v>
+                </c:pt>
+                <c:pt idx="8">
+                  <c:v>13</c:v>
+                </c:pt>
+                <c:pt idx="9">
+                  <c:v>13</c:v>
+                </c:pt>
+                <c:pt idx="10">
+                  <c:v>13</c:v>
+                </c:pt>
+                <c:pt idx="11">
+                  <c:v>13</c:v>
+                </c:pt>
+                <c:pt idx="12">
+                  <c:v>13</c:v>
+                </c:pt>
+                <c:pt idx="13">
+                  <c:v>13</c:v>
+                </c:pt>
+                <c:pt idx="14">
+                  <c:v>13</c:v>
+                </c:pt>
+                <c:pt idx="15">
+                  <c:v>13</c:v>
+                </c:pt>
+                <c:pt idx="16">
+                  <c:v>13</c:v>
+                </c:pt>
+                <c:pt idx="17">
+                  <c:v>13</c:v>
+                </c:pt>
+                <c:pt idx="18">
+                  <c:v>13</c:v>
+                </c:pt>
+                <c:pt idx="19">
+                  <c:v>13</c:v>
+                </c:pt>
+                <c:pt idx="20">
+                  <c:v>13</c:v>
+                </c:pt>
+                <c:pt idx="21">
+                  <c:v>13</c:v>
+                </c:pt>
+                <c:pt idx="22">
+                  <c:v>13</c:v>
+                </c:pt>
+                <c:pt idx="23">
+                  <c:v>13</c:v>
+                </c:pt>
+                <c:pt idx="24">
+                  <c:v>13</c:v>
+                </c:pt>
+                <c:pt idx="25">
+                  <c:v>13</c:v>
+                </c:pt>
+                <c:pt idx="26">
+                  <c:v>13</c:v>
+                </c:pt>
+              </c:numCache>
+            </c:numRef>
+          </c:val>
+        </c:ser>
+        <c:ser>
+          <c:idx val="1"/>
+          <c:order val="1"/>
+          <c:tx>
+            <c:strRef>
+              <c:f>Sheet1!$C$1</c:f>
+              <c:strCache>
+                <c:ptCount val="1"/>
+                <c:pt idx="0">
+                  <c:v>17時投稿の上乗せ</c:v>
+                </c:pt>
+              </c:strCache>
+            </c:strRef>
+          </c:tx>
+          <c:spPr>
+            <a:solidFill>
+              <a:srgbClr val="C8102E"/>
+            </a:solidFill>
+            <a:effectLst/>
+          </c:spPr>
+          <c:invertIfNegative val="0"/>
+          <c:dLbls>
+            <c:numFmt formatCode="#,##0" sourceLinked="0"/>
+            <c:txPr>
+              <a:bodyPr/>
+              <a:lstStyle/>
+              <a:p>
+                <a:pPr>
+                  <a:defRPr b="0" i="0" strike="noStrike" sz="1100" u="none">
+                    <a:solidFill>
+                      <a:srgbClr val="000000"/>
+                    </a:solidFill>
+                    <a:latin typeface="+mn-lt"/>
+                  </a:defRPr>
+                </a:pPr>
+              </a:p>
+            </c:txPr>
+            <c:showLegendKey val="0"/>
+            <c:showVal val="0"/>
+            <c:showCatName val="0"/>
+            <c:showSerName val="0"/>
+            <c:showPercent val="0"/>
+            <c:showBubbleSize val="0"/>
+            <c:showLeaderLines val="0"/>
+          </c:dLbls>
+          <c:cat>
+            <c:multiLvlStrRef>
+              <c:f>Sheet1!$A$2:$A$28</c:f>
+              <c:multiLvlStrCache>
+                <c:ptCount val="27"/>
+                <c:lvl>
+                  <c:pt idx="0">
+                    <c:v>11/16</c:v>
+                  </c:pt>
+                  <c:pt idx="1">
+                    <c:v>11/17</c:v>
+                  </c:pt>
+                  <c:pt idx="2">
+                    <c:v>11/18</c:v>
+                  </c:pt>
+                  <c:pt idx="3">
+                    <c:v>11/19</c:v>
+                  </c:pt>
+                  <c:pt idx="4">
+                    <c:v>11/20</c:v>
+                  </c:pt>
+                  <c:pt idx="5">
+                    <c:v>11/21</c:v>
+                  </c:pt>
+                  <c:pt idx="6">
+                    <c:v>11/22</c:v>
+                  </c:pt>
+                  <c:pt idx="7">
+                    <c:v>11/23</c:v>
+                  </c:pt>
+                  <c:pt idx="8">
+                    <c:v>11/24</c:v>
+                  </c:pt>
+                  <c:pt idx="9">
+                    <c:v>11/25</c:v>
+                  </c:pt>
+                  <c:pt idx="10">
+                    <c:v>11/26</c:v>
+                  </c:pt>
+                  <c:pt idx="11">
+                    <c:v>11/27</c:v>
+                  </c:pt>
+                  <c:pt idx="12">
+                    <c:v>11/28</c:v>
+                  </c:pt>
+                  <c:pt idx="13">
+                    <c:v>11/29</c:v>
+                  </c:pt>
+                  <c:pt idx="14">
+                    <c:v>11/30</c:v>
+                  </c:pt>
+                  <c:pt idx="15">
+                    <c:v>12/1</c:v>
+                  </c:pt>
+                  <c:pt idx="16">
+                    <c:v>12/2</c:v>
+                  </c:pt>
+                  <c:pt idx="17">
+                    <c:v>12/3</c:v>
+                  </c:pt>
+                  <c:pt idx="18">
+                    <c:v>12/4</c:v>
+                  </c:pt>
+                  <c:pt idx="19">
+                    <c:v>12/5</c:v>
+                  </c:pt>
+                  <c:pt idx="20">
+                    <c:v>12/6</c:v>
+                  </c:pt>
+                  <c:pt idx="21">
+                    <c:v>12/7</c:v>
+                  </c:pt>
+                  <c:pt idx="22">
+                    <c:v>12/8</c:v>
+                  </c:pt>
+                  <c:pt idx="23">
+                    <c:v>12/9</c:v>
+                  </c:pt>
+                  <c:pt idx="24">
+                    <c:v>12/10</c:v>
+                  </c:pt>
+                  <c:pt idx="25">
+                    <c:v>12/11</c:v>
+                  </c:pt>
+                  <c:pt idx="26">
+                    <c:v>12/12</c:v>
+                  </c:pt>
+                </c:lvl>
+              </c:multiLvlStrCache>
+            </c:multiLvlStrRef>
+          </c:cat>
+          <c:val>
+            <c:numRef>
+              <c:f>Sheet1!$C$2:$C$28</c:f>
+              <c:numCache>
+                <c:formatCode>General</c:formatCode>
+                <c:ptCount val="27"/>
+                <c:pt idx="0">
+                  <c:v>0</c:v>
+                </c:pt>
+                <c:pt idx="1">
+                  <c:v>65</c:v>
+                </c:pt>
+                <c:pt idx="2">
+                  <c:v>0</c:v>
+                </c:pt>
+                <c:pt idx="3">
+                  <c:v>91</c:v>
+                </c:pt>
+                <c:pt idx="4">
+                  <c:v>0</c:v>
+                </c:pt>
+                <c:pt idx="5">
+                  <c:v>0</c:v>
+                </c:pt>
+                <c:pt idx="6">
+                  <c:v>0</c:v>
+                </c:pt>
+                <c:pt idx="7">
+                  <c:v>91</c:v>
+                </c:pt>
+                <c:pt idx="8">
+                  <c:v>0</c:v>
+                </c:pt>
+                <c:pt idx="9">
+                  <c:v>0</c:v>
+                </c:pt>
+                <c:pt idx="10">
+                  <c:v>0</c:v>
+                </c:pt>
+                <c:pt idx="11">
+                  <c:v>0</c:v>
+                </c:pt>
+                <c:pt idx="12">
+                  <c:v>0</c:v>
+                </c:pt>
+                <c:pt idx="13">
+                  <c:v>195</c:v>
+                </c:pt>
+                <c:pt idx="14">
+                  <c:v>0</c:v>
+                </c:pt>
+                <c:pt idx="15">
+                  <c:v>0</c:v>
+                </c:pt>
+                <c:pt idx="16">
+                  <c:v>0</c:v>
+                </c:pt>
+                <c:pt idx="17">
+                  <c:v>0</c:v>
+                </c:pt>
+                <c:pt idx="18">
+                  <c:v>0</c:v>
+                </c:pt>
+                <c:pt idx="19">
+                  <c:v>0</c:v>
+                </c:pt>
+                <c:pt idx="20">
+                  <c:v>65</c:v>
+                </c:pt>
+                <c:pt idx="21">
+                  <c:v>0</c:v>
+                </c:pt>
+                <c:pt idx="22">
+                  <c:v>0</c:v>
+                </c:pt>
+                <c:pt idx="23">
+                  <c:v>0</c:v>
+                </c:pt>
+                <c:pt idx="24">
+                  <c:v>65</c:v>
+                </c:pt>
+                <c:pt idx="25">
+                  <c:v>195</c:v>
+                </c:pt>
+                <c:pt idx="26">
+                  <c:v>0</c:v>
+                </c:pt>
+              </c:numCache>
+            </c:numRef>
+          </c:val>
+        </c:ser>
+        <c:ser>
+          <c:idx val="2"/>
+          <c:order val="2"/>
+          <c:tx>
+            <c:strRef>
+              <c:f>Sheet1!$D$1</c:f>
+              <c:strCache>
+                <c:ptCount val="1"/>
+                <c:pt idx="0">
+                  <c:v>12時投稿の上乗せ（AB）</c:v>
+                </c:pt>
+              </c:strCache>
+            </c:strRef>
+          </c:tx>
+          <c:spPr>
+            <a:solidFill>
+              <a:srgbClr val="F2A7B0"/>
+            </a:solidFill>
+            <a:effectLst/>
+          </c:spPr>
+          <c:invertIfNegative val="0"/>
+          <c:dLbls>
+            <c:numFmt formatCode="#,##0" sourceLinked="0"/>
+            <c:txPr>
+              <a:bodyPr/>
+              <a:lstStyle/>
+              <a:p>
+                <a:pPr>
+                  <a:defRPr b="0" i="0" strike="noStrike" sz="1100" u="none">
+                    <a:solidFill>
+                      <a:srgbClr val="000000"/>
+                    </a:solidFill>
+                    <a:latin typeface="+mn-lt"/>
+                  </a:defRPr>
+                </a:pPr>
+              </a:p>
+            </c:txPr>
+            <c:showLegendKey val="0"/>
+            <c:showVal val="0"/>
+            <c:showCatName val="0"/>
+            <c:showSerName val="0"/>
+            <c:showPercent val="0"/>
+            <c:showBubbleSize val="0"/>
+            <c:showLeaderLines val="0"/>
+          </c:dLbls>
+          <c:cat>
+            <c:multiLvlStrRef>
+              <c:f>Sheet1!$A$2:$A$28</c:f>
+              <c:multiLvlStrCache>
+                <c:ptCount val="27"/>
+                <c:lvl>
+                  <c:pt idx="0">
+                    <c:v>11/16</c:v>
+                  </c:pt>
+                  <c:pt idx="1">
+                    <c:v>11/17</c:v>
+                  </c:pt>
+                  <c:pt idx="2">
+                    <c:v>11/18</c:v>
+                  </c:pt>
+                  <c:pt idx="3">
+                    <c:v>11/19</c:v>
+                  </c:pt>
+                  <c:pt idx="4">
+                    <c:v>11/20</c:v>
+                  </c:pt>
+                  <c:pt idx="5">
+                    <c:v>11/21</c:v>
+                  </c:pt>
+                  <c:pt idx="6">
+                    <c:v>11/22</c:v>
+                  </c:pt>
+                  <c:pt idx="7">
+                    <c:v>11/23</c:v>
+                  </c:pt>
+                  <c:pt idx="8">
+                    <c:v>11/24</c:v>
+                  </c:pt>
+                  <c:pt idx="9">
+                    <c:v>11/25</c:v>
+                  </c:pt>
+                  <c:pt idx="10">
+                    <c:v>11/26</c:v>
+                  </c:pt>
+                  <c:pt idx="11">
+                    <c:v>11/27</c:v>
+                  </c:pt>
+                  <c:pt idx="12">
+                    <c:v>11/28</c:v>
+                  </c:pt>
+                  <c:pt idx="13">
+                    <c:v>11/29</c:v>
+                  </c:pt>
+                  <c:pt idx="14">
+                    <c:v>11/30</c:v>
+                  </c:pt>
+                  <c:pt idx="15">
+                    <c:v>12/1</c:v>
+                  </c:pt>
+                  <c:pt idx="16">
+                    <c:v>12/2</c:v>
+                  </c:pt>
+                  <c:pt idx="17">
+                    <c:v>12/3</c:v>
+                  </c:pt>
+                  <c:pt idx="18">
+                    <c:v>12/4</c:v>
+                  </c:pt>
+                  <c:pt idx="19">
+                    <c:v>12/5</c:v>
+                  </c:pt>
+                  <c:pt idx="20">
+                    <c:v>12/6</c:v>
+                  </c:pt>
+                  <c:pt idx="21">
+                    <c:v>12/7</c:v>
+                  </c:pt>
+                  <c:pt idx="22">
+                    <c:v>12/8</c:v>
+                  </c:pt>
+                  <c:pt idx="23">
+                    <c:v>12/9</c:v>
+                  </c:pt>
+                  <c:pt idx="24">
+                    <c:v>12/10</c:v>
+                  </c:pt>
+                  <c:pt idx="25">
+                    <c:v>12/11</c:v>
+                  </c:pt>
+                  <c:pt idx="26">
+                    <c:v>12/12</c:v>
+                  </c:pt>
+                </c:lvl>
+              </c:multiLvlStrCache>
+            </c:multiLvlStrRef>
+          </c:cat>
+          <c:val>
+            <c:numRef>
+              <c:f>Sheet1!$D$2:$D$28</c:f>
+              <c:numCache>
+                <c:formatCode>General</c:formatCode>
+                <c:ptCount val="27"/>
+                <c:pt idx="0">
+                  <c:v>0</c:v>
+                </c:pt>
+                <c:pt idx="1">
+                  <c:v>0</c:v>
+                </c:pt>
+                <c:pt idx="2">
+                  <c:v>0</c:v>
+                </c:pt>
+                <c:pt idx="3">
+                  <c:v>0</c:v>
+                </c:pt>
+                <c:pt idx="4">
+                  <c:v>0</c:v>
+                </c:pt>
+                <c:pt idx="5">
+                  <c:v>0</c:v>
+                </c:pt>
+                <c:pt idx="6">
+                  <c:v>0</c:v>
+                </c:pt>
+                <c:pt idx="7">
+                  <c:v>0</c:v>
+                </c:pt>
+                <c:pt idx="8">
+                  <c:v>0</c:v>
+                </c:pt>
+                <c:pt idx="9">
+                  <c:v>0</c:v>
+                </c:pt>
+                <c:pt idx="10">
+                  <c:v>39</c:v>
+                </c:pt>
+                <c:pt idx="11">
+                  <c:v>0</c:v>
+                </c:pt>
+                <c:pt idx="12">
+                  <c:v>0</c:v>
+                </c:pt>
+                <c:pt idx="13">
+                  <c:v>0</c:v>
+                </c:pt>
+                <c:pt idx="14">
+                  <c:v>0</c:v>
+                </c:pt>
+                <c:pt idx="15">
+                  <c:v>0</c:v>
+                </c:pt>
+                <c:pt idx="16">
+                  <c:v>0</c:v>
+                </c:pt>
+                <c:pt idx="17">
+                  <c:v>54</c:v>
+                </c:pt>
+                <c:pt idx="18">
+                  <c:v>0</c:v>
+                </c:pt>
+                <c:pt idx="19">
+                  <c:v>0</c:v>
+                </c:pt>
+                <c:pt idx="20">
+                  <c:v>0</c:v>
+                </c:pt>
+                <c:pt idx="21">
+                  <c:v>0</c:v>
+                </c:pt>
+                <c:pt idx="22">
+                  <c:v>0</c:v>
+                </c:pt>
+                <c:pt idx="23">
+                  <c:v>0</c:v>
+                </c:pt>
+                <c:pt idx="24">
+                  <c:v>0</c:v>
+                </c:pt>
+                <c:pt idx="25">
+                  <c:v>0</c:v>
+                </c:pt>
+                <c:pt idx="26">
+                  <c:v>58</c:v>
+                </c:pt>
+              </c:numCache>
+            </c:numRef>
+          </c:val>
+        </c:ser>
+        <c:dLbls>
+          <c:numFmt formatCode="#,##0" sourceLinked="0"/>
+          <c:txPr>
+            <a:bodyPr/>
+            <a:lstStyle/>
+            <a:p>
+              <a:pPr>
+                <a:defRPr b="0" i="0" strike="noStrike" sz="1100" u="none">
+                  <a:solidFill>
+                    <a:srgbClr val="000000"/>
+                  </a:solidFill>
+                  <a:latin typeface="+mn-lt"/>
+                </a:defRPr>
+              </a:pPr>
+            </a:p>
+          </c:txPr>
+          <c:showLegendKey val="0"/>
+          <c:showVal val="0"/>
+          <c:showCatName val="0"/>
+          <c:showSerName val="0"/>
+          <c:showPercent val="0"/>
+          <c:showBubbleSize val="0"/>
+          <c:showLeaderLines val="0"/>
+        </c:dLbls>
+        <c:gapWidth val="35"/>
+        <c:overlap val="100"/>
+        <c:axId val="2094734554"/>
+        <c:axId val="2094734552"/>
+        <c:axId val="2094734556"/>
+      </c:barChart>
+      <c:catAx>
+        <c:axId val="2094734554"/>
+        <c:scaling>
+          <c:orientation val="minMax"/>
+        </c:scaling>
+        <c:delete val="0"/>
+        <c:axPos val="b"/>
+        <c:numFmt formatCode="General" sourceLinked="1"/>
+        <c:majorTickMark val="out"/>
+        <c:minorTickMark val="none"/>
+        <c:tickLblPos val="low"/>
+        <c:spPr>
+          <a:ln w="12700" cap="flat">
+            <a:solidFill>
+              <a:srgbClr val="888888"/>
+            </a:solidFill>
+            <a:prstDash val="solid"/>
+            <a:round/>
+          </a:ln>
+        </c:spPr>
+        <c:txPr>
+          <a:bodyPr/>
+          <a:lstStyle/>
+          <a:p>
+            <a:pPr>
+              <a:defRPr sz="900" b="0" i="0" u="none" strike="noStrike">
+                <a:solidFill>
+                  <a:srgbClr val="404040"/>
+                </a:solidFill>
+                <a:latin typeface="+mn-lt"/>
+              </a:defRPr>
+            </a:pPr>
+            <a:endParaRPr lang="en-US"/>
+          </a:p>
+        </c:txPr>
+        <c:crossAx val="2094734552"/>
+        <c:crosses val="autoZero"/>
+        <c:auto val="1"/>
+        <c:lblAlgn val="ctr"/>
+        <c:noMultiLvlLbl val="1"/>
+        <c:tickLblSkip val="2"/>
+      </c:catAx>
+      <c:valAx>
+        <c:axId val="2094734552"/>
+        <c:scaling>
+          <c:orientation val="minMax"/>
+          <c:max val="250"/>
+          <c:min val="0"/>
+        </c:scaling>
+        <c:delete val="0"/>
+        <c:axPos val="l"/>
+        <c:majorGridlines>
+          <c:spPr>
+            <a:ln w="9525" cap="flat">
+              <a:solidFill>
+                <a:srgbClr val="E6E6E6"/>
+              </a:solidFill>
+              <a:prstDash val="solid"/>
+              <a:round/>
+            </a:ln>
+          </c:spPr>
+        </c:majorGridlines>
+        <c:numFmt formatCode="General" sourceLinked="0"/>
+        <c:majorTickMark val="out"/>
+        <c:minorTickMark val="none"/>
+        <c:tickLblPos val="nextTo"/>
+        <c:spPr>
+          <a:ln w="12700" cap="flat">
+            <a:solidFill>
+              <a:srgbClr val="888888"/>
+            </a:solidFill>
+            <a:prstDash val="solid"/>
+            <a:round/>
+          </a:ln>
+        </c:spPr>
+        <c:txPr>
+          <a:bodyPr/>
+          <a:lstStyle/>
+          <a:p>
+            <a:pPr>
+              <a:defRPr sz="1000" b="0" i="0" u="none" strike="noStrike">
+                <a:solidFill>
+                  <a:srgbClr val="7F7F7F"/>
+                </a:solidFill>
+                <a:latin typeface="+mn-lt"/>
+              </a:defRPr>
+            </a:pPr>
+            <a:endParaRPr lang="en-US"/>
+          </a:p>
+        </c:txPr>
+        <c:crossAx val="2094734554"/>
+        <c:crosses val="autoZero"/>
+        <c:crossBetween val="between"/>
+        <c:majorUnit val="50"/>
+      </c:valAx>
+      <c:spPr>
+        <a:noFill/>
+        <a:ln>
+          <a:noFill/>
+        </a:ln>
+        <a:effectLst/>
+      </c:spPr>
+    </c:plotArea>
+    <c:legend>
+      <c:legendPos val="t"/>
+      <c:overlay val="0"/>
+      <c:txPr>
+        <a:bodyPr/>
+        <a:lstStyle/>
+        <a:p>
+          <a:pPr>
+            <a:defRPr sz="1000">
+              <a:latin typeface="+mn-lt"/>
+              <a:cs typeface="+mn-lt"/>
+            </a:defRPr>
+          </a:pPr>
+          <a:endParaRPr lang="en-US"/>
+        </a:p>
+      </c:txPr>
+    </c:legend>
+    <c:plotVisOnly val="1"/>
+    <c:dispBlanksAs val="span"/>
+  </c:chart>
+  <c:spPr>
+    <a:noFill/>
+    <a:ln>
+      <a:noFill/>
+    </a:ln>
+    <a:effectLst/>
+  </c:spPr>
+  <c:externalData r:id="rId1">
+    <c:autoUpdate val="0"/>
+  </c:externalData>
+</c:chartSpace>
+</file>
+
+<file path=ppt/charts/chart5.xml><?xml version="1.0" encoding="utf-8"?>
+<c:chartSpace xmlns:c="http://schemas.openxmlformats.org/drawingml/2006/chart" xmlns:a="http://schemas.openxmlformats.org/drawingml/2006/main" xmlns:r="http://schemas.openxmlformats.org/officeDocument/2006/relationships">
+  <c:date1904 val="0"/>
+  <c:roundedCorners val="1"/>
+  <c:chart>
+    <c:title>
+      <c:tx>
+        <c:rich>
+          <a:bodyPr/>
+          <a:lstStyle/>
+          <a:p>
+            <a:pPr>
+              <a:defRPr sz="1300" b="0" i="0" u="none" strike="noStrike">
+                <a:solidFill>
+                  <a:srgbClr val="222222"/>
+                </a:solidFill>
+                <a:latin typeface="+mn-lt"/>
+              </a:defRPr>
+            </a:pPr>
+            <a:r>
+              <a:rPr sz="1300" b="0" i="0" u="none" strike="noStrike">
+                <a:solidFill>
+                  <a:srgbClr val="222222"/>
+                </a:solidFill>
+                <a:latin typeface="+mn-lt"/>
+              </a:rPr>
               <a:t>累計リポスト数の想定（11/16〜12/12）</a:t>
             </a:r>
           </a:p>
@@ -2409,7 +3299,7 @@
               <c:strCache>
                 <c:ptCount val="1"/>
                 <c:pt idx="0">
-                  <c:v>計画どおり運用</c:v>
+                  <c:v>新スケジュール</c:v>
                 </c:pt>
               </c:strCache>
             </c:strRef>
@@ -2582,70 +3472,70 @@
                   <c:v>910</c:v>
                 </c:pt>
                 <c:pt idx="5">
-                  <c:v>988</c:v>
+                  <c:v>923</c:v>
                 </c:pt>
                 <c:pt idx="6">
-                  <c:v>1001</c:v>
+                  <c:v>936</c:v>
                 </c:pt>
                 <c:pt idx="7">
-                  <c:v>1105</c:v>
+                  <c:v>1040</c:v>
                 </c:pt>
                 <c:pt idx="8">
+                  <c:v>1053</c:v>
+                </c:pt>
+                <c:pt idx="9">
+                  <c:v>1066</c:v>
+                </c:pt>
+                <c:pt idx="10">
                   <c:v>1118</c:v>
                 </c:pt>
-                <c:pt idx="9">
+                <c:pt idx="11">
                   <c:v>1131</c:v>
                 </c:pt>
-                <c:pt idx="10">
-                  <c:v>1209</c:v>
-                </c:pt>
-                <c:pt idx="11">
-                  <c:v>1222</c:v>
-                </c:pt>
                 <c:pt idx="12">
-                  <c:v>1235</c:v>
+                  <c:v>1144</c:v>
                 </c:pt>
                 <c:pt idx="13">
-                  <c:v>1443</c:v>
+                  <c:v>1352</c:v>
                 </c:pt>
                 <c:pt idx="14">
-                  <c:v>1456</c:v>
+                  <c:v>1365</c:v>
                 </c:pt>
                 <c:pt idx="15">
-                  <c:v>1469</c:v>
+                  <c:v>1378</c:v>
                 </c:pt>
                 <c:pt idx="16">
-                  <c:v>1482</c:v>
+                  <c:v>1391</c:v>
                 </c:pt>
                 <c:pt idx="17">
-                  <c:v>1586</c:v>
+                  <c:v>1458</c:v>
                 </c:pt>
                 <c:pt idx="18">
-                  <c:v>1599</c:v>
+                  <c:v>1471</c:v>
                 </c:pt>
                 <c:pt idx="19">
-                  <c:v>1612</c:v>
+                  <c:v>1484</c:v>
                 </c:pt>
                 <c:pt idx="20">
-                  <c:v>1690</c:v>
+                  <c:v>1562</c:v>
                 </c:pt>
                 <c:pt idx="21">
-                  <c:v>1703</c:v>
+                  <c:v>1575</c:v>
                 </c:pt>
                 <c:pt idx="22">
-                  <c:v>1716</c:v>
+                  <c:v>1588</c:v>
                 </c:pt>
                 <c:pt idx="23">
-                  <c:v>1729</c:v>
+                  <c:v>1601</c:v>
                 </c:pt>
                 <c:pt idx="24">
-                  <c:v>1807</c:v>
+                  <c:v>1679</c:v>
                 </c:pt>
                 <c:pt idx="25">
-                  <c:v>2015</c:v>
+                  <c:v>1887</c:v>
                 </c:pt>
                 <c:pt idx="26">
-                  <c:v>2126</c:v>
+                  <c:v>1957</c:v>
                 </c:pt>
               </c:numCache>
             </c:numRef>
@@ -4742,6 +5632,94 @@
             <a:fld id="{F7021451-1387-4CA6-816F-3879F97B5CBC}" type="slidenum">
               <a:rPr lang="en-US"/>
               <a:t>4</a:t>
+            </a:fld>
+            <a:endParaRPr lang="en-US"/>
+          </a:p>
+        </p:txBody>
+      </p:sp>
+    </p:spTree>
+    <p:extLst>
+      <p:ext uri="{BB962C8B-B14F-4D97-AF65-F5344CB8AC3E}">
+        <p14:creationId xmlns:p14="http://schemas.microsoft.com/office/powerpoint/2010/main" val="1024086991"/>
+      </p:ext>
+    </p:extLst>
+  </p:cSld>
+  <p:clrMapOvr>
+    <a:masterClrMapping/>
+  </p:clrMapOvr>
+</p:notes>
+</file>
+
+<file path=ppt/notesSlides/notesSlide5.xml><?xml version="1.0" encoding="utf-8"?>
+<p:notes xmlns:a="http://schemas.openxmlformats.org/drawingml/2006/main" xmlns:r="http://schemas.openxmlformats.org/officeDocument/2006/relationships" xmlns:p="http://schemas.openxmlformats.org/presentationml/2006/main">
+  <p:cSld>
+    <p:spTree>
+      <p:nvGrpSpPr>
+        <p:cNvPr id="1" name=""/>
+        <p:cNvGrpSpPr/>
+        <p:nvPr/>
+      </p:nvGrpSpPr>
+      <p:grpSpPr>
+        <a:xfrm>
+          <a:off x="0" y="0"/>
+          <a:ext cx="0" cy="0"/>
+          <a:chOff x="0" y="0"/>
+          <a:chExt cx="0" cy="0"/>
+        </a:xfrm>
+      </p:grpSpPr>
+      <p:sp>
+        <p:nvSpPr>
+          <p:cNvPr id="2" name="Slide Image Placeholder 1"/>
+          <p:cNvSpPr>
+            <a:spLocks noGrp="1" noRot="1" noChangeAspect="1"/>
+          </p:cNvSpPr>
+          <p:nvPr>
+            <p:ph type="sldImg"/>
+          </p:nvPr>
+        </p:nvSpPr>
+        <p:spPr/>
+      </p:sp>
+      <p:sp>
+        <p:nvSpPr>
+          <p:cNvPr id="3" name="Notes Placeholder 2"/>
+          <p:cNvSpPr>
+            <a:spLocks noGrp="1"/>
+          </p:cNvSpPr>
+          <p:nvPr>
+            <p:ph type="body" idx="1"/>
+          </p:nvPr>
+        </p:nvSpPr>
+        <p:spPr/>
+        <p:txBody>
+          <a:bodyPr/>
+          <a:lstStyle/>
+          <a:p>
+            <a:r>
+              <a:rPr lang="en-US" dirty="0"/>
+              <a:t/>
+            </a:r>
+            <a:endParaRPr lang="en-US" dirty="0"/>
+          </a:p>
+        </p:txBody>
+      </p:sp>
+      <p:sp>
+        <p:nvSpPr>
+          <p:cNvPr id="4" name="Slide Number Placeholder 3"/>
+          <p:cNvSpPr>
+            <a:spLocks noGrp="1"/>
+          </p:cNvSpPr>
+          <p:nvPr>
+            <p:ph type="sldNum" sz="quarter" idx="10"/>
+          </p:nvPr>
+        </p:nvSpPr>
+        <p:spPr/>
+        <p:txBody>
+          <a:bodyPr/>
+          <a:lstStyle/>
+          <a:p>
+            <a:fld id="{F7021451-1387-4CA6-816F-3879F97B5CBC}" type="slidenum">
+              <a:rPr lang="en-US"/>
+              <a:t>5</a:t>
             </a:fld>
             <a:endParaRPr lang="en-US"/>
           </a:p>
@@ -8099,7 +9077,7 @@
         <p:spPr>
           <a:xfrm>
             <a:off x="457200" y="1115568"/>
-            <a:ext cx="11277295" cy="1097280"/>
+            <a:ext cx="11277295" cy="1234440"/>
           </a:xfrm>
           <a:prstGeom prst="rect">
             <a:avLst/>
@@ -8124,7 +9102,7 @@
         <p:spPr>
           <a:xfrm>
             <a:off x="594360" y="1161288"/>
-            <a:ext cx="11002975" cy="1005840"/>
+            <a:ext cx="11002975" cy="1143000"/>
           </a:xfrm>
           <a:prstGeom prst="rect">
             <a:avLst/>
@@ -8148,7 +9126,7 @@
                   <a:srgbClr val="222222"/>
                 </a:solidFill>
               </a:rPr>
-              <a:t>・27日間で計12回投稿（</a:t>
+              <a:t>・27日間で計11回（</a:t>
             </a:r>
             <a:pPr indent="0" marL="0">
               <a:spcAft>
@@ -8162,7 +9140,7 @@
                   <a:srgbClr val="C8102E"/>
                 </a:solidFill>
               </a:rPr>
-              <a:t>同日2回なし・最大間隔3日</a:t>
+              <a:t>土曜は締切当日の予約投稿のみ</a:t>
             </a:r>
             <a:pPr indent="0" marL="0">
               <a:spcAft>
@@ -8176,7 +9154,38 @@
                   <a:srgbClr val="222222"/>
                 </a:solidFill>
               </a:rPr>
-              <a:t>）。投稿は原則17:00、締切当日のみ残り時間確保のため12:00</a:t>
+              <a:t>）。原則17:00、OWV公式RPは11/16・11/29・12/11</a:t>
+            </a:r>
+            <a:endParaRPr lang="en-US" sz="1500" dirty="0"/>
+          </a:p>
+          <a:p>
+            <a:pPr indent="0" marL="0">
+              <a:spcAft>
+                <a:spcPts val="300"/>
+              </a:spcAft>
+              <a:buNone/>
+            </a:pPr>
+            <a:r>
+              <a:rPr lang="en-US" sz="1500" b="1" dirty="0">
+                <a:solidFill>
+                  <a:srgbClr val="C8102E"/>
+                </a:solidFill>
+              </a:rPr>
+              <a:t>・12時 vs 17時のABテストを木曜で実施</a:t>
+            </a:r>
+            <a:pPr indent="0" marL="0">
+              <a:spcAft>
+                <a:spcPts val="300"/>
+              </a:spcAft>
+              <a:buNone/>
+            </a:pPr>
+            <a:r>
+              <a:rPr lang="en-US" sz="1500" dirty="0">
+                <a:solidFill>
+                  <a:srgbClr val="222222"/>
+                </a:solidFill>
+              </a:rPr>
+              <a:t>：動画 11/19(17時)×12/3(12時)、リマインド 11/26(12時)×12/10(17時)</a:t>
             </a:r>
             <a:endParaRPr lang="en-US" sz="1500" dirty="0"/>
           </a:p>
@@ -8193,7 +9202,7 @@
                   <a:srgbClr val="222222"/>
                 </a:solidFill>
               </a:rPr>
-              <a:t>・OWV公式へのリポスト依頼は</a:t>
+              <a:t>・実施順を入れ替えて</a:t>
             </a:r>
             <a:pPr indent="0" marL="0">
               <a:spcAft>
@@ -8207,11 +9216,8 @@
                   <a:srgbClr val="C8102E"/>
                 </a:solidFill>
               </a:rPr>
-              <a:t>開始日・中間（11/29）・締切前日（12/11）の計3回</a:t>
+              <a:t>前半・後半の時期の影響を相殺</a:t>
             </a:r>
-            <a:endParaRPr lang="en-US" sz="1500" dirty="0"/>
-          </a:p>
-          <a:p>
             <a:pPr indent="0" marL="0">
               <a:spcAft>
                 <a:spcPts val="300"/>
@@ -8224,7 +9230,7 @@
                   <a:srgbClr val="222222"/>
                 </a:solidFill>
               </a:rPr>
-              <a:t>・動画公開投稿をリマインドとして兼用し、「公開告知＋次の目標（あと◯件）」をセットで発信</a:t>
+              <a:t>。評価指標は投稿後24時間のインプレッション</a:t>
             </a:r>
             <a:endParaRPr lang="en-US" sz="1500" dirty="0"/>
           </a:p>
@@ -8245,7 +9251,7 @@
           </p:nvPr>
         </p:nvGraphicFramePr>
         <p:xfrm>
-          <a:off x="457200" y="2331720"/>
+          <a:off x="457200" y="2514600"/>
           <a:ext cx="11277295" cy="914400"/>
         </p:xfrm>
         <a:graphic>
@@ -8253,11 +9259,12 @@
             <a:tbl>
               <a:tblPr/>
               <a:tblGrid>
-                <a:gridCol w="1737360"/>
-                <a:gridCol w="914400"/>
-                <a:gridCol w="2103120"/>
-                <a:gridCol w="4873752"/>
-                <a:gridCol w="1645920"/>
+                <a:gridCol w="1600200"/>
+                <a:gridCol w="822960"/>
+                <a:gridCol w="1417320"/>
+                <a:gridCol w="4782312"/>
+                <a:gridCol w="1325880"/>
+                <a:gridCol w="1325880"/>
               </a:tblGrid>
               <a:tr h="301752">
                 <a:tc>
@@ -8458,6 +9465,67 @@
                           </a:solidFill>
                         </a:rPr>
                         <a:t>投稿内容</a:t>
+                      </a:r>
+                      <a:endParaRPr lang="en-US" sz="1200" dirty="0"/>
+                    </a:p>
+                  </a:txBody>
+                  <a:tcPr marL="76200" marR="76200" marT="25400" marB="25400" anchor="ctr">
+                    <a:lnL w="6350" cap="flat" cmpd="sng" algn="ctr">
+                      <a:solidFill>
+                        <a:srgbClr val="D9D9D9"/>
+                      </a:solidFill>
+                      <a:prstDash val="solid"/>
+                      <a:round/>
+                      <a:headEnd type="none" w="med" len="med"/>
+                      <a:tailEnd type="none" w="med" len="med"/>
+                    </a:lnL>
+                    <a:lnR w="6350" cap="flat" cmpd="sng" algn="ctr">
+                      <a:solidFill>
+                        <a:srgbClr val="D9D9D9"/>
+                      </a:solidFill>
+                      <a:prstDash val="solid"/>
+                      <a:round/>
+                      <a:headEnd type="none" w="med" len="med"/>
+                      <a:tailEnd type="none" w="med" len="med"/>
+                    </a:lnR>
+                    <a:lnT w="6350" cap="flat" cmpd="sng" algn="ctr">
+                      <a:solidFill>
+                        <a:srgbClr val="D9D9D9"/>
+                      </a:solidFill>
+                      <a:prstDash val="solid"/>
+                      <a:round/>
+                      <a:headEnd type="none" w="med" len="med"/>
+                      <a:tailEnd type="none" w="med" len="med"/>
+                    </a:lnT>
+                    <a:lnB w="6350" cap="flat" cmpd="sng" algn="ctr">
+                      <a:solidFill>
+                        <a:srgbClr val="D9D9D9"/>
+                      </a:solidFill>
+                      <a:prstDash val="solid"/>
+                      <a:round/>
+                      <a:headEnd type="none" w="med" len="med"/>
+                      <a:tailEnd type="none" w="med" len="med"/>
+                    </a:lnB>
+                    <a:solidFill>
+                      <a:srgbClr val="2B2523"/>
+                    </a:solidFill>
+                  </a:tcPr>
+                </a:tc>
+                <a:tc>
+                  <a:txBody>
+                    <a:bodyPr/>
+                    <a:lstStyle/>
+                    <a:p>
+                      <a:pPr indent="0" marL="0">
+                        <a:buNone/>
+                      </a:pPr>
+                      <a:r>
+                        <a:rPr lang="en-US" sz="1200" b="1" dirty="0">
+                          <a:solidFill>
+                            <a:srgbClr val="FFFFFF"/>
+                          </a:solidFill>
+                        </a:rPr>
+                        <a:t>ABテスト</a:t>
                       </a:r>
                       <a:endParaRPr lang="en-US" sz="1200" dirty="0"/>
                     </a:p>
@@ -8819,6 +9887,59 @@
                       <a:pPr algn="ctr" indent="0" marL="0">
                         <a:buNone/>
                       </a:pPr>
+                      <a:endParaRPr lang="en-US" sz="1200" dirty="0"/>
+                    </a:p>
+                  </a:txBody>
+                  <a:tcPr marL="76200" marR="76200" marT="25400" marB="25400" anchor="ctr">
+                    <a:lnL w="6350" cap="flat" cmpd="sng" algn="ctr">
+                      <a:solidFill>
+                        <a:srgbClr val="D9D9D9"/>
+                      </a:solidFill>
+                      <a:prstDash val="solid"/>
+                      <a:round/>
+                      <a:headEnd type="none" w="med" len="med"/>
+                      <a:tailEnd type="none" w="med" len="med"/>
+                    </a:lnL>
+                    <a:lnR w="6350" cap="flat" cmpd="sng" algn="ctr">
+                      <a:solidFill>
+                        <a:srgbClr val="D9D9D9"/>
+                      </a:solidFill>
+                      <a:prstDash val="solid"/>
+                      <a:round/>
+                      <a:headEnd type="none" w="med" len="med"/>
+                      <a:tailEnd type="none" w="med" len="med"/>
+                    </a:lnR>
+                    <a:lnT w="6350" cap="flat" cmpd="sng" algn="ctr">
+                      <a:solidFill>
+                        <a:srgbClr val="D9D9D9"/>
+                      </a:solidFill>
+                      <a:prstDash val="solid"/>
+                      <a:round/>
+                      <a:headEnd type="none" w="med" len="med"/>
+                      <a:tailEnd type="none" w="med" len="med"/>
+                    </a:lnT>
+                    <a:lnB w="6350" cap="flat" cmpd="sng" algn="ctr">
+                      <a:solidFill>
+                        <a:srgbClr val="D9D9D9"/>
+                      </a:solidFill>
+                      <a:prstDash val="solid"/>
+                      <a:round/>
+                      <a:headEnd type="none" w="med" len="med"/>
+                      <a:tailEnd type="none" w="med" len="med"/>
+                    </a:lnB>
+                    <a:solidFill>
+                      <a:srgbClr val="FFFFFF"/>
+                    </a:solidFill>
+                  </a:tcPr>
+                </a:tc>
+                <a:tc>
+                  <a:txBody>
+                    <a:bodyPr/>
+                    <a:lstStyle/>
+                    <a:p>
+                      <a:pPr algn="ctr" indent="0" marL="0">
+                        <a:buNone/>
+                      </a:pPr>
                       <a:r>
                         <a:rPr lang="en-US" sz="1200" b="1" dirty="0">
                           <a:solidFill>
@@ -9171,6 +10292,59 @@
                     </a:solidFill>
                   </a:tcPr>
                 </a:tc>
+                <a:tc>
+                  <a:txBody>
+                    <a:bodyPr/>
+                    <a:lstStyle/>
+                    <a:p>
+                      <a:pPr algn="ctr" indent="0" marL="0">
+                        <a:buNone/>
+                      </a:pPr>
+                      <a:endParaRPr lang="en-US" sz="1200" dirty="0"/>
+                    </a:p>
+                  </a:txBody>
+                  <a:tcPr marL="76200" marR="76200" marT="25400" marB="25400" anchor="ctr">
+                    <a:lnL w="6350" cap="flat" cmpd="sng" algn="ctr">
+                      <a:solidFill>
+                        <a:srgbClr val="D9D9D9"/>
+                      </a:solidFill>
+                      <a:prstDash val="solid"/>
+                      <a:round/>
+                      <a:headEnd type="none" w="med" len="med"/>
+                      <a:tailEnd type="none" w="med" len="med"/>
+                    </a:lnL>
+                    <a:lnR w="6350" cap="flat" cmpd="sng" algn="ctr">
+                      <a:solidFill>
+                        <a:srgbClr val="D9D9D9"/>
+                      </a:solidFill>
+                      <a:prstDash val="solid"/>
+                      <a:round/>
+                      <a:headEnd type="none" w="med" len="med"/>
+                      <a:tailEnd type="none" w="med" len="med"/>
+                    </a:lnR>
+                    <a:lnT w="6350" cap="flat" cmpd="sng" algn="ctr">
+                      <a:solidFill>
+                        <a:srgbClr val="D9D9D9"/>
+                      </a:solidFill>
+                      <a:prstDash val="solid"/>
+                      <a:round/>
+                      <a:headEnd type="none" w="med" len="med"/>
+                      <a:tailEnd type="none" w="med" len="med"/>
+                    </a:lnT>
+                    <a:lnB w="6350" cap="flat" cmpd="sng" algn="ctr">
+                      <a:solidFill>
+                        <a:srgbClr val="D9D9D9"/>
+                      </a:solidFill>
+                      <a:prstDash val="solid"/>
+                      <a:round/>
+                      <a:headEnd type="none" w="med" len="med"/>
+                      <a:tailEnd type="none" w="med" len="med"/>
+                    </a:lnB>
+                    <a:solidFill>
+                      <a:srgbClr val="F5F5F5"/>
+                    </a:solidFill>
+                  </a:tcPr>
+                </a:tc>
               </a:tr>
               <a:tr h="301752">
                 <a:tc>
@@ -9425,6 +10599,67 @@
                       <a:pPr algn="ctr" indent="0" marL="0">
                         <a:buNone/>
                       </a:pPr>
+                      <a:r>
+                        <a:rPr lang="en-US" sz="1200" b="1" dirty="0">
+                          <a:solidFill>
+                            <a:srgbClr val="222222"/>
+                          </a:solidFill>
+                        </a:rPr>
+                        <a:t>A：17時</a:t>
+                      </a:r>
+                      <a:endParaRPr lang="en-US" sz="1200" dirty="0"/>
+                    </a:p>
+                  </a:txBody>
+                  <a:tcPr marL="76200" marR="76200" marT="25400" marB="25400" anchor="ctr">
+                    <a:lnL w="6350" cap="flat" cmpd="sng" algn="ctr">
+                      <a:solidFill>
+                        <a:srgbClr val="D9D9D9"/>
+                      </a:solidFill>
+                      <a:prstDash val="solid"/>
+                      <a:round/>
+                      <a:headEnd type="none" w="med" len="med"/>
+                      <a:tailEnd type="none" w="med" len="med"/>
+                    </a:lnL>
+                    <a:lnR w="6350" cap="flat" cmpd="sng" algn="ctr">
+                      <a:solidFill>
+                        <a:srgbClr val="D9D9D9"/>
+                      </a:solidFill>
+                      <a:prstDash val="solid"/>
+                      <a:round/>
+                      <a:headEnd type="none" w="med" len="med"/>
+                      <a:tailEnd type="none" w="med" len="med"/>
+                    </a:lnR>
+                    <a:lnT w="6350" cap="flat" cmpd="sng" algn="ctr">
+                      <a:solidFill>
+                        <a:srgbClr val="D9D9D9"/>
+                      </a:solidFill>
+                      <a:prstDash val="solid"/>
+                      <a:round/>
+                      <a:headEnd type="none" w="med" len="med"/>
+                      <a:tailEnd type="none" w="med" len="med"/>
+                    </a:lnT>
+                    <a:lnB w="6350" cap="flat" cmpd="sng" algn="ctr">
+                      <a:solidFill>
+                        <a:srgbClr val="D9D9D9"/>
+                      </a:solidFill>
+                      <a:prstDash val="solid"/>
+                      <a:round/>
+                      <a:headEnd type="none" w="med" len="med"/>
+                      <a:tailEnd type="none" w="med" len="med"/>
+                    </a:lnB>
+                    <a:solidFill>
+                      <a:srgbClr val="FFFFFF"/>
+                    </a:solidFill>
+                  </a:tcPr>
+                </a:tc>
+                <a:tc>
+                  <a:txBody>
+                    <a:bodyPr/>
+                    <a:lstStyle/>
+                    <a:p>
+                      <a:pPr algn="ctr" indent="0" marL="0">
+                        <a:buNone/>
+                      </a:pPr>
                       <a:endParaRPr lang="en-US" sz="1200" dirty="0"/>
                     </a:p>
                   </a:txBody>
@@ -9486,7 +10721,7 @@
                             <a:srgbClr val="222222"/>
                           </a:solidFill>
                         </a:rPr>
-                        <a:t>11/21（土）</a:t>
+                        <a:t>11/23（月・祝）</a:t>
                       </a:r>
                       <a:endParaRPr lang="en-US" sz="1200" dirty="0"/>
                     </a:p>
@@ -9608,7 +10843,7 @@
                             <a:srgbClr val="222222"/>
                           </a:solidFill>
                         </a:rPr>
-                        <a:t>リマインド</a:t>
+                        <a:t>動画公開</a:t>
                       </a:r>
                       <a:endParaRPr lang="en-US" sz="1200" dirty="0"/>
                     </a:p>
@@ -9669,8 +10904,61 @@
                             <a:srgbClr val="222222"/>
                           </a:solidFill>
                         </a:rPr>
-                        <a:t>週末リマインド（進捗）</a:t>
+                        <a:t>第2弾ダイジェスト公開＋次の目標</a:t>
                       </a:r>
+                      <a:endParaRPr lang="en-US" sz="1200" dirty="0"/>
+                    </a:p>
+                  </a:txBody>
+                  <a:tcPr marL="76200" marR="76200" marT="25400" marB="25400" anchor="ctr">
+                    <a:lnL w="6350" cap="flat" cmpd="sng" algn="ctr">
+                      <a:solidFill>
+                        <a:srgbClr val="D9D9D9"/>
+                      </a:solidFill>
+                      <a:prstDash val="solid"/>
+                      <a:round/>
+                      <a:headEnd type="none" w="med" len="med"/>
+                      <a:tailEnd type="none" w="med" len="med"/>
+                    </a:lnL>
+                    <a:lnR w="6350" cap="flat" cmpd="sng" algn="ctr">
+                      <a:solidFill>
+                        <a:srgbClr val="D9D9D9"/>
+                      </a:solidFill>
+                      <a:prstDash val="solid"/>
+                      <a:round/>
+                      <a:headEnd type="none" w="med" len="med"/>
+                      <a:tailEnd type="none" w="med" len="med"/>
+                    </a:lnR>
+                    <a:lnT w="6350" cap="flat" cmpd="sng" algn="ctr">
+                      <a:solidFill>
+                        <a:srgbClr val="D9D9D9"/>
+                      </a:solidFill>
+                      <a:prstDash val="solid"/>
+                      <a:round/>
+                      <a:headEnd type="none" w="med" len="med"/>
+                      <a:tailEnd type="none" w="med" len="med"/>
+                    </a:lnT>
+                    <a:lnB w="6350" cap="flat" cmpd="sng" algn="ctr">
+                      <a:solidFill>
+                        <a:srgbClr val="D9D9D9"/>
+                      </a:solidFill>
+                      <a:prstDash val="solid"/>
+                      <a:round/>
+                      <a:headEnd type="none" w="med" len="med"/>
+                      <a:tailEnd type="none" w="med" len="med"/>
+                    </a:lnB>
+                    <a:solidFill>
+                      <a:srgbClr val="F5F5F5"/>
+                    </a:solidFill>
+                  </a:tcPr>
+                </a:tc>
+                <a:tc>
+                  <a:txBody>
+                    <a:bodyPr/>
+                    <a:lstStyle/>
+                    <a:p>
+                      <a:pPr algn="ctr" indent="0" marL="0">
+                        <a:buNone/>
+                      </a:pPr>
                       <a:endParaRPr lang="en-US" sz="1200" dirty="0"/>
                     </a:p>
                   </a:txBody>
@@ -9785,7 +11073,1439 @@
                             <a:srgbClr val="222222"/>
                           </a:solidFill>
                         </a:rPr>
-                        <a:t>11/23（月・祝）</a:t>
+                        <a:t>11/26（木）</a:t>
+                      </a:r>
+                      <a:endParaRPr lang="en-US" sz="1200" dirty="0"/>
+                    </a:p>
+                  </a:txBody>
+                  <a:tcPr marL="76200" marR="76200" marT="25400" marB="25400" anchor="ctr">
+                    <a:lnL w="6350" cap="flat" cmpd="sng" algn="ctr">
+                      <a:solidFill>
+                        <a:srgbClr val="D9D9D9"/>
+                      </a:solidFill>
+                      <a:prstDash val="solid"/>
+                      <a:round/>
+                      <a:headEnd type="none" w="med" len="med"/>
+                      <a:tailEnd type="none" w="med" len="med"/>
+                    </a:lnL>
+                    <a:lnR w="6350" cap="flat" cmpd="sng" algn="ctr">
+                      <a:solidFill>
+                        <a:srgbClr val="D9D9D9"/>
+                      </a:solidFill>
+                      <a:prstDash val="solid"/>
+                      <a:round/>
+                      <a:headEnd type="none" w="med" len="med"/>
+                      <a:tailEnd type="none" w="med" len="med"/>
+                    </a:lnR>
+                    <a:lnT w="6350" cap="flat" cmpd="sng" algn="ctr">
+                      <a:solidFill>
+                        <a:srgbClr val="D9D9D9"/>
+                      </a:solidFill>
+                      <a:prstDash val="solid"/>
+                      <a:round/>
+                      <a:headEnd type="none" w="med" len="med"/>
+                      <a:tailEnd type="none" w="med" len="med"/>
+                    </a:lnT>
+                    <a:lnB w="6350" cap="flat" cmpd="sng" algn="ctr">
+                      <a:solidFill>
+                        <a:srgbClr val="D9D9D9"/>
+                      </a:solidFill>
+                      <a:prstDash val="solid"/>
+                      <a:round/>
+                      <a:headEnd type="none" w="med" len="med"/>
+                      <a:tailEnd type="none" w="med" len="med"/>
+                    </a:lnB>
+                    <a:solidFill>
+                      <a:srgbClr val="FFFFFF"/>
+                    </a:solidFill>
+                  </a:tcPr>
+                </a:tc>
+                <a:tc>
+                  <a:txBody>
+                    <a:bodyPr/>
+                    <a:lstStyle/>
+                    <a:p>
+                      <a:pPr indent="0" marL="0">
+                        <a:buNone/>
+                      </a:pPr>
+                      <a:r>
+                        <a:rPr lang="en-US" sz="1200" b="1" dirty="0">
+                          <a:solidFill>
+                            <a:srgbClr val="C8102E"/>
+                          </a:solidFill>
+                        </a:rPr>
+                        <a:t>12:00</a:t>
+                      </a:r>
+                      <a:endParaRPr lang="en-US" sz="1200" dirty="0"/>
+                    </a:p>
+                  </a:txBody>
+                  <a:tcPr marL="76200" marR="76200" marT="25400" marB="25400" anchor="ctr">
+                    <a:lnL w="6350" cap="flat" cmpd="sng" algn="ctr">
+                      <a:solidFill>
+                        <a:srgbClr val="D9D9D9"/>
+                      </a:solidFill>
+                      <a:prstDash val="solid"/>
+                      <a:round/>
+                      <a:headEnd type="none" w="med" len="med"/>
+                      <a:tailEnd type="none" w="med" len="med"/>
+                    </a:lnL>
+                    <a:lnR w="6350" cap="flat" cmpd="sng" algn="ctr">
+                      <a:solidFill>
+                        <a:srgbClr val="D9D9D9"/>
+                      </a:solidFill>
+                      <a:prstDash val="solid"/>
+                      <a:round/>
+                      <a:headEnd type="none" w="med" len="med"/>
+                      <a:tailEnd type="none" w="med" len="med"/>
+                    </a:lnR>
+                    <a:lnT w="6350" cap="flat" cmpd="sng" algn="ctr">
+                      <a:solidFill>
+                        <a:srgbClr val="D9D9D9"/>
+                      </a:solidFill>
+                      <a:prstDash val="solid"/>
+                      <a:round/>
+                      <a:headEnd type="none" w="med" len="med"/>
+                      <a:tailEnd type="none" w="med" len="med"/>
+                    </a:lnT>
+                    <a:lnB w="6350" cap="flat" cmpd="sng" algn="ctr">
+                      <a:solidFill>
+                        <a:srgbClr val="D9D9D9"/>
+                      </a:solidFill>
+                      <a:prstDash val="solid"/>
+                      <a:round/>
+                      <a:headEnd type="none" w="med" len="med"/>
+                      <a:tailEnd type="none" w="med" len="med"/>
+                    </a:lnB>
+                    <a:solidFill>
+                      <a:srgbClr val="FFFFFF"/>
+                    </a:solidFill>
+                  </a:tcPr>
+                </a:tc>
+                <a:tc>
+                  <a:txBody>
+                    <a:bodyPr/>
+                    <a:lstStyle/>
+                    <a:p>
+                      <a:pPr indent="0" marL="0">
+                        <a:buNone/>
+                      </a:pPr>
+                      <a:r>
+                        <a:rPr lang="en-US" sz="1200" dirty="0">
+                          <a:solidFill>
+                            <a:srgbClr val="222222"/>
+                          </a:solidFill>
+                        </a:rPr>
+                        <a:t>リマインド</a:t>
+                      </a:r>
+                      <a:endParaRPr lang="en-US" sz="1200" dirty="0"/>
+                    </a:p>
+                  </a:txBody>
+                  <a:tcPr marL="76200" marR="76200" marT="25400" marB="25400" anchor="ctr">
+                    <a:lnL w="6350" cap="flat" cmpd="sng" algn="ctr">
+                      <a:solidFill>
+                        <a:srgbClr val="D9D9D9"/>
+                      </a:solidFill>
+                      <a:prstDash val="solid"/>
+                      <a:round/>
+                      <a:headEnd type="none" w="med" len="med"/>
+                      <a:tailEnd type="none" w="med" len="med"/>
+                    </a:lnL>
+                    <a:lnR w="6350" cap="flat" cmpd="sng" algn="ctr">
+                      <a:solidFill>
+                        <a:srgbClr val="D9D9D9"/>
+                      </a:solidFill>
+                      <a:prstDash val="solid"/>
+                      <a:round/>
+                      <a:headEnd type="none" w="med" len="med"/>
+                      <a:tailEnd type="none" w="med" len="med"/>
+                    </a:lnR>
+                    <a:lnT w="6350" cap="flat" cmpd="sng" algn="ctr">
+                      <a:solidFill>
+                        <a:srgbClr val="D9D9D9"/>
+                      </a:solidFill>
+                      <a:prstDash val="solid"/>
+                      <a:round/>
+                      <a:headEnd type="none" w="med" len="med"/>
+                      <a:tailEnd type="none" w="med" len="med"/>
+                    </a:lnT>
+                    <a:lnB w="6350" cap="flat" cmpd="sng" algn="ctr">
+                      <a:solidFill>
+                        <a:srgbClr val="D9D9D9"/>
+                      </a:solidFill>
+                      <a:prstDash val="solid"/>
+                      <a:round/>
+                      <a:headEnd type="none" w="med" len="med"/>
+                      <a:tailEnd type="none" w="med" len="med"/>
+                    </a:lnB>
+                    <a:solidFill>
+                      <a:srgbClr val="FFFFFF"/>
+                    </a:solidFill>
+                  </a:tcPr>
+                </a:tc>
+                <a:tc>
+                  <a:txBody>
+                    <a:bodyPr/>
+                    <a:lstStyle/>
+                    <a:p>
+                      <a:pPr indent="0" marL="0">
+                        <a:buNone/>
+                      </a:pPr>
+                      <a:r>
+                        <a:rPr lang="en-US" sz="1200" dirty="0">
+                          <a:solidFill>
+                            <a:srgbClr val="222222"/>
+                          </a:solidFill>
+                        </a:rPr>
+                        <a:t>途中経過「あと◯件で第3弾」</a:t>
+                      </a:r>
+                      <a:endParaRPr lang="en-US" sz="1200" dirty="0"/>
+                    </a:p>
+                  </a:txBody>
+                  <a:tcPr marL="76200" marR="76200" marT="25400" marB="25400" anchor="ctr">
+                    <a:lnL w="6350" cap="flat" cmpd="sng" algn="ctr">
+                      <a:solidFill>
+                        <a:srgbClr val="D9D9D9"/>
+                      </a:solidFill>
+                      <a:prstDash val="solid"/>
+                      <a:round/>
+                      <a:headEnd type="none" w="med" len="med"/>
+                      <a:tailEnd type="none" w="med" len="med"/>
+                    </a:lnL>
+                    <a:lnR w="6350" cap="flat" cmpd="sng" algn="ctr">
+                      <a:solidFill>
+                        <a:srgbClr val="D9D9D9"/>
+                      </a:solidFill>
+                      <a:prstDash val="solid"/>
+                      <a:round/>
+                      <a:headEnd type="none" w="med" len="med"/>
+                      <a:tailEnd type="none" w="med" len="med"/>
+                    </a:lnR>
+                    <a:lnT w="6350" cap="flat" cmpd="sng" algn="ctr">
+                      <a:solidFill>
+                        <a:srgbClr val="D9D9D9"/>
+                      </a:solidFill>
+                      <a:prstDash val="solid"/>
+                      <a:round/>
+                      <a:headEnd type="none" w="med" len="med"/>
+                      <a:tailEnd type="none" w="med" len="med"/>
+                    </a:lnT>
+                    <a:lnB w="6350" cap="flat" cmpd="sng" algn="ctr">
+                      <a:solidFill>
+                        <a:srgbClr val="D9D9D9"/>
+                      </a:solidFill>
+                      <a:prstDash val="solid"/>
+                      <a:round/>
+                      <a:headEnd type="none" w="med" len="med"/>
+                      <a:tailEnd type="none" w="med" len="med"/>
+                    </a:lnB>
+                    <a:solidFill>
+                      <a:srgbClr val="FFFFFF"/>
+                    </a:solidFill>
+                  </a:tcPr>
+                </a:tc>
+                <a:tc>
+                  <a:txBody>
+                    <a:bodyPr/>
+                    <a:lstStyle/>
+                    <a:p>
+                      <a:pPr algn="ctr" indent="0" marL="0">
+                        <a:buNone/>
+                      </a:pPr>
+                      <a:r>
+                        <a:rPr lang="en-US" sz="1200" b="1" dirty="0">
+                          <a:solidFill>
+                            <a:srgbClr val="C8102E"/>
+                          </a:solidFill>
+                        </a:rPr>
+                        <a:t>B：12時</a:t>
+                      </a:r>
+                      <a:endParaRPr lang="en-US" sz="1200" dirty="0"/>
+                    </a:p>
+                  </a:txBody>
+                  <a:tcPr marL="76200" marR="76200" marT="25400" marB="25400" anchor="ctr">
+                    <a:lnL w="6350" cap="flat" cmpd="sng" algn="ctr">
+                      <a:solidFill>
+                        <a:srgbClr val="D9D9D9"/>
+                      </a:solidFill>
+                      <a:prstDash val="solid"/>
+                      <a:round/>
+                      <a:headEnd type="none" w="med" len="med"/>
+                      <a:tailEnd type="none" w="med" len="med"/>
+                    </a:lnL>
+                    <a:lnR w="6350" cap="flat" cmpd="sng" algn="ctr">
+                      <a:solidFill>
+                        <a:srgbClr val="D9D9D9"/>
+                      </a:solidFill>
+                      <a:prstDash val="solid"/>
+                      <a:round/>
+                      <a:headEnd type="none" w="med" len="med"/>
+                      <a:tailEnd type="none" w="med" len="med"/>
+                    </a:lnR>
+                    <a:lnT w="6350" cap="flat" cmpd="sng" algn="ctr">
+                      <a:solidFill>
+                        <a:srgbClr val="D9D9D9"/>
+                      </a:solidFill>
+                      <a:prstDash val="solid"/>
+                      <a:round/>
+                      <a:headEnd type="none" w="med" len="med"/>
+                      <a:tailEnd type="none" w="med" len="med"/>
+                    </a:lnT>
+                    <a:lnB w="6350" cap="flat" cmpd="sng" algn="ctr">
+                      <a:solidFill>
+                        <a:srgbClr val="D9D9D9"/>
+                      </a:solidFill>
+                      <a:prstDash val="solid"/>
+                      <a:round/>
+                      <a:headEnd type="none" w="med" len="med"/>
+                      <a:tailEnd type="none" w="med" len="med"/>
+                    </a:lnB>
+                    <a:solidFill>
+                      <a:srgbClr val="FFFFFF"/>
+                    </a:solidFill>
+                  </a:tcPr>
+                </a:tc>
+                <a:tc>
+                  <a:txBody>
+                    <a:bodyPr/>
+                    <a:lstStyle/>
+                    <a:p>
+                      <a:pPr algn="ctr" indent="0" marL="0">
+                        <a:buNone/>
+                      </a:pPr>
+                      <a:endParaRPr lang="en-US" sz="1200" dirty="0"/>
+                    </a:p>
+                  </a:txBody>
+                  <a:tcPr marL="76200" marR="76200" marT="25400" marB="25400" anchor="ctr">
+                    <a:lnL w="6350" cap="flat" cmpd="sng" algn="ctr">
+                      <a:solidFill>
+                        <a:srgbClr val="D9D9D9"/>
+                      </a:solidFill>
+                      <a:prstDash val="solid"/>
+                      <a:round/>
+                      <a:headEnd type="none" w="med" len="med"/>
+                      <a:tailEnd type="none" w="med" len="med"/>
+                    </a:lnL>
+                    <a:lnR w="6350" cap="flat" cmpd="sng" algn="ctr">
+                      <a:solidFill>
+                        <a:srgbClr val="D9D9D9"/>
+                      </a:solidFill>
+                      <a:prstDash val="solid"/>
+                      <a:round/>
+                      <a:headEnd type="none" w="med" len="med"/>
+                      <a:tailEnd type="none" w="med" len="med"/>
+                    </a:lnR>
+                    <a:lnT w="6350" cap="flat" cmpd="sng" algn="ctr">
+                      <a:solidFill>
+                        <a:srgbClr val="D9D9D9"/>
+                      </a:solidFill>
+                      <a:prstDash val="solid"/>
+                      <a:round/>
+                      <a:headEnd type="none" w="med" len="med"/>
+                      <a:tailEnd type="none" w="med" len="med"/>
+                    </a:lnT>
+                    <a:lnB w="6350" cap="flat" cmpd="sng" algn="ctr">
+                      <a:solidFill>
+                        <a:srgbClr val="D9D9D9"/>
+                      </a:solidFill>
+                      <a:prstDash val="solid"/>
+                      <a:round/>
+                      <a:headEnd type="none" w="med" len="med"/>
+                      <a:tailEnd type="none" w="med" len="med"/>
+                    </a:lnB>
+                    <a:solidFill>
+                      <a:srgbClr val="FFFFFF"/>
+                    </a:solidFill>
+                  </a:tcPr>
+                </a:tc>
+              </a:tr>
+              <a:tr h="301752">
+                <a:tc>
+                  <a:txBody>
+                    <a:bodyPr/>
+                    <a:lstStyle/>
+                    <a:p>
+                      <a:pPr indent="0" marL="0">
+                        <a:buNone/>
+                      </a:pPr>
+                      <a:r>
+                        <a:rPr lang="en-US" sz="1200" b="1" dirty="0">
+                          <a:solidFill>
+                            <a:srgbClr val="222222"/>
+                          </a:solidFill>
+                        </a:rPr>
+                        <a:t>11/29（日）</a:t>
+                      </a:r>
+                      <a:endParaRPr lang="en-US" sz="1200" dirty="0"/>
+                    </a:p>
+                  </a:txBody>
+                  <a:tcPr marL="76200" marR="76200" marT="25400" marB="25400" anchor="ctr">
+                    <a:lnL w="6350" cap="flat" cmpd="sng" algn="ctr">
+                      <a:solidFill>
+                        <a:srgbClr val="D9D9D9"/>
+                      </a:solidFill>
+                      <a:prstDash val="solid"/>
+                      <a:round/>
+                      <a:headEnd type="none" w="med" len="med"/>
+                      <a:tailEnd type="none" w="med" len="med"/>
+                    </a:lnL>
+                    <a:lnR w="6350" cap="flat" cmpd="sng" algn="ctr">
+                      <a:solidFill>
+                        <a:srgbClr val="D9D9D9"/>
+                      </a:solidFill>
+                      <a:prstDash val="solid"/>
+                      <a:round/>
+                      <a:headEnd type="none" w="med" len="med"/>
+                      <a:tailEnd type="none" w="med" len="med"/>
+                    </a:lnR>
+                    <a:lnT w="6350" cap="flat" cmpd="sng" algn="ctr">
+                      <a:solidFill>
+                        <a:srgbClr val="D9D9D9"/>
+                      </a:solidFill>
+                      <a:prstDash val="solid"/>
+                      <a:round/>
+                      <a:headEnd type="none" w="med" len="med"/>
+                      <a:tailEnd type="none" w="med" len="med"/>
+                    </a:lnT>
+                    <a:lnB w="6350" cap="flat" cmpd="sng" algn="ctr">
+                      <a:solidFill>
+                        <a:srgbClr val="D9D9D9"/>
+                      </a:solidFill>
+                      <a:prstDash val="solid"/>
+                      <a:round/>
+                      <a:headEnd type="none" w="med" len="med"/>
+                      <a:tailEnd type="none" w="med" len="med"/>
+                    </a:lnB>
+                    <a:solidFill>
+                      <a:srgbClr val="F5F5F5"/>
+                    </a:solidFill>
+                  </a:tcPr>
+                </a:tc>
+                <a:tc>
+                  <a:txBody>
+                    <a:bodyPr/>
+                    <a:lstStyle/>
+                    <a:p>
+                      <a:pPr indent="0" marL="0">
+                        <a:buNone/>
+                      </a:pPr>
+                      <a:r>
+                        <a:rPr lang="en-US" sz="1200" dirty="0">
+                          <a:solidFill>
+                            <a:srgbClr val="222222"/>
+                          </a:solidFill>
+                        </a:rPr>
+                        <a:t>17:00</a:t>
+                      </a:r>
+                      <a:endParaRPr lang="en-US" sz="1200" dirty="0"/>
+                    </a:p>
+                  </a:txBody>
+                  <a:tcPr marL="76200" marR="76200" marT="25400" marB="25400" anchor="ctr">
+                    <a:lnL w="6350" cap="flat" cmpd="sng" algn="ctr">
+                      <a:solidFill>
+                        <a:srgbClr val="D9D9D9"/>
+                      </a:solidFill>
+                      <a:prstDash val="solid"/>
+                      <a:round/>
+                      <a:headEnd type="none" w="med" len="med"/>
+                      <a:tailEnd type="none" w="med" len="med"/>
+                    </a:lnL>
+                    <a:lnR w="6350" cap="flat" cmpd="sng" algn="ctr">
+                      <a:solidFill>
+                        <a:srgbClr val="D9D9D9"/>
+                      </a:solidFill>
+                      <a:prstDash val="solid"/>
+                      <a:round/>
+                      <a:headEnd type="none" w="med" len="med"/>
+                      <a:tailEnd type="none" w="med" len="med"/>
+                    </a:lnR>
+                    <a:lnT w="6350" cap="flat" cmpd="sng" algn="ctr">
+                      <a:solidFill>
+                        <a:srgbClr val="D9D9D9"/>
+                      </a:solidFill>
+                      <a:prstDash val="solid"/>
+                      <a:round/>
+                      <a:headEnd type="none" w="med" len="med"/>
+                      <a:tailEnd type="none" w="med" len="med"/>
+                    </a:lnT>
+                    <a:lnB w="6350" cap="flat" cmpd="sng" algn="ctr">
+                      <a:solidFill>
+                        <a:srgbClr val="D9D9D9"/>
+                      </a:solidFill>
+                      <a:prstDash val="solid"/>
+                      <a:round/>
+                      <a:headEnd type="none" w="med" len="med"/>
+                      <a:tailEnd type="none" w="med" len="med"/>
+                    </a:lnB>
+                    <a:solidFill>
+                      <a:srgbClr val="F5F5F5"/>
+                    </a:solidFill>
+                  </a:tcPr>
+                </a:tc>
+                <a:tc>
+                  <a:txBody>
+                    <a:bodyPr/>
+                    <a:lstStyle/>
+                    <a:p>
+                      <a:pPr indent="0" marL="0">
+                        <a:buNone/>
+                      </a:pPr>
+                      <a:r>
+                        <a:rPr lang="en-US" sz="1200" b="1" dirty="0">
+                          <a:solidFill>
+                            <a:srgbClr val="C8102E"/>
+                          </a:solidFill>
+                        </a:rPr>
+                        <a:t>リマインド</a:t>
+                      </a:r>
+                      <a:endParaRPr lang="en-US" sz="1200" dirty="0"/>
+                    </a:p>
+                  </a:txBody>
+                  <a:tcPr marL="76200" marR="76200" marT="25400" marB="25400" anchor="ctr">
+                    <a:lnL w="6350" cap="flat" cmpd="sng" algn="ctr">
+                      <a:solidFill>
+                        <a:srgbClr val="D9D9D9"/>
+                      </a:solidFill>
+                      <a:prstDash val="solid"/>
+                      <a:round/>
+                      <a:headEnd type="none" w="med" len="med"/>
+                      <a:tailEnd type="none" w="med" len="med"/>
+                    </a:lnL>
+                    <a:lnR w="6350" cap="flat" cmpd="sng" algn="ctr">
+                      <a:solidFill>
+                        <a:srgbClr val="D9D9D9"/>
+                      </a:solidFill>
+                      <a:prstDash val="solid"/>
+                      <a:round/>
+                      <a:headEnd type="none" w="med" len="med"/>
+                      <a:tailEnd type="none" w="med" len="med"/>
+                    </a:lnR>
+                    <a:lnT w="6350" cap="flat" cmpd="sng" algn="ctr">
+                      <a:solidFill>
+                        <a:srgbClr val="D9D9D9"/>
+                      </a:solidFill>
+                      <a:prstDash val="solid"/>
+                      <a:round/>
+                      <a:headEnd type="none" w="med" len="med"/>
+                      <a:tailEnd type="none" w="med" len="med"/>
+                    </a:lnT>
+                    <a:lnB w="6350" cap="flat" cmpd="sng" algn="ctr">
+                      <a:solidFill>
+                        <a:srgbClr val="D9D9D9"/>
+                      </a:solidFill>
+                      <a:prstDash val="solid"/>
+                      <a:round/>
+                      <a:headEnd type="none" w="med" len="med"/>
+                      <a:tailEnd type="none" w="med" len="med"/>
+                    </a:lnB>
+                    <a:solidFill>
+                      <a:srgbClr val="F5F5F5"/>
+                    </a:solidFill>
+                  </a:tcPr>
+                </a:tc>
+                <a:tc>
+                  <a:txBody>
+                    <a:bodyPr/>
+                    <a:lstStyle/>
+                    <a:p>
+                      <a:pPr indent="0" marL="0">
+                        <a:buNone/>
+                      </a:pPr>
+                      <a:r>
+                        <a:rPr lang="en-US" sz="1200" dirty="0">
+                          <a:solidFill>
+                            <a:srgbClr val="222222"/>
+                          </a:solidFill>
+                        </a:rPr>
+                        <a:t>中間の山場リマインド</a:t>
+                      </a:r>
+                      <a:endParaRPr lang="en-US" sz="1200" dirty="0"/>
+                    </a:p>
+                  </a:txBody>
+                  <a:tcPr marL="76200" marR="76200" marT="25400" marB="25400" anchor="ctr">
+                    <a:lnL w="6350" cap="flat" cmpd="sng" algn="ctr">
+                      <a:solidFill>
+                        <a:srgbClr val="D9D9D9"/>
+                      </a:solidFill>
+                      <a:prstDash val="solid"/>
+                      <a:round/>
+                      <a:headEnd type="none" w="med" len="med"/>
+                      <a:tailEnd type="none" w="med" len="med"/>
+                    </a:lnL>
+                    <a:lnR w="6350" cap="flat" cmpd="sng" algn="ctr">
+                      <a:solidFill>
+                        <a:srgbClr val="D9D9D9"/>
+                      </a:solidFill>
+                      <a:prstDash val="solid"/>
+                      <a:round/>
+                      <a:headEnd type="none" w="med" len="med"/>
+                      <a:tailEnd type="none" w="med" len="med"/>
+                    </a:lnR>
+                    <a:lnT w="6350" cap="flat" cmpd="sng" algn="ctr">
+                      <a:solidFill>
+                        <a:srgbClr val="D9D9D9"/>
+                      </a:solidFill>
+                      <a:prstDash val="solid"/>
+                      <a:round/>
+                      <a:headEnd type="none" w="med" len="med"/>
+                      <a:tailEnd type="none" w="med" len="med"/>
+                    </a:lnT>
+                    <a:lnB w="6350" cap="flat" cmpd="sng" algn="ctr">
+                      <a:solidFill>
+                        <a:srgbClr val="D9D9D9"/>
+                      </a:solidFill>
+                      <a:prstDash val="solid"/>
+                      <a:round/>
+                      <a:headEnd type="none" w="med" len="med"/>
+                      <a:tailEnd type="none" w="med" len="med"/>
+                    </a:lnB>
+                    <a:solidFill>
+                      <a:srgbClr val="F5F5F5"/>
+                    </a:solidFill>
+                  </a:tcPr>
+                </a:tc>
+                <a:tc>
+                  <a:txBody>
+                    <a:bodyPr/>
+                    <a:lstStyle/>
+                    <a:p>
+                      <a:pPr algn="ctr" indent="0" marL="0">
+                        <a:buNone/>
+                      </a:pPr>
+                      <a:endParaRPr lang="en-US" sz="1200" dirty="0"/>
+                    </a:p>
+                  </a:txBody>
+                  <a:tcPr marL="76200" marR="76200" marT="25400" marB="25400" anchor="ctr">
+                    <a:lnL w="6350" cap="flat" cmpd="sng" algn="ctr">
+                      <a:solidFill>
+                        <a:srgbClr val="D9D9D9"/>
+                      </a:solidFill>
+                      <a:prstDash val="solid"/>
+                      <a:round/>
+                      <a:headEnd type="none" w="med" len="med"/>
+                      <a:tailEnd type="none" w="med" len="med"/>
+                    </a:lnL>
+                    <a:lnR w="6350" cap="flat" cmpd="sng" algn="ctr">
+                      <a:solidFill>
+                        <a:srgbClr val="D9D9D9"/>
+                      </a:solidFill>
+                      <a:prstDash val="solid"/>
+                      <a:round/>
+                      <a:headEnd type="none" w="med" len="med"/>
+                      <a:tailEnd type="none" w="med" len="med"/>
+                    </a:lnR>
+                    <a:lnT w="6350" cap="flat" cmpd="sng" algn="ctr">
+                      <a:solidFill>
+                        <a:srgbClr val="D9D9D9"/>
+                      </a:solidFill>
+                      <a:prstDash val="solid"/>
+                      <a:round/>
+                      <a:headEnd type="none" w="med" len="med"/>
+                      <a:tailEnd type="none" w="med" len="med"/>
+                    </a:lnT>
+                    <a:lnB w="6350" cap="flat" cmpd="sng" algn="ctr">
+                      <a:solidFill>
+                        <a:srgbClr val="D9D9D9"/>
+                      </a:solidFill>
+                      <a:prstDash val="solid"/>
+                      <a:round/>
+                      <a:headEnd type="none" w="med" len="med"/>
+                      <a:tailEnd type="none" w="med" len="med"/>
+                    </a:lnB>
+                    <a:solidFill>
+                      <a:srgbClr val="F5F5F5"/>
+                    </a:solidFill>
+                  </a:tcPr>
+                </a:tc>
+                <a:tc>
+                  <a:txBody>
+                    <a:bodyPr/>
+                    <a:lstStyle/>
+                    <a:p>
+                      <a:pPr algn="ctr" indent="0" marL="0">
+                        <a:buNone/>
+                      </a:pPr>
+                      <a:r>
+                        <a:rPr lang="en-US" sz="1200" b="1" dirty="0">
+                          <a:solidFill>
+                            <a:srgbClr val="C8102E"/>
+                          </a:solidFill>
+                        </a:rPr>
+                        <a:t>◎</a:t>
+                      </a:r>
+                      <a:endParaRPr lang="en-US" sz="1200" dirty="0"/>
+                    </a:p>
+                  </a:txBody>
+                  <a:tcPr marL="76200" marR="76200" marT="25400" marB="25400" anchor="ctr">
+                    <a:lnL w="6350" cap="flat" cmpd="sng" algn="ctr">
+                      <a:solidFill>
+                        <a:srgbClr val="D9D9D9"/>
+                      </a:solidFill>
+                      <a:prstDash val="solid"/>
+                      <a:round/>
+                      <a:headEnd type="none" w="med" len="med"/>
+                      <a:tailEnd type="none" w="med" len="med"/>
+                    </a:lnL>
+                    <a:lnR w="6350" cap="flat" cmpd="sng" algn="ctr">
+                      <a:solidFill>
+                        <a:srgbClr val="D9D9D9"/>
+                      </a:solidFill>
+                      <a:prstDash val="solid"/>
+                      <a:round/>
+                      <a:headEnd type="none" w="med" len="med"/>
+                      <a:tailEnd type="none" w="med" len="med"/>
+                    </a:lnR>
+                    <a:lnT w="6350" cap="flat" cmpd="sng" algn="ctr">
+                      <a:solidFill>
+                        <a:srgbClr val="D9D9D9"/>
+                      </a:solidFill>
+                      <a:prstDash val="solid"/>
+                      <a:round/>
+                      <a:headEnd type="none" w="med" len="med"/>
+                      <a:tailEnd type="none" w="med" len="med"/>
+                    </a:lnT>
+                    <a:lnB w="6350" cap="flat" cmpd="sng" algn="ctr">
+                      <a:solidFill>
+                        <a:srgbClr val="D9D9D9"/>
+                      </a:solidFill>
+                      <a:prstDash val="solid"/>
+                      <a:round/>
+                      <a:headEnd type="none" w="med" len="med"/>
+                      <a:tailEnd type="none" w="med" len="med"/>
+                    </a:lnB>
+                    <a:solidFill>
+                      <a:srgbClr val="F5F5F5"/>
+                    </a:solidFill>
+                  </a:tcPr>
+                </a:tc>
+              </a:tr>
+              <a:tr h="301752">
+                <a:tc>
+                  <a:txBody>
+                    <a:bodyPr/>
+                    <a:lstStyle/>
+                    <a:p>
+                      <a:pPr indent="0" marL="0">
+                        <a:buNone/>
+                      </a:pPr>
+                      <a:r>
+                        <a:rPr lang="en-US" sz="1200" dirty="0">
+                          <a:solidFill>
+                            <a:srgbClr val="222222"/>
+                          </a:solidFill>
+                        </a:rPr>
+                        <a:t>12/3（木）</a:t>
+                      </a:r>
+                      <a:endParaRPr lang="en-US" sz="1200" dirty="0"/>
+                    </a:p>
+                  </a:txBody>
+                  <a:tcPr marL="76200" marR="76200" marT="25400" marB="25400" anchor="ctr">
+                    <a:lnL w="6350" cap="flat" cmpd="sng" algn="ctr">
+                      <a:solidFill>
+                        <a:srgbClr val="D9D9D9"/>
+                      </a:solidFill>
+                      <a:prstDash val="solid"/>
+                      <a:round/>
+                      <a:headEnd type="none" w="med" len="med"/>
+                      <a:tailEnd type="none" w="med" len="med"/>
+                    </a:lnL>
+                    <a:lnR w="6350" cap="flat" cmpd="sng" algn="ctr">
+                      <a:solidFill>
+                        <a:srgbClr val="D9D9D9"/>
+                      </a:solidFill>
+                      <a:prstDash val="solid"/>
+                      <a:round/>
+                      <a:headEnd type="none" w="med" len="med"/>
+                      <a:tailEnd type="none" w="med" len="med"/>
+                    </a:lnR>
+                    <a:lnT w="6350" cap="flat" cmpd="sng" algn="ctr">
+                      <a:solidFill>
+                        <a:srgbClr val="D9D9D9"/>
+                      </a:solidFill>
+                      <a:prstDash val="solid"/>
+                      <a:round/>
+                      <a:headEnd type="none" w="med" len="med"/>
+                      <a:tailEnd type="none" w="med" len="med"/>
+                    </a:lnT>
+                    <a:lnB w="6350" cap="flat" cmpd="sng" algn="ctr">
+                      <a:solidFill>
+                        <a:srgbClr val="D9D9D9"/>
+                      </a:solidFill>
+                      <a:prstDash val="solid"/>
+                      <a:round/>
+                      <a:headEnd type="none" w="med" len="med"/>
+                      <a:tailEnd type="none" w="med" len="med"/>
+                    </a:lnB>
+                    <a:solidFill>
+                      <a:srgbClr val="FFFFFF"/>
+                    </a:solidFill>
+                  </a:tcPr>
+                </a:tc>
+                <a:tc>
+                  <a:txBody>
+                    <a:bodyPr/>
+                    <a:lstStyle/>
+                    <a:p>
+                      <a:pPr indent="0" marL="0">
+                        <a:buNone/>
+                      </a:pPr>
+                      <a:r>
+                        <a:rPr lang="en-US" sz="1200" b="1" dirty="0">
+                          <a:solidFill>
+                            <a:srgbClr val="C8102E"/>
+                          </a:solidFill>
+                        </a:rPr>
+                        <a:t>12:00</a:t>
+                      </a:r>
+                      <a:endParaRPr lang="en-US" sz="1200" dirty="0"/>
+                    </a:p>
+                  </a:txBody>
+                  <a:tcPr marL="76200" marR="76200" marT="25400" marB="25400" anchor="ctr">
+                    <a:lnL w="6350" cap="flat" cmpd="sng" algn="ctr">
+                      <a:solidFill>
+                        <a:srgbClr val="D9D9D9"/>
+                      </a:solidFill>
+                      <a:prstDash val="solid"/>
+                      <a:round/>
+                      <a:headEnd type="none" w="med" len="med"/>
+                      <a:tailEnd type="none" w="med" len="med"/>
+                    </a:lnL>
+                    <a:lnR w="6350" cap="flat" cmpd="sng" algn="ctr">
+                      <a:solidFill>
+                        <a:srgbClr val="D9D9D9"/>
+                      </a:solidFill>
+                      <a:prstDash val="solid"/>
+                      <a:round/>
+                      <a:headEnd type="none" w="med" len="med"/>
+                      <a:tailEnd type="none" w="med" len="med"/>
+                    </a:lnR>
+                    <a:lnT w="6350" cap="flat" cmpd="sng" algn="ctr">
+                      <a:solidFill>
+                        <a:srgbClr val="D9D9D9"/>
+                      </a:solidFill>
+                      <a:prstDash val="solid"/>
+                      <a:round/>
+                      <a:headEnd type="none" w="med" len="med"/>
+                      <a:tailEnd type="none" w="med" len="med"/>
+                    </a:lnT>
+                    <a:lnB w="6350" cap="flat" cmpd="sng" algn="ctr">
+                      <a:solidFill>
+                        <a:srgbClr val="D9D9D9"/>
+                      </a:solidFill>
+                      <a:prstDash val="solid"/>
+                      <a:round/>
+                      <a:headEnd type="none" w="med" len="med"/>
+                      <a:tailEnd type="none" w="med" len="med"/>
+                    </a:lnB>
+                    <a:solidFill>
+                      <a:srgbClr val="FFFFFF"/>
+                    </a:solidFill>
+                  </a:tcPr>
+                </a:tc>
+                <a:tc>
+                  <a:txBody>
+                    <a:bodyPr/>
+                    <a:lstStyle/>
+                    <a:p>
+                      <a:pPr indent="0" marL="0">
+                        <a:buNone/>
+                      </a:pPr>
+                      <a:r>
+                        <a:rPr lang="en-US" sz="1200" dirty="0">
+                          <a:solidFill>
+                            <a:srgbClr val="222222"/>
+                          </a:solidFill>
+                        </a:rPr>
+                        <a:t>動画公開</a:t>
+                      </a:r>
+                      <a:endParaRPr lang="en-US" sz="1200" dirty="0"/>
+                    </a:p>
+                  </a:txBody>
+                  <a:tcPr marL="76200" marR="76200" marT="25400" marB="25400" anchor="ctr">
+                    <a:lnL w="6350" cap="flat" cmpd="sng" algn="ctr">
+                      <a:solidFill>
+                        <a:srgbClr val="D9D9D9"/>
+                      </a:solidFill>
+                      <a:prstDash val="solid"/>
+                      <a:round/>
+                      <a:headEnd type="none" w="med" len="med"/>
+                      <a:tailEnd type="none" w="med" len="med"/>
+                    </a:lnL>
+                    <a:lnR w="6350" cap="flat" cmpd="sng" algn="ctr">
+                      <a:solidFill>
+                        <a:srgbClr val="D9D9D9"/>
+                      </a:solidFill>
+                      <a:prstDash val="solid"/>
+                      <a:round/>
+                      <a:headEnd type="none" w="med" len="med"/>
+                      <a:tailEnd type="none" w="med" len="med"/>
+                    </a:lnR>
+                    <a:lnT w="6350" cap="flat" cmpd="sng" algn="ctr">
+                      <a:solidFill>
+                        <a:srgbClr val="D9D9D9"/>
+                      </a:solidFill>
+                      <a:prstDash val="solid"/>
+                      <a:round/>
+                      <a:headEnd type="none" w="med" len="med"/>
+                      <a:tailEnd type="none" w="med" len="med"/>
+                    </a:lnT>
+                    <a:lnB w="6350" cap="flat" cmpd="sng" algn="ctr">
+                      <a:solidFill>
+                        <a:srgbClr val="D9D9D9"/>
+                      </a:solidFill>
+                      <a:prstDash val="solid"/>
+                      <a:round/>
+                      <a:headEnd type="none" w="med" len="med"/>
+                      <a:tailEnd type="none" w="med" len="med"/>
+                    </a:lnB>
+                    <a:solidFill>
+                      <a:srgbClr val="FFFFFF"/>
+                    </a:solidFill>
+                  </a:tcPr>
+                </a:tc>
+                <a:tc>
+                  <a:txBody>
+                    <a:bodyPr/>
+                    <a:lstStyle/>
+                    <a:p>
+                      <a:pPr indent="0" marL="0">
+                        <a:buNone/>
+                      </a:pPr>
+                      <a:r>
+                        <a:rPr lang="en-US" sz="1200" dirty="0">
+                          <a:solidFill>
+                            <a:srgbClr val="222222"/>
+                          </a:solidFill>
+                        </a:rPr>
+                        <a:t>第3弾ダイジェスト公開＋最終ライン2,000件を告知</a:t>
+                      </a:r>
+                      <a:endParaRPr lang="en-US" sz="1200" dirty="0"/>
+                    </a:p>
+                  </a:txBody>
+                  <a:tcPr marL="76200" marR="76200" marT="25400" marB="25400" anchor="ctr">
+                    <a:lnL w="6350" cap="flat" cmpd="sng" algn="ctr">
+                      <a:solidFill>
+                        <a:srgbClr val="D9D9D9"/>
+                      </a:solidFill>
+                      <a:prstDash val="solid"/>
+                      <a:round/>
+                      <a:headEnd type="none" w="med" len="med"/>
+                      <a:tailEnd type="none" w="med" len="med"/>
+                    </a:lnL>
+                    <a:lnR w="6350" cap="flat" cmpd="sng" algn="ctr">
+                      <a:solidFill>
+                        <a:srgbClr val="D9D9D9"/>
+                      </a:solidFill>
+                      <a:prstDash val="solid"/>
+                      <a:round/>
+                      <a:headEnd type="none" w="med" len="med"/>
+                      <a:tailEnd type="none" w="med" len="med"/>
+                    </a:lnR>
+                    <a:lnT w="6350" cap="flat" cmpd="sng" algn="ctr">
+                      <a:solidFill>
+                        <a:srgbClr val="D9D9D9"/>
+                      </a:solidFill>
+                      <a:prstDash val="solid"/>
+                      <a:round/>
+                      <a:headEnd type="none" w="med" len="med"/>
+                      <a:tailEnd type="none" w="med" len="med"/>
+                    </a:lnT>
+                    <a:lnB w="6350" cap="flat" cmpd="sng" algn="ctr">
+                      <a:solidFill>
+                        <a:srgbClr val="D9D9D9"/>
+                      </a:solidFill>
+                      <a:prstDash val="solid"/>
+                      <a:round/>
+                      <a:headEnd type="none" w="med" len="med"/>
+                      <a:tailEnd type="none" w="med" len="med"/>
+                    </a:lnB>
+                    <a:solidFill>
+                      <a:srgbClr val="FFFFFF"/>
+                    </a:solidFill>
+                  </a:tcPr>
+                </a:tc>
+                <a:tc>
+                  <a:txBody>
+                    <a:bodyPr/>
+                    <a:lstStyle/>
+                    <a:p>
+                      <a:pPr algn="ctr" indent="0" marL="0">
+                        <a:buNone/>
+                      </a:pPr>
+                      <a:r>
+                        <a:rPr lang="en-US" sz="1200" b="1" dirty="0">
+                          <a:solidFill>
+                            <a:srgbClr val="C8102E"/>
+                          </a:solidFill>
+                        </a:rPr>
+                        <a:t>B：12時</a:t>
+                      </a:r>
+                      <a:endParaRPr lang="en-US" sz="1200" dirty="0"/>
+                    </a:p>
+                  </a:txBody>
+                  <a:tcPr marL="76200" marR="76200" marT="25400" marB="25400" anchor="ctr">
+                    <a:lnL w="6350" cap="flat" cmpd="sng" algn="ctr">
+                      <a:solidFill>
+                        <a:srgbClr val="D9D9D9"/>
+                      </a:solidFill>
+                      <a:prstDash val="solid"/>
+                      <a:round/>
+                      <a:headEnd type="none" w="med" len="med"/>
+                      <a:tailEnd type="none" w="med" len="med"/>
+                    </a:lnL>
+                    <a:lnR w="6350" cap="flat" cmpd="sng" algn="ctr">
+                      <a:solidFill>
+                        <a:srgbClr val="D9D9D9"/>
+                      </a:solidFill>
+                      <a:prstDash val="solid"/>
+                      <a:round/>
+                      <a:headEnd type="none" w="med" len="med"/>
+                      <a:tailEnd type="none" w="med" len="med"/>
+                    </a:lnR>
+                    <a:lnT w="6350" cap="flat" cmpd="sng" algn="ctr">
+                      <a:solidFill>
+                        <a:srgbClr val="D9D9D9"/>
+                      </a:solidFill>
+                      <a:prstDash val="solid"/>
+                      <a:round/>
+                      <a:headEnd type="none" w="med" len="med"/>
+                      <a:tailEnd type="none" w="med" len="med"/>
+                    </a:lnT>
+                    <a:lnB w="6350" cap="flat" cmpd="sng" algn="ctr">
+                      <a:solidFill>
+                        <a:srgbClr val="D9D9D9"/>
+                      </a:solidFill>
+                      <a:prstDash val="solid"/>
+                      <a:round/>
+                      <a:headEnd type="none" w="med" len="med"/>
+                      <a:tailEnd type="none" w="med" len="med"/>
+                    </a:lnB>
+                    <a:solidFill>
+                      <a:srgbClr val="FFFFFF"/>
+                    </a:solidFill>
+                  </a:tcPr>
+                </a:tc>
+                <a:tc>
+                  <a:txBody>
+                    <a:bodyPr/>
+                    <a:lstStyle/>
+                    <a:p>
+                      <a:pPr algn="ctr" indent="0" marL="0">
+                        <a:buNone/>
+                      </a:pPr>
+                      <a:endParaRPr lang="en-US" sz="1200" dirty="0"/>
+                    </a:p>
+                  </a:txBody>
+                  <a:tcPr marL="76200" marR="76200" marT="25400" marB="25400" anchor="ctr">
+                    <a:lnL w="6350" cap="flat" cmpd="sng" algn="ctr">
+                      <a:solidFill>
+                        <a:srgbClr val="D9D9D9"/>
+                      </a:solidFill>
+                      <a:prstDash val="solid"/>
+                      <a:round/>
+                      <a:headEnd type="none" w="med" len="med"/>
+                      <a:tailEnd type="none" w="med" len="med"/>
+                    </a:lnL>
+                    <a:lnR w="6350" cap="flat" cmpd="sng" algn="ctr">
+                      <a:solidFill>
+                        <a:srgbClr val="D9D9D9"/>
+                      </a:solidFill>
+                      <a:prstDash val="solid"/>
+                      <a:round/>
+                      <a:headEnd type="none" w="med" len="med"/>
+                      <a:tailEnd type="none" w="med" len="med"/>
+                    </a:lnR>
+                    <a:lnT w="6350" cap="flat" cmpd="sng" algn="ctr">
+                      <a:solidFill>
+                        <a:srgbClr val="D9D9D9"/>
+                      </a:solidFill>
+                      <a:prstDash val="solid"/>
+                      <a:round/>
+                      <a:headEnd type="none" w="med" len="med"/>
+                      <a:tailEnd type="none" w="med" len="med"/>
+                    </a:lnT>
+                    <a:lnB w="6350" cap="flat" cmpd="sng" algn="ctr">
+                      <a:solidFill>
+                        <a:srgbClr val="D9D9D9"/>
+                      </a:solidFill>
+                      <a:prstDash val="solid"/>
+                      <a:round/>
+                      <a:headEnd type="none" w="med" len="med"/>
+                      <a:tailEnd type="none" w="med" len="med"/>
+                    </a:lnB>
+                    <a:solidFill>
+                      <a:srgbClr val="FFFFFF"/>
+                    </a:solidFill>
+                  </a:tcPr>
+                </a:tc>
+              </a:tr>
+              <a:tr h="301752">
+                <a:tc>
+                  <a:txBody>
+                    <a:bodyPr/>
+                    <a:lstStyle/>
+                    <a:p>
+                      <a:pPr indent="0" marL="0">
+                        <a:buNone/>
+                      </a:pPr>
+                      <a:r>
+                        <a:rPr lang="en-US" sz="1200" dirty="0">
+                          <a:solidFill>
+                            <a:srgbClr val="222222"/>
+                          </a:solidFill>
+                        </a:rPr>
+                        <a:t>12/6（日）</a:t>
+                      </a:r>
+                      <a:endParaRPr lang="en-US" sz="1200" dirty="0"/>
+                    </a:p>
+                  </a:txBody>
+                  <a:tcPr marL="76200" marR="76200" marT="25400" marB="25400" anchor="ctr">
+                    <a:lnL w="6350" cap="flat" cmpd="sng" algn="ctr">
+                      <a:solidFill>
+                        <a:srgbClr val="D9D9D9"/>
+                      </a:solidFill>
+                      <a:prstDash val="solid"/>
+                      <a:round/>
+                      <a:headEnd type="none" w="med" len="med"/>
+                      <a:tailEnd type="none" w="med" len="med"/>
+                    </a:lnL>
+                    <a:lnR w="6350" cap="flat" cmpd="sng" algn="ctr">
+                      <a:solidFill>
+                        <a:srgbClr val="D9D9D9"/>
+                      </a:solidFill>
+                      <a:prstDash val="solid"/>
+                      <a:round/>
+                      <a:headEnd type="none" w="med" len="med"/>
+                      <a:tailEnd type="none" w="med" len="med"/>
+                    </a:lnR>
+                    <a:lnT w="6350" cap="flat" cmpd="sng" algn="ctr">
+                      <a:solidFill>
+                        <a:srgbClr val="D9D9D9"/>
+                      </a:solidFill>
+                      <a:prstDash val="solid"/>
+                      <a:round/>
+                      <a:headEnd type="none" w="med" len="med"/>
+                      <a:tailEnd type="none" w="med" len="med"/>
+                    </a:lnT>
+                    <a:lnB w="6350" cap="flat" cmpd="sng" algn="ctr">
+                      <a:solidFill>
+                        <a:srgbClr val="D9D9D9"/>
+                      </a:solidFill>
+                      <a:prstDash val="solid"/>
+                      <a:round/>
+                      <a:headEnd type="none" w="med" len="med"/>
+                      <a:tailEnd type="none" w="med" len="med"/>
+                    </a:lnB>
+                    <a:solidFill>
+                      <a:srgbClr val="F5F5F5"/>
+                    </a:solidFill>
+                  </a:tcPr>
+                </a:tc>
+                <a:tc>
+                  <a:txBody>
+                    <a:bodyPr/>
+                    <a:lstStyle/>
+                    <a:p>
+                      <a:pPr indent="0" marL="0">
+                        <a:buNone/>
+                      </a:pPr>
+                      <a:r>
+                        <a:rPr lang="en-US" sz="1200" dirty="0">
+                          <a:solidFill>
+                            <a:srgbClr val="222222"/>
+                          </a:solidFill>
+                        </a:rPr>
+                        <a:t>17:00</a:t>
+                      </a:r>
+                      <a:endParaRPr lang="en-US" sz="1200" dirty="0"/>
+                    </a:p>
+                  </a:txBody>
+                  <a:tcPr marL="76200" marR="76200" marT="25400" marB="25400" anchor="ctr">
+                    <a:lnL w="6350" cap="flat" cmpd="sng" algn="ctr">
+                      <a:solidFill>
+                        <a:srgbClr val="D9D9D9"/>
+                      </a:solidFill>
+                      <a:prstDash val="solid"/>
+                      <a:round/>
+                      <a:headEnd type="none" w="med" len="med"/>
+                      <a:tailEnd type="none" w="med" len="med"/>
+                    </a:lnL>
+                    <a:lnR w="6350" cap="flat" cmpd="sng" algn="ctr">
+                      <a:solidFill>
+                        <a:srgbClr val="D9D9D9"/>
+                      </a:solidFill>
+                      <a:prstDash val="solid"/>
+                      <a:round/>
+                      <a:headEnd type="none" w="med" len="med"/>
+                      <a:tailEnd type="none" w="med" len="med"/>
+                    </a:lnR>
+                    <a:lnT w="6350" cap="flat" cmpd="sng" algn="ctr">
+                      <a:solidFill>
+                        <a:srgbClr val="D9D9D9"/>
+                      </a:solidFill>
+                      <a:prstDash val="solid"/>
+                      <a:round/>
+                      <a:headEnd type="none" w="med" len="med"/>
+                      <a:tailEnd type="none" w="med" len="med"/>
+                    </a:lnT>
+                    <a:lnB w="6350" cap="flat" cmpd="sng" algn="ctr">
+                      <a:solidFill>
+                        <a:srgbClr val="D9D9D9"/>
+                      </a:solidFill>
+                      <a:prstDash val="solid"/>
+                      <a:round/>
+                      <a:headEnd type="none" w="med" len="med"/>
+                      <a:tailEnd type="none" w="med" len="med"/>
+                    </a:lnB>
+                    <a:solidFill>
+                      <a:srgbClr val="F5F5F5"/>
+                    </a:solidFill>
+                  </a:tcPr>
+                </a:tc>
+                <a:tc>
+                  <a:txBody>
+                    <a:bodyPr/>
+                    <a:lstStyle/>
+                    <a:p>
+                      <a:pPr indent="0" marL="0">
+                        <a:buNone/>
+                      </a:pPr>
+                      <a:r>
+                        <a:rPr lang="en-US" sz="1200" dirty="0">
+                          <a:solidFill>
+                            <a:srgbClr val="222222"/>
+                          </a:solidFill>
+                        </a:rPr>
+                        <a:t>リマインド</a:t>
+                      </a:r>
+                      <a:endParaRPr lang="en-US" sz="1200" dirty="0"/>
+                    </a:p>
+                  </a:txBody>
+                  <a:tcPr marL="76200" marR="76200" marT="25400" marB="25400" anchor="ctr">
+                    <a:lnL w="6350" cap="flat" cmpd="sng" algn="ctr">
+                      <a:solidFill>
+                        <a:srgbClr val="D9D9D9"/>
+                      </a:solidFill>
+                      <a:prstDash val="solid"/>
+                      <a:round/>
+                      <a:headEnd type="none" w="med" len="med"/>
+                      <a:tailEnd type="none" w="med" len="med"/>
+                    </a:lnL>
+                    <a:lnR w="6350" cap="flat" cmpd="sng" algn="ctr">
+                      <a:solidFill>
+                        <a:srgbClr val="D9D9D9"/>
+                      </a:solidFill>
+                      <a:prstDash val="solid"/>
+                      <a:round/>
+                      <a:headEnd type="none" w="med" len="med"/>
+                      <a:tailEnd type="none" w="med" len="med"/>
+                    </a:lnR>
+                    <a:lnT w="6350" cap="flat" cmpd="sng" algn="ctr">
+                      <a:solidFill>
+                        <a:srgbClr val="D9D9D9"/>
+                      </a:solidFill>
+                      <a:prstDash val="solid"/>
+                      <a:round/>
+                      <a:headEnd type="none" w="med" len="med"/>
+                      <a:tailEnd type="none" w="med" len="med"/>
+                    </a:lnT>
+                    <a:lnB w="6350" cap="flat" cmpd="sng" algn="ctr">
+                      <a:solidFill>
+                        <a:srgbClr val="D9D9D9"/>
+                      </a:solidFill>
+                      <a:prstDash val="solid"/>
+                      <a:round/>
+                      <a:headEnd type="none" w="med" len="med"/>
+                      <a:tailEnd type="none" w="med" len="med"/>
+                    </a:lnB>
+                    <a:solidFill>
+                      <a:srgbClr val="F5F5F5"/>
+                    </a:solidFill>
+                  </a:tcPr>
+                </a:tc>
+                <a:tc>
+                  <a:txBody>
+                    <a:bodyPr/>
+                    <a:lstStyle/>
+                    <a:p>
+                      <a:pPr indent="0" marL="0">
+                        <a:buNone/>
+                      </a:pPr>
+                      <a:r>
+                        <a:rPr lang="en-US" sz="1200" dirty="0">
+                          <a:solidFill>
+                            <a:srgbClr val="222222"/>
+                          </a:solidFill>
+                        </a:rPr>
+                        <a:t>「ラスト1週間」（動画ペアの結果で時刻を見直し）</a:t>
+                      </a:r>
+                      <a:endParaRPr lang="en-US" sz="1200" dirty="0"/>
+                    </a:p>
+                  </a:txBody>
+                  <a:tcPr marL="76200" marR="76200" marT="25400" marB="25400" anchor="ctr">
+                    <a:lnL w="6350" cap="flat" cmpd="sng" algn="ctr">
+                      <a:solidFill>
+                        <a:srgbClr val="D9D9D9"/>
+                      </a:solidFill>
+                      <a:prstDash val="solid"/>
+                      <a:round/>
+                      <a:headEnd type="none" w="med" len="med"/>
+                      <a:tailEnd type="none" w="med" len="med"/>
+                    </a:lnL>
+                    <a:lnR w="6350" cap="flat" cmpd="sng" algn="ctr">
+                      <a:solidFill>
+                        <a:srgbClr val="D9D9D9"/>
+                      </a:solidFill>
+                      <a:prstDash val="solid"/>
+                      <a:round/>
+                      <a:headEnd type="none" w="med" len="med"/>
+                      <a:tailEnd type="none" w="med" len="med"/>
+                    </a:lnR>
+                    <a:lnT w="6350" cap="flat" cmpd="sng" algn="ctr">
+                      <a:solidFill>
+                        <a:srgbClr val="D9D9D9"/>
+                      </a:solidFill>
+                      <a:prstDash val="solid"/>
+                      <a:round/>
+                      <a:headEnd type="none" w="med" len="med"/>
+                      <a:tailEnd type="none" w="med" len="med"/>
+                    </a:lnT>
+                    <a:lnB w="6350" cap="flat" cmpd="sng" algn="ctr">
+                      <a:solidFill>
+                        <a:srgbClr val="D9D9D9"/>
+                      </a:solidFill>
+                      <a:prstDash val="solid"/>
+                      <a:round/>
+                      <a:headEnd type="none" w="med" len="med"/>
+                      <a:tailEnd type="none" w="med" len="med"/>
+                    </a:lnB>
+                    <a:solidFill>
+                      <a:srgbClr val="F5F5F5"/>
+                    </a:solidFill>
+                  </a:tcPr>
+                </a:tc>
+                <a:tc>
+                  <a:txBody>
+                    <a:bodyPr/>
+                    <a:lstStyle/>
+                    <a:p>
+                      <a:pPr algn="ctr" indent="0" marL="0">
+                        <a:buNone/>
+                      </a:pPr>
+                      <a:endParaRPr lang="en-US" sz="1200" dirty="0"/>
+                    </a:p>
+                  </a:txBody>
+                  <a:tcPr marL="76200" marR="76200" marT="25400" marB="25400" anchor="ctr">
+                    <a:lnL w="6350" cap="flat" cmpd="sng" algn="ctr">
+                      <a:solidFill>
+                        <a:srgbClr val="D9D9D9"/>
+                      </a:solidFill>
+                      <a:prstDash val="solid"/>
+                      <a:round/>
+                      <a:headEnd type="none" w="med" len="med"/>
+                      <a:tailEnd type="none" w="med" len="med"/>
+                    </a:lnL>
+                    <a:lnR w="6350" cap="flat" cmpd="sng" algn="ctr">
+                      <a:solidFill>
+                        <a:srgbClr val="D9D9D9"/>
+                      </a:solidFill>
+                      <a:prstDash val="solid"/>
+                      <a:round/>
+                      <a:headEnd type="none" w="med" len="med"/>
+                      <a:tailEnd type="none" w="med" len="med"/>
+                    </a:lnR>
+                    <a:lnT w="6350" cap="flat" cmpd="sng" algn="ctr">
+                      <a:solidFill>
+                        <a:srgbClr val="D9D9D9"/>
+                      </a:solidFill>
+                      <a:prstDash val="solid"/>
+                      <a:round/>
+                      <a:headEnd type="none" w="med" len="med"/>
+                      <a:tailEnd type="none" w="med" len="med"/>
+                    </a:lnT>
+                    <a:lnB w="6350" cap="flat" cmpd="sng" algn="ctr">
+                      <a:solidFill>
+                        <a:srgbClr val="D9D9D9"/>
+                      </a:solidFill>
+                      <a:prstDash val="solid"/>
+                      <a:round/>
+                      <a:headEnd type="none" w="med" len="med"/>
+                      <a:tailEnd type="none" w="med" len="med"/>
+                    </a:lnB>
+                    <a:solidFill>
+                      <a:srgbClr val="F5F5F5"/>
+                    </a:solidFill>
+                  </a:tcPr>
+                </a:tc>
+                <a:tc>
+                  <a:txBody>
+                    <a:bodyPr/>
+                    <a:lstStyle/>
+                    <a:p>
+                      <a:pPr algn="ctr" indent="0" marL="0">
+                        <a:buNone/>
+                      </a:pPr>
+                      <a:endParaRPr lang="en-US" sz="1200" dirty="0"/>
+                    </a:p>
+                  </a:txBody>
+                  <a:tcPr marL="76200" marR="76200" marT="25400" marB="25400" anchor="ctr">
+                    <a:lnL w="6350" cap="flat" cmpd="sng" algn="ctr">
+                      <a:solidFill>
+                        <a:srgbClr val="D9D9D9"/>
+                      </a:solidFill>
+                      <a:prstDash val="solid"/>
+                      <a:round/>
+                      <a:headEnd type="none" w="med" len="med"/>
+                      <a:tailEnd type="none" w="med" len="med"/>
+                    </a:lnL>
+                    <a:lnR w="6350" cap="flat" cmpd="sng" algn="ctr">
+                      <a:solidFill>
+                        <a:srgbClr val="D9D9D9"/>
+                      </a:solidFill>
+                      <a:prstDash val="solid"/>
+                      <a:round/>
+                      <a:headEnd type="none" w="med" len="med"/>
+                      <a:tailEnd type="none" w="med" len="med"/>
+                    </a:lnR>
+                    <a:lnT w="6350" cap="flat" cmpd="sng" algn="ctr">
+                      <a:solidFill>
+                        <a:srgbClr val="D9D9D9"/>
+                      </a:solidFill>
+                      <a:prstDash val="solid"/>
+                      <a:round/>
+                      <a:headEnd type="none" w="med" len="med"/>
+                      <a:tailEnd type="none" w="med" len="med"/>
+                    </a:lnT>
+                    <a:lnB w="6350" cap="flat" cmpd="sng" algn="ctr">
+                      <a:solidFill>
+                        <a:srgbClr val="D9D9D9"/>
+                      </a:solidFill>
+                      <a:prstDash val="solid"/>
+                      <a:round/>
+                      <a:headEnd type="none" w="med" len="med"/>
+                      <a:tailEnd type="none" w="med" len="med"/>
+                    </a:lnB>
+                    <a:solidFill>
+                      <a:srgbClr val="F5F5F5"/>
+                    </a:solidFill>
+                  </a:tcPr>
+                </a:tc>
+              </a:tr>
+              <a:tr h="301752">
+                <a:tc>
+                  <a:txBody>
+                    <a:bodyPr/>
+                    <a:lstStyle/>
+                    <a:p>
+                      <a:pPr indent="0" marL="0">
+                        <a:buNone/>
+                      </a:pPr>
+                      <a:r>
+                        <a:rPr lang="en-US" sz="1200" dirty="0">
+                          <a:solidFill>
+                            <a:srgbClr val="222222"/>
+                          </a:solidFill>
+                        </a:rPr>
+                        <a:t>12/10（木）</a:t>
                       </a:r>
                       <a:endParaRPr lang="en-US" sz="1200" dirty="0"/>
                     </a:p>
@@ -9907,7 +12627,7 @@
                             <a:srgbClr val="222222"/>
                           </a:solidFill>
                         </a:rPr>
-                        <a:t>動画公開</a:t>
+                        <a:t>リマインド</a:t>
                       </a:r>
                       <a:endParaRPr lang="en-US" sz="1200" dirty="0"/>
                     </a:p>
@@ -9968,7 +12688,68 @@
                             <a:srgbClr val="222222"/>
                           </a:solidFill>
                         </a:rPr>
-                        <a:t>第2弾ダイジェスト公開＋次の目標</a:t>
+                        <a:t>「残り3日」</a:t>
+                      </a:r>
+                      <a:endParaRPr lang="en-US" sz="1200" dirty="0"/>
+                    </a:p>
+                  </a:txBody>
+                  <a:tcPr marL="76200" marR="76200" marT="25400" marB="25400" anchor="ctr">
+                    <a:lnL w="6350" cap="flat" cmpd="sng" algn="ctr">
+                      <a:solidFill>
+                        <a:srgbClr val="D9D9D9"/>
+                      </a:solidFill>
+                      <a:prstDash val="solid"/>
+                      <a:round/>
+                      <a:headEnd type="none" w="med" len="med"/>
+                      <a:tailEnd type="none" w="med" len="med"/>
+                    </a:lnL>
+                    <a:lnR w="6350" cap="flat" cmpd="sng" algn="ctr">
+                      <a:solidFill>
+                        <a:srgbClr val="D9D9D9"/>
+                      </a:solidFill>
+                      <a:prstDash val="solid"/>
+                      <a:round/>
+                      <a:headEnd type="none" w="med" len="med"/>
+                      <a:tailEnd type="none" w="med" len="med"/>
+                    </a:lnR>
+                    <a:lnT w="6350" cap="flat" cmpd="sng" algn="ctr">
+                      <a:solidFill>
+                        <a:srgbClr val="D9D9D9"/>
+                      </a:solidFill>
+                      <a:prstDash val="solid"/>
+                      <a:round/>
+                      <a:headEnd type="none" w="med" len="med"/>
+                      <a:tailEnd type="none" w="med" len="med"/>
+                    </a:lnT>
+                    <a:lnB w="6350" cap="flat" cmpd="sng" algn="ctr">
+                      <a:solidFill>
+                        <a:srgbClr val="D9D9D9"/>
+                      </a:solidFill>
+                      <a:prstDash val="solid"/>
+                      <a:round/>
+                      <a:headEnd type="none" w="med" len="med"/>
+                      <a:tailEnd type="none" w="med" len="med"/>
+                    </a:lnB>
+                    <a:solidFill>
+                      <a:srgbClr val="FFFFFF"/>
+                    </a:solidFill>
+                  </a:tcPr>
+                </a:tc>
+                <a:tc>
+                  <a:txBody>
+                    <a:bodyPr/>
+                    <a:lstStyle/>
+                    <a:p>
+                      <a:pPr algn="ctr" indent="0" marL="0">
+                        <a:buNone/>
+                      </a:pPr>
+                      <a:r>
+                        <a:rPr lang="en-US" sz="1200" b="1" dirty="0">
+                          <a:solidFill>
+                            <a:srgbClr val="222222"/>
+                          </a:solidFill>
+                        </a:rPr>
+                        <a:t>A：17時</a:t>
                       </a:r>
                       <a:endParaRPr lang="en-US" sz="1200" dirty="0"/>
                     </a:p>
@@ -10079,12 +12860,12 @@
                         <a:buNone/>
                       </a:pPr>
                       <a:r>
-                        <a:rPr lang="en-US" sz="1200" dirty="0">
+                        <a:rPr lang="en-US" sz="1200" b="1" dirty="0">
                           <a:solidFill>
                             <a:srgbClr val="222222"/>
                           </a:solidFill>
                         </a:rPr>
-                        <a:t>11/26（木）</a:t>
+                        <a:t>12/11（金）</a:t>
                       </a:r>
                       <a:endParaRPr lang="en-US" sz="1200" dirty="0"/>
                     </a:p>
@@ -10201,9 +12982,9 @@
                         <a:buNone/>
                       </a:pPr>
                       <a:r>
-                        <a:rPr lang="en-US" sz="1200" dirty="0">
+                        <a:rPr lang="en-US" sz="1200" b="1" dirty="0">
                           <a:solidFill>
-                            <a:srgbClr val="222222"/>
+                            <a:srgbClr val="C8102E"/>
                           </a:solidFill>
                         </a:rPr>
                         <a:t>リマインド</a:t>
@@ -10267,7 +13048,7 @@
                             <a:srgbClr val="222222"/>
                           </a:solidFill>
                         </a:rPr>
-                        <a:t>途中経過「あと◯件で第3弾」</a:t>
+                        <a:t>締切前日（ラストスパート）</a:t>
                       </a:r>
                       <a:endParaRPr lang="en-US" sz="1200" dirty="0"/>
                     </a:p>
@@ -10364,252 +13145,6 @@
                     </a:lnB>
                     <a:solidFill>
                       <a:srgbClr val="F5F5F5"/>
-                    </a:solidFill>
-                  </a:tcPr>
-                </a:tc>
-              </a:tr>
-              <a:tr h="301752">
-                <a:tc>
-                  <a:txBody>
-                    <a:bodyPr/>
-                    <a:lstStyle/>
-                    <a:p>
-                      <a:pPr indent="0" marL="0">
-                        <a:buNone/>
-                      </a:pPr>
-                      <a:r>
-                        <a:rPr lang="en-US" sz="1200" b="1" dirty="0">
-                          <a:solidFill>
-                            <a:srgbClr val="222222"/>
-                          </a:solidFill>
-                        </a:rPr>
-                        <a:t>11/29（日）</a:t>
-                      </a:r>
-                      <a:endParaRPr lang="en-US" sz="1200" dirty="0"/>
-                    </a:p>
-                  </a:txBody>
-                  <a:tcPr marL="76200" marR="76200" marT="25400" marB="25400" anchor="ctr">
-                    <a:lnL w="6350" cap="flat" cmpd="sng" algn="ctr">
-                      <a:solidFill>
-                        <a:srgbClr val="D9D9D9"/>
-                      </a:solidFill>
-                      <a:prstDash val="solid"/>
-                      <a:round/>
-                      <a:headEnd type="none" w="med" len="med"/>
-                      <a:tailEnd type="none" w="med" len="med"/>
-                    </a:lnL>
-                    <a:lnR w="6350" cap="flat" cmpd="sng" algn="ctr">
-                      <a:solidFill>
-                        <a:srgbClr val="D9D9D9"/>
-                      </a:solidFill>
-                      <a:prstDash val="solid"/>
-                      <a:round/>
-                      <a:headEnd type="none" w="med" len="med"/>
-                      <a:tailEnd type="none" w="med" len="med"/>
-                    </a:lnR>
-                    <a:lnT w="6350" cap="flat" cmpd="sng" algn="ctr">
-                      <a:solidFill>
-                        <a:srgbClr val="D9D9D9"/>
-                      </a:solidFill>
-                      <a:prstDash val="solid"/>
-                      <a:round/>
-                      <a:headEnd type="none" w="med" len="med"/>
-                      <a:tailEnd type="none" w="med" len="med"/>
-                    </a:lnT>
-                    <a:lnB w="6350" cap="flat" cmpd="sng" algn="ctr">
-                      <a:solidFill>
-                        <a:srgbClr val="D9D9D9"/>
-                      </a:solidFill>
-                      <a:prstDash val="solid"/>
-                      <a:round/>
-                      <a:headEnd type="none" w="med" len="med"/>
-                      <a:tailEnd type="none" w="med" len="med"/>
-                    </a:lnB>
-                    <a:solidFill>
-                      <a:srgbClr val="FFFFFF"/>
-                    </a:solidFill>
-                  </a:tcPr>
-                </a:tc>
-                <a:tc>
-                  <a:txBody>
-                    <a:bodyPr/>
-                    <a:lstStyle/>
-                    <a:p>
-                      <a:pPr indent="0" marL="0">
-                        <a:buNone/>
-                      </a:pPr>
-                      <a:r>
-                        <a:rPr lang="en-US" sz="1200" dirty="0">
-                          <a:solidFill>
-                            <a:srgbClr val="222222"/>
-                          </a:solidFill>
-                        </a:rPr>
-                        <a:t>17:00</a:t>
-                      </a:r>
-                      <a:endParaRPr lang="en-US" sz="1200" dirty="0"/>
-                    </a:p>
-                  </a:txBody>
-                  <a:tcPr marL="76200" marR="76200" marT="25400" marB="25400" anchor="ctr">
-                    <a:lnL w="6350" cap="flat" cmpd="sng" algn="ctr">
-                      <a:solidFill>
-                        <a:srgbClr val="D9D9D9"/>
-                      </a:solidFill>
-                      <a:prstDash val="solid"/>
-                      <a:round/>
-                      <a:headEnd type="none" w="med" len="med"/>
-                      <a:tailEnd type="none" w="med" len="med"/>
-                    </a:lnL>
-                    <a:lnR w="6350" cap="flat" cmpd="sng" algn="ctr">
-                      <a:solidFill>
-                        <a:srgbClr val="D9D9D9"/>
-                      </a:solidFill>
-                      <a:prstDash val="solid"/>
-                      <a:round/>
-                      <a:headEnd type="none" w="med" len="med"/>
-                      <a:tailEnd type="none" w="med" len="med"/>
-                    </a:lnR>
-                    <a:lnT w="6350" cap="flat" cmpd="sng" algn="ctr">
-                      <a:solidFill>
-                        <a:srgbClr val="D9D9D9"/>
-                      </a:solidFill>
-                      <a:prstDash val="solid"/>
-                      <a:round/>
-                      <a:headEnd type="none" w="med" len="med"/>
-                      <a:tailEnd type="none" w="med" len="med"/>
-                    </a:lnT>
-                    <a:lnB w="6350" cap="flat" cmpd="sng" algn="ctr">
-                      <a:solidFill>
-                        <a:srgbClr val="D9D9D9"/>
-                      </a:solidFill>
-                      <a:prstDash val="solid"/>
-                      <a:round/>
-                      <a:headEnd type="none" w="med" len="med"/>
-                      <a:tailEnd type="none" w="med" len="med"/>
-                    </a:lnB>
-                    <a:solidFill>
-                      <a:srgbClr val="FFFFFF"/>
-                    </a:solidFill>
-                  </a:tcPr>
-                </a:tc>
-                <a:tc>
-                  <a:txBody>
-                    <a:bodyPr/>
-                    <a:lstStyle/>
-                    <a:p>
-                      <a:pPr indent="0" marL="0">
-                        <a:buNone/>
-                      </a:pPr>
-                      <a:r>
-                        <a:rPr lang="en-US" sz="1200" b="1" dirty="0">
-                          <a:solidFill>
-                            <a:srgbClr val="C8102E"/>
-                          </a:solidFill>
-                        </a:rPr>
-                        <a:t>リマインド</a:t>
-                      </a:r>
-                      <a:endParaRPr lang="en-US" sz="1200" dirty="0"/>
-                    </a:p>
-                  </a:txBody>
-                  <a:tcPr marL="76200" marR="76200" marT="25400" marB="25400" anchor="ctr">
-                    <a:lnL w="6350" cap="flat" cmpd="sng" algn="ctr">
-                      <a:solidFill>
-                        <a:srgbClr val="D9D9D9"/>
-                      </a:solidFill>
-                      <a:prstDash val="solid"/>
-                      <a:round/>
-                      <a:headEnd type="none" w="med" len="med"/>
-                      <a:tailEnd type="none" w="med" len="med"/>
-                    </a:lnL>
-                    <a:lnR w="6350" cap="flat" cmpd="sng" algn="ctr">
-                      <a:solidFill>
-                        <a:srgbClr val="D9D9D9"/>
-                      </a:solidFill>
-                      <a:prstDash val="solid"/>
-                      <a:round/>
-                      <a:headEnd type="none" w="med" len="med"/>
-                      <a:tailEnd type="none" w="med" len="med"/>
-                    </a:lnR>
-                    <a:lnT w="6350" cap="flat" cmpd="sng" algn="ctr">
-                      <a:solidFill>
-                        <a:srgbClr val="D9D9D9"/>
-                      </a:solidFill>
-                      <a:prstDash val="solid"/>
-                      <a:round/>
-                      <a:headEnd type="none" w="med" len="med"/>
-                      <a:tailEnd type="none" w="med" len="med"/>
-                    </a:lnT>
-                    <a:lnB w="6350" cap="flat" cmpd="sng" algn="ctr">
-                      <a:solidFill>
-                        <a:srgbClr val="D9D9D9"/>
-                      </a:solidFill>
-                      <a:prstDash val="solid"/>
-                      <a:round/>
-                      <a:headEnd type="none" w="med" len="med"/>
-                      <a:tailEnd type="none" w="med" len="med"/>
-                    </a:lnB>
-                    <a:solidFill>
-                      <a:srgbClr val="FFFFFF"/>
-                    </a:solidFill>
-                  </a:tcPr>
-                </a:tc>
-                <a:tc>
-                  <a:txBody>
-                    <a:bodyPr/>
-                    <a:lstStyle/>
-                    <a:p>
-                      <a:pPr indent="0" marL="0">
-                        <a:buNone/>
-                      </a:pPr>
-                      <a:r>
-                        <a:rPr lang="en-US" sz="1200" dirty="0">
-                          <a:solidFill>
-                            <a:srgbClr val="222222"/>
-                          </a:solidFill>
-                        </a:rPr>
-                        <a:t>中間の山場リマインド</a:t>
-                      </a:r>
-                      <a:endParaRPr lang="en-US" sz="1200" dirty="0"/>
-                    </a:p>
-                  </a:txBody>
-                  <a:tcPr marL="76200" marR="76200" marT="25400" marB="25400" anchor="ctr">
-                    <a:lnL w="6350" cap="flat" cmpd="sng" algn="ctr">
-                      <a:solidFill>
-                        <a:srgbClr val="D9D9D9"/>
-                      </a:solidFill>
-                      <a:prstDash val="solid"/>
-                      <a:round/>
-                      <a:headEnd type="none" w="med" len="med"/>
-                      <a:tailEnd type="none" w="med" len="med"/>
-                    </a:lnL>
-                    <a:lnR w="6350" cap="flat" cmpd="sng" algn="ctr">
-                      <a:solidFill>
-                        <a:srgbClr val="D9D9D9"/>
-                      </a:solidFill>
-                      <a:prstDash val="solid"/>
-                      <a:round/>
-                      <a:headEnd type="none" w="med" len="med"/>
-                      <a:tailEnd type="none" w="med" len="med"/>
-                    </a:lnR>
-                    <a:lnT w="6350" cap="flat" cmpd="sng" algn="ctr">
-                      <a:solidFill>
-                        <a:srgbClr val="D9D9D9"/>
-                      </a:solidFill>
-                      <a:prstDash val="solid"/>
-                      <a:round/>
-                      <a:headEnd type="none" w="med" len="med"/>
-                      <a:tailEnd type="none" w="med" len="med"/>
-                    </a:lnT>
-                    <a:lnB w="6350" cap="flat" cmpd="sng" algn="ctr">
-                      <a:solidFill>
-                        <a:srgbClr val="D9D9D9"/>
-                      </a:solidFill>
-                      <a:prstDash val="solid"/>
-                      <a:round/>
-                      <a:headEnd type="none" w="med" len="med"/>
-                      <a:tailEnd type="none" w="med" len="med"/>
-                    </a:lnB>
-                    <a:solidFill>
-                      <a:srgbClr val="FFFFFF"/>
                     </a:solidFill>
                   </a:tcPr>
                 </a:tc>
@@ -10670,1211 +13205,7 @@
                       <a:tailEnd type="none" w="med" len="med"/>
                     </a:lnB>
                     <a:solidFill>
-                      <a:srgbClr val="FFFFFF"/>
-                    </a:solidFill>
-                  </a:tcPr>
-                </a:tc>
-              </a:tr>
-              <a:tr h="301752">
-                <a:tc>
-                  <a:txBody>
-                    <a:bodyPr/>
-                    <a:lstStyle/>
-                    <a:p>
-                      <a:pPr indent="0" marL="0">
-                        <a:buNone/>
-                      </a:pPr>
-                      <a:r>
-                        <a:rPr lang="en-US" sz="1200" dirty="0">
-                          <a:solidFill>
-                            <a:srgbClr val="222222"/>
-                          </a:solidFill>
-                        </a:rPr>
-                        <a:t>12/3（木）</a:t>
-                      </a:r>
-                      <a:endParaRPr lang="en-US" sz="1200" dirty="0"/>
-                    </a:p>
-                  </a:txBody>
-                  <a:tcPr marL="76200" marR="76200" marT="25400" marB="25400" anchor="ctr">
-                    <a:lnL w="6350" cap="flat" cmpd="sng" algn="ctr">
-                      <a:solidFill>
-                        <a:srgbClr val="D9D9D9"/>
-                      </a:solidFill>
-                      <a:prstDash val="solid"/>
-                      <a:round/>
-                      <a:headEnd type="none" w="med" len="med"/>
-                      <a:tailEnd type="none" w="med" len="med"/>
-                    </a:lnL>
-                    <a:lnR w="6350" cap="flat" cmpd="sng" algn="ctr">
-                      <a:solidFill>
-                        <a:srgbClr val="D9D9D9"/>
-                      </a:solidFill>
-                      <a:prstDash val="solid"/>
-                      <a:round/>
-                      <a:headEnd type="none" w="med" len="med"/>
-                      <a:tailEnd type="none" w="med" len="med"/>
-                    </a:lnR>
-                    <a:lnT w="6350" cap="flat" cmpd="sng" algn="ctr">
-                      <a:solidFill>
-                        <a:srgbClr val="D9D9D9"/>
-                      </a:solidFill>
-                      <a:prstDash val="solid"/>
-                      <a:round/>
-                      <a:headEnd type="none" w="med" len="med"/>
-                      <a:tailEnd type="none" w="med" len="med"/>
-                    </a:lnT>
-                    <a:lnB w="6350" cap="flat" cmpd="sng" algn="ctr">
-                      <a:solidFill>
-                        <a:srgbClr val="D9D9D9"/>
-                      </a:solidFill>
-                      <a:prstDash val="solid"/>
-                      <a:round/>
-                      <a:headEnd type="none" w="med" len="med"/>
-                      <a:tailEnd type="none" w="med" len="med"/>
-                    </a:lnB>
-                    <a:solidFill>
                       <a:srgbClr val="F5F5F5"/>
-                    </a:solidFill>
-                  </a:tcPr>
-                </a:tc>
-                <a:tc>
-                  <a:txBody>
-                    <a:bodyPr/>
-                    <a:lstStyle/>
-                    <a:p>
-                      <a:pPr indent="0" marL="0">
-                        <a:buNone/>
-                      </a:pPr>
-                      <a:r>
-                        <a:rPr lang="en-US" sz="1200" dirty="0">
-                          <a:solidFill>
-                            <a:srgbClr val="222222"/>
-                          </a:solidFill>
-                        </a:rPr>
-                        <a:t>17:00</a:t>
-                      </a:r>
-                      <a:endParaRPr lang="en-US" sz="1200" dirty="0"/>
-                    </a:p>
-                  </a:txBody>
-                  <a:tcPr marL="76200" marR="76200" marT="25400" marB="25400" anchor="ctr">
-                    <a:lnL w="6350" cap="flat" cmpd="sng" algn="ctr">
-                      <a:solidFill>
-                        <a:srgbClr val="D9D9D9"/>
-                      </a:solidFill>
-                      <a:prstDash val="solid"/>
-                      <a:round/>
-                      <a:headEnd type="none" w="med" len="med"/>
-                      <a:tailEnd type="none" w="med" len="med"/>
-                    </a:lnL>
-                    <a:lnR w="6350" cap="flat" cmpd="sng" algn="ctr">
-                      <a:solidFill>
-                        <a:srgbClr val="D9D9D9"/>
-                      </a:solidFill>
-                      <a:prstDash val="solid"/>
-                      <a:round/>
-                      <a:headEnd type="none" w="med" len="med"/>
-                      <a:tailEnd type="none" w="med" len="med"/>
-                    </a:lnR>
-                    <a:lnT w="6350" cap="flat" cmpd="sng" algn="ctr">
-                      <a:solidFill>
-                        <a:srgbClr val="D9D9D9"/>
-                      </a:solidFill>
-                      <a:prstDash val="solid"/>
-                      <a:round/>
-                      <a:headEnd type="none" w="med" len="med"/>
-                      <a:tailEnd type="none" w="med" len="med"/>
-                    </a:lnT>
-                    <a:lnB w="6350" cap="flat" cmpd="sng" algn="ctr">
-                      <a:solidFill>
-                        <a:srgbClr val="D9D9D9"/>
-                      </a:solidFill>
-                      <a:prstDash val="solid"/>
-                      <a:round/>
-                      <a:headEnd type="none" w="med" len="med"/>
-                      <a:tailEnd type="none" w="med" len="med"/>
-                    </a:lnB>
-                    <a:solidFill>
-                      <a:srgbClr val="F5F5F5"/>
-                    </a:solidFill>
-                  </a:tcPr>
-                </a:tc>
-                <a:tc>
-                  <a:txBody>
-                    <a:bodyPr/>
-                    <a:lstStyle/>
-                    <a:p>
-                      <a:pPr indent="0" marL="0">
-                        <a:buNone/>
-                      </a:pPr>
-                      <a:r>
-                        <a:rPr lang="en-US" sz="1200" dirty="0">
-                          <a:solidFill>
-                            <a:srgbClr val="222222"/>
-                          </a:solidFill>
-                        </a:rPr>
-                        <a:t>動画公開</a:t>
-                      </a:r>
-                      <a:endParaRPr lang="en-US" sz="1200" dirty="0"/>
-                    </a:p>
-                  </a:txBody>
-                  <a:tcPr marL="76200" marR="76200" marT="25400" marB="25400" anchor="ctr">
-                    <a:lnL w="6350" cap="flat" cmpd="sng" algn="ctr">
-                      <a:solidFill>
-                        <a:srgbClr val="D9D9D9"/>
-                      </a:solidFill>
-                      <a:prstDash val="solid"/>
-                      <a:round/>
-                      <a:headEnd type="none" w="med" len="med"/>
-                      <a:tailEnd type="none" w="med" len="med"/>
-                    </a:lnL>
-                    <a:lnR w="6350" cap="flat" cmpd="sng" algn="ctr">
-                      <a:solidFill>
-                        <a:srgbClr val="D9D9D9"/>
-                      </a:solidFill>
-                      <a:prstDash val="solid"/>
-                      <a:round/>
-                      <a:headEnd type="none" w="med" len="med"/>
-                      <a:tailEnd type="none" w="med" len="med"/>
-                    </a:lnR>
-                    <a:lnT w="6350" cap="flat" cmpd="sng" algn="ctr">
-                      <a:solidFill>
-                        <a:srgbClr val="D9D9D9"/>
-                      </a:solidFill>
-                      <a:prstDash val="solid"/>
-                      <a:round/>
-                      <a:headEnd type="none" w="med" len="med"/>
-                      <a:tailEnd type="none" w="med" len="med"/>
-                    </a:lnT>
-                    <a:lnB w="6350" cap="flat" cmpd="sng" algn="ctr">
-                      <a:solidFill>
-                        <a:srgbClr val="D9D9D9"/>
-                      </a:solidFill>
-                      <a:prstDash val="solid"/>
-                      <a:round/>
-                      <a:headEnd type="none" w="med" len="med"/>
-                      <a:tailEnd type="none" w="med" len="med"/>
-                    </a:lnB>
-                    <a:solidFill>
-                      <a:srgbClr val="F5F5F5"/>
-                    </a:solidFill>
-                  </a:tcPr>
-                </a:tc>
-                <a:tc>
-                  <a:txBody>
-                    <a:bodyPr/>
-                    <a:lstStyle/>
-                    <a:p>
-                      <a:pPr indent="0" marL="0">
-                        <a:buNone/>
-                      </a:pPr>
-                      <a:r>
-                        <a:rPr lang="en-US" sz="1200" dirty="0">
-                          <a:solidFill>
-                            <a:srgbClr val="222222"/>
-                          </a:solidFill>
-                        </a:rPr>
-                        <a:t>第3弾ダイジェスト公開＋最終ライン2,000件を告知</a:t>
-                      </a:r>
-                      <a:endParaRPr lang="en-US" sz="1200" dirty="0"/>
-                    </a:p>
-                  </a:txBody>
-                  <a:tcPr marL="76200" marR="76200" marT="25400" marB="25400" anchor="ctr">
-                    <a:lnL w="6350" cap="flat" cmpd="sng" algn="ctr">
-                      <a:solidFill>
-                        <a:srgbClr val="D9D9D9"/>
-                      </a:solidFill>
-                      <a:prstDash val="solid"/>
-                      <a:round/>
-                      <a:headEnd type="none" w="med" len="med"/>
-                      <a:tailEnd type="none" w="med" len="med"/>
-                    </a:lnL>
-                    <a:lnR w="6350" cap="flat" cmpd="sng" algn="ctr">
-                      <a:solidFill>
-                        <a:srgbClr val="D9D9D9"/>
-                      </a:solidFill>
-                      <a:prstDash val="solid"/>
-                      <a:round/>
-                      <a:headEnd type="none" w="med" len="med"/>
-                      <a:tailEnd type="none" w="med" len="med"/>
-                    </a:lnR>
-                    <a:lnT w="6350" cap="flat" cmpd="sng" algn="ctr">
-                      <a:solidFill>
-                        <a:srgbClr val="D9D9D9"/>
-                      </a:solidFill>
-                      <a:prstDash val="solid"/>
-                      <a:round/>
-                      <a:headEnd type="none" w="med" len="med"/>
-                      <a:tailEnd type="none" w="med" len="med"/>
-                    </a:lnT>
-                    <a:lnB w="6350" cap="flat" cmpd="sng" algn="ctr">
-                      <a:solidFill>
-                        <a:srgbClr val="D9D9D9"/>
-                      </a:solidFill>
-                      <a:prstDash val="solid"/>
-                      <a:round/>
-                      <a:headEnd type="none" w="med" len="med"/>
-                      <a:tailEnd type="none" w="med" len="med"/>
-                    </a:lnB>
-                    <a:solidFill>
-                      <a:srgbClr val="F5F5F5"/>
-                    </a:solidFill>
-                  </a:tcPr>
-                </a:tc>
-                <a:tc>
-                  <a:txBody>
-                    <a:bodyPr/>
-                    <a:lstStyle/>
-                    <a:p>
-                      <a:pPr algn="ctr" indent="0" marL="0">
-                        <a:buNone/>
-                      </a:pPr>
-                      <a:endParaRPr lang="en-US" sz="1200" dirty="0"/>
-                    </a:p>
-                  </a:txBody>
-                  <a:tcPr marL="76200" marR="76200" marT="25400" marB="25400" anchor="ctr">
-                    <a:lnL w="6350" cap="flat" cmpd="sng" algn="ctr">
-                      <a:solidFill>
-                        <a:srgbClr val="D9D9D9"/>
-                      </a:solidFill>
-                      <a:prstDash val="solid"/>
-                      <a:round/>
-                      <a:headEnd type="none" w="med" len="med"/>
-                      <a:tailEnd type="none" w="med" len="med"/>
-                    </a:lnL>
-                    <a:lnR w="6350" cap="flat" cmpd="sng" algn="ctr">
-                      <a:solidFill>
-                        <a:srgbClr val="D9D9D9"/>
-                      </a:solidFill>
-                      <a:prstDash val="solid"/>
-                      <a:round/>
-                      <a:headEnd type="none" w="med" len="med"/>
-                      <a:tailEnd type="none" w="med" len="med"/>
-                    </a:lnR>
-                    <a:lnT w="6350" cap="flat" cmpd="sng" algn="ctr">
-                      <a:solidFill>
-                        <a:srgbClr val="D9D9D9"/>
-                      </a:solidFill>
-                      <a:prstDash val="solid"/>
-                      <a:round/>
-                      <a:headEnd type="none" w="med" len="med"/>
-                      <a:tailEnd type="none" w="med" len="med"/>
-                    </a:lnT>
-                    <a:lnB w="6350" cap="flat" cmpd="sng" algn="ctr">
-                      <a:solidFill>
-                        <a:srgbClr val="D9D9D9"/>
-                      </a:solidFill>
-                      <a:prstDash val="solid"/>
-                      <a:round/>
-                      <a:headEnd type="none" w="med" len="med"/>
-                      <a:tailEnd type="none" w="med" len="med"/>
-                    </a:lnB>
-                    <a:solidFill>
-                      <a:srgbClr val="F5F5F5"/>
-                    </a:solidFill>
-                  </a:tcPr>
-                </a:tc>
-              </a:tr>
-              <a:tr h="301752">
-                <a:tc>
-                  <a:txBody>
-                    <a:bodyPr/>
-                    <a:lstStyle/>
-                    <a:p>
-                      <a:pPr indent="0" marL="0">
-                        <a:buNone/>
-                      </a:pPr>
-                      <a:r>
-                        <a:rPr lang="en-US" sz="1200" dirty="0">
-                          <a:solidFill>
-                            <a:srgbClr val="222222"/>
-                          </a:solidFill>
-                        </a:rPr>
-                        <a:t>12/6（日）</a:t>
-                      </a:r>
-                      <a:endParaRPr lang="en-US" sz="1200" dirty="0"/>
-                    </a:p>
-                  </a:txBody>
-                  <a:tcPr marL="76200" marR="76200" marT="25400" marB="25400" anchor="ctr">
-                    <a:lnL w="6350" cap="flat" cmpd="sng" algn="ctr">
-                      <a:solidFill>
-                        <a:srgbClr val="D9D9D9"/>
-                      </a:solidFill>
-                      <a:prstDash val="solid"/>
-                      <a:round/>
-                      <a:headEnd type="none" w="med" len="med"/>
-                      <a:tailEnd type="none" w="med" len="med"/>
-                    </a:lnL>
-                    <a:lnR w="6350" cap="flat" cmpd="sng" algn="ctr">
-                      <a:solidFill>
-                        <a:srgbClr val="D9D9D9"/>
-                      </a:solidFill>
-                      <a:prstDash val="solid"/>
-                      <a:round/>
-                      <a:headEnd type="none" w="med" len="med"/>
-                      <a:tailEnd type="none" w="med" len="med"/>
-                    </a:lnR>
-                    <a:lnT w="6350" cap="flat" cmpd="sng" algn="ctr">
-                      <a:solidFill>
-                        <a:srgbClr val="D9D9D9"/>
-                      </a:solidFill>
-                      <a:prstDash val="solid"/>
-                      <a:round/>
-                      <a:headEnd type="none" w="med" len="med"/>
-                      <a:tailEnd type="none" w="med" len="med"/>
-                    </a:lnT>
-                    <a:lnB w="6350" cap="flat" cmpd="sng" algn="ctr">
-                      <a:solidFill>
-                        <a:srgbClr val="D9D9D9"/>
-                      </a:solidFill>
-                      <a:prstDash val="solid"/>
-                      <a:round/>
-                      <a:headEnd type="none" w="med" len="med"/>
-                      <a:tailEnd type="none" w="med" len="med"/>
-                    </a:lnB>
-                    <a:solidFill>
-                      <a:srgbClr val="FFFFFF"/>
-                    </a:solidFill>
-                  </a:tcPr>
-                </a:tc>
-                <a:tc>
-                  <a:txBody>
-                    <a:bodyPr/>
-                    <a:lstStyle/>
-                    <a:p>
-                      <a:pPr indent="0" marL="0">
-                        <a:buNone/>
-                      </a:pPr>
-                      <a:r>
-                        <a:rPr lang="en-US" sz="1200" dirty="0">
-                          <a:solidFill>
-                            <a:srgbClr val="222222"/>
-                          </a:solidFill>
-                        </a:rPr>
-                        <a:t>17:00</a:t>
-                      </a:r>
-                      <a:endParaRPr lang="en-US" sz="1200" dirty="0"/>
-                    </a:p>
-                  </a:txBody>
-                  <a:tcPr marL="76200" marR="76200" marT="25400" marB="25400" anchor="ctr">
-                    <a:lnL w="6350" cap="flat" cmpd="sng" algn="ctr">
-                      <a:solidFill>
-                        <a:srgbClr val="D9D9D9"/>
-                      </a:solidFill>
-                      <a:prstDash val="solid"/>
-                      <a:round/>
-                      <a:headEnd type="none" w="med" len="med"/>
-                      <a:tailEnd type="none" w="med" len="med"/>
-                    </a:lnL>
-                    <a:lnR w="6350" cap="flat" cmpd="sng" algn="ctr">
-                      <a:solidFill>
-                        <a:srgbClr val="D9D9D9"/>
-                      </a:solidFill>
-                      <a:prstDash val="solid"/>
-                      <a:round/>
-                      <a:headEnd type="none" w="med" len="med"/>
-                      <a:tailEnd type="none" w="med" len="med"/>
-                    </a:lnR>
-                    <a:lnT w="6350" cap="flat" cmpd="sng" algn="ctr">
-                      <a:solidFill>
-                        <a:srgbClr val="D9D9D9"/>
-                      </a:solidFill>
-                      <a:prstDash val="solid"/>
-                      <a:round/>
-                      <a:headEnd type="none" w="med" len="med"/>
-                      <a:tailEnd type="none" w="med" len="med"/>
-                    </a:lnT>
-                    <a:lnB w="6350" cap="flat" cmpd="sng" algn="ctr">
-                      <a:solidFill>
-                        <a:srgbClr val="D9D9D9"/>
-                      </a:solidFill>
-                      <a:prstDash val="solid"/>
-                      <a:round/>
-                      <a:headEnd type="none" w="med" len="med"/>
-                      <a:tailEnd type="none" w="med" len="med"/>
-                    </a:lnB>
-                    <a:solidFill>
-                      <a:srgbClr val="FFFFFF"/>
-                    </a:solidFill>
-                  </a:tcPr>
-                </a:tc>
-                <a:tc>
-                  <a:txBody>
-                    <a:bodyPr/>
-                    <a:lstStyle/>
-                    <a:p>
-                      <a:pPr indent="0" marL="0">
-                        <a:buNone/>
-                      </a:pPr>
-                      <a:r>
-                        <a:rPr lang="en-US" sz="1200" dirty="0">
-                          <a:solidFill>
-                            <a:srgbClr val="222222"/>
-                          </a:solidFill>
-                        </a:rPr>
-                        <a:t>リマインド</a:t>
-                      </a:r>
-                      <a:endParaRPr lang="en-US" sz="1200" dirty="0"/>
-                    </a:p>
-                  </a:txBody>
-                  <a:tcPr marL="76200" marR="76200" marT="25400" marB="25400" anchor="ctr">
-                    <a:lnL w="6350" cap="flat" cmpd="sng" algn="ctr">
-                      <a:solidFill>
-                        <a:srgbClr val="D9D9D9"/>
-                      </a:solidFill>
-                      <a:prstDash val="solid"/>
-                      <a:round/>
-                      <a:headEnd type="none" w="med" len="med"/>
-                      <a:tailEnd type="none" w="med" len="med"/>
-                    </a:lnL>
-                    <a:lnR w="6350" cap="flat" cmpd="sng" algn="ctr">
-                      <a:solidFill>
-                        <a:srgbClr val="D9D9D9"/>
-                      </a:solidFill>
-                      <a:prstDash val="solid"/>
-                      <a:round/>
-                      <a:headEnd type="none" w="med" len="med"/>
-                      <a:tailEnd type="none" w="med" len="med"/>
-                    </a:lnR>
-                    <a:lnT w="6350" cap="flat" cmpd="sng" algn="ctr">
-                      <a:solidFill>
-                        <a:srgbClr val="D9D9D9"/>
-                      </a:solidFill>
-                      <a:prstDash val="solid"/>
-                      <a:round/>
-                      <a:headEnd type="none" w="med" len="med"/>
-                      <a:tailEnd type="none" w="med" len="med"/>
-                    </a:lnT>
-                    <a:lnB w="6350" cap="flat" cmpd="sng" algn="ctr">
-                      <a:solidFill>
-                        <a:srgbClr val="D9D9D9"/>
-                      </a:solidFill>
-                      <a:prstDash val="solid"/>
-                      <a:round/>
-                      <a:headEnd type="none" w="med" len="med"/>
-                      <a:tailEnd type="none" w="med" len="med"/>
-                    </a:lnB>
-                    <a:solidFill>
-                      <a:srgbClr val="FFFFFF"/>
-                    </a:solidFill>
-                  </a:tcPr>
-                </a:tc>
-                <a:tc>
-                  <a:txBody>
-                    <a:bodyPr/>
-                    <a:lstStyle/>
-                    <a:p>
-                      <a:pPr indent="0" marL="0">
-                        <a:buNone/>
-                      </a:pPr>
-                      <a:r>
-                        <a:rPr lang="en-US" sz="1200" dirty="0">
-                          <a:solidFill>
-                            <a:srgbClr val="222222"/>
-                          </a:solidFill>
-                        </a:rPr>
-                        <a:t>「ラスト1週間」</a:t>
-                      </a:r>
-                      <a:endParaRPr lang="en-US" sz="1200" dirty="0"/>
-                    </a:p>
-                  </a:txBody>
-                  <a:tcPr marL="76200" marR="76200" marT="25400" marB="25400" anchor="ctr">
-                    <a:lnL w="6350" cap="flat" cmpd="sng" algn="ctr">
-                      <a:solidFill>
-                        <a:srgbClr val="D9D9D9"/>
-                      </a:solidFill>
-                      <a:prstDash val="solid"/>
-                      <a:round/>
-                      <a:headEnd type="none" w="med" len="med"/>
-                      <a:tailEnd type="none" w="med" len="med"/>
-                    </a:lnL>
-                    <a:lnR w="6350" cap="flat" cmpd="sng" algn="ctr">
-                      <a:solidFill>
-                        <a:srgbClr val="D9D9D9"/>
-                      </a:solidFill>
-                      <a:prstDash val="solid"/>
-                      <a:round/>
-                      <a:headEnd type="none" w="med" len="med"/>
-                      <a:tailEnd type="none" w="med" len="med"/>
-                    </a:lnR>
-                    <a:lnT w="6350" cap="flat" cmpd="sng" algn="ctr">
-                      <a:solidFill>
-                        <a:srgbClr val="D9D9D9"/>
-                      </a:solidFill>
-                      <a:prstDash val="solid"/>
-                      <a:round/>
-                      <a:headEnd type="none" w="med" len="med"/>
-                      <a:tailEnd type="none" w="med" len="med"/>
-                    </a:lnT>
-                    <a:lnB w="6350" cap="flat" cmpd="sng" algn="ctr">
-                      <a:solidFill>
-                        <a:srgbClr val="D9D9D9"/>
-                      </a:solidFill>
-                      <a:prstDash val="solid"/>
-                      <a:round/>
-                      <a:headEnd type="none" w="med" len="med"/>
-                      <a:tailEnd type="none" w="med" len="med"/>
-                    </a:lnB>
-                    <a:solidFill>
-                      <a:srgbClr val="FFFFFF"/>
-                    </a:solidFill>
-                  </a:tcPr>
-                </a:tc>
-                <a:tc>
-                  <a:txBody>
-                    <a:bodyPr/>
-                    <a:lstStyle/>
-                    <a:p>
-                      <a:pPr algn="ctr" indent="0" marL="0">
-                        <a:buNone/>
-                      </a:pPr>
-                      <a:endParaRPr lang="en-US" sz="1200" dirty="0"/>
-                    </a:p>
-                  </a:txBody>
-                  <a:tcPr marL="76200" marR="76200" marT="25400" marB="25400" anchor="ctr">
-                    <a:lnL w="6350" cap="flat" cmpd="sng" algn="ctr">
-                      <a:solidFill>
-                        <a:srgbClr val="D9D9D9"/>
-                      </a:solidFill>
-                      <a:prstDash val="solid"/>
-                      <a:round/>
-                      <a:headEnd type="none" w="med" len="med"/>
-                      <a:tailEnd type="none" w="med" len="med"/>
-                    </a:lnL>
-                    <a:lnR w="6350" cap="flat" cmpd="sng" algn="ctr">
-                      <a:solidFill>
-                        <a:srgbClr val="D9D9D9"/>
-                      </a:solidFill>
-                      <a:prstDash val="solid"/>
-                      <a:round/>
-                      <a:headEnd type="none" w="med" len="med"/>
-                      <a:tailEnd type="none" w="med" len="med"/>
-                    </a:lnR>
-                    <a:lnT w="6350" cap="flat" cmpd="sng" algn="ctr">
-                      <a:solidFill>
-                        <a:srgbClr val="D9D9D9"/>
-                      </a:solidFill>
-                      <a:prstDash val="solid"/>
-                      <a:round/>
-                      <a:headEnd type="none" w="med" len="med"/>
-                      <a:tailEnd type="none" w="med" len="med"/>
-                    </a:lnT>
-                    <a:lnB w="6350" cap="flat" cmpd="sng" algn="ctr">
-                      <a:solidFill>
-                        <a:srgbClr val="D9D9D9"/>
-                      </a:solidFill>
-                      <a:prstDash val="solid"/>
-                      <a:round/>
-                      <a:headEnd type="none" w="med" len="med"/>
-                      <a:tailEnd type="none" w="med" len="med"/>
-                    </a:lnB>
-                    <a:solidFill>
-                      <a:srgbClr val="FFFFFF"/>
-                    </a:solidFill>
-                  </a:tcPr>
-                </a:tc>
-              </a:tr>
-              <a:tr h="301752">
-                <a:tc>
-                  <a:txBody>
-                    <a:bodyPr/>
-                    <a:lstStyle/>
-                    <a:p>
-                      <a:pPr indent="0" marL="0">
-                        <a:buNone/>
-                      </a:pPr>
-                      <a:r>
-                        <a:rPr lang="en-US" sz="1200" dirty="0">
-                          <a:solidFill>
-                            <a:srgbClr val="222222"/>
-                          </a:solidFill>
-                        </a:rPr>
-                        <a:t>12/10（木）</a:t>
-                      </a:r>
-                      <a:endParaRPr lang="en-US" sz="1200" dirty="0"/>
-                    </a:p>
-                  </a:txBody>
-                  <a:tcPr marL="76200" marR="76200" marT="25400" marB="25400" anchor="ctr">
-                    <a:lnL w="6350" cap="flat" cmpd="sng" algn="ctr">
-                      <a:solidFill>
-                        <a:srgbClr val="D9D9D9"/>
-                      </a:solidFill>
-                      <a:prstDash val="solid"/>
-                      <a:round/>
-                      <a:headEnd type="none" w="med" len="med"/>
-                      <a:tailEnd type="none" w="med" len="med"/>
-                    </a:lnL>
-                    <a:lnR w="6350" cap="flat" cmpd="sng" algn="ctr">
-                      <a:solidFill>
-                        <a:srgbClr val="D9D9D9"/>
-                      </a:solidFill>
-                      <a:prstDash val="solid"/>
-                      <a:round/>
-                      <a:headEnd type="none" w="med" len="med"/>
-                      <a:tailEnd type="none" w="med" len="med"/>
-                    </a:lnR>
-                    <a:lnT w="6350" cap="flat" cmpd="sng" algn="ctr">
-                      <a:solidFill>
-                        <a:srgbClr val="D9D9D9"/>
-                      </a:solidFill>
-                      <a:prstDash val="solid"/>
-                      <a:round/>
-                      <a:headEnd type="none" w="med" len="med"/>
-                      <a:tailEnd type="none" w="med" len="med"/>
-                    </a:lnT>
-                    <a:lnB w="6350" cap="flat" cmpd="sng" algn="ctr">
-                      <a:solidFill>
-                        <a:srgbClr val="D9D9D9"/>
-                      </a:solidFill>
-                      <a:prstDash val="solid"/>
-                      <a:round/>
-                      <a:headEnd type="none" w="med" len="med"/>
-                      <a:tailEnd type="none" w="med" len="med"/>
-                    </a:lnB>
-                    <a:solidFill>
-                      <a:srgbClr val="F5F5F5"/>
-                    </a:solidFill>
-                  </a:tcPr>
-                </a:tc>
-                <a:tc>
-                  <a:txBody>
-                    <a:bodyPr/>
-                    <a:lstStyle/>
-                    <a:p>
-                      <a:pPr indent="0" marL="0">
-                        <a:buNone/>
-                      </a:pPr>
-                      <a:r>
-                        <a:rPr lang="en-US" sz="1200" dirty="0">
-                          <a:solidFill>
-                            <a:srgbClr val="222222"/>
-                          </a:solidFill>
-                        </a:rPr>
-                        <a:t>17:00</a:t>
-                      </a:r>
-                      <a:endParaRPr lang="en-US" sz="1200" dirty="0"/>
-                    </a:p>
-                  </a:txBody>
-                  <a:tcPr marL="76200" marR="76200" marT="25400" marB="25400" anchor="ctr">
-                    <a:lnL w="6350" cap="flat" cmpd="sng" algn="ctr">
-                      <a:solidFill>
-                        <a:srgbClr val="D9D9D9"/>
-                      </a:solidFill>
-                      <a:prstDash val="solid"/>
-                      <a:round/>
-                      <a:headEnd type="none" w="med" len="med"/>
-                      <a:tailEnd type="none" w="med" len="med"/>
-                    </a:lnL>
-                    <a:lnR w="6350" cap="flat" cmpd="sng" algn="ctr">
-                      <a:solidFill>
-                        <a:srgbClr val="D9D9D9"/>
-                      </a:solidFill>
-                      <a:prstDash val="solid"/>
-                      <a:round/>
-                      <a:headEnd type="none" w="med" len="med"/>
-                      <a:tailEnd type="none" w="med" len="med"/>
-                    </a:lnR>
-                    <a:lnT w="6350" cap="flat" cmpd="sng" algn="ctr">
-                      <a:solidFill>
-                        <a:srgbClr val="D9D9D9"/>
-                      </a:solidFill>
-                      <a:prstDash val="solid"/>
-                      <a:round/>
-                      <a:headEnd type="none" w="med" len="med"/>
-                      <a:tailEnd type="none" w="med" len="med"/>
-                    </a:lnT>
-                    <a:lnB w="6350" cap="flat" cmpd="sng" algn="ctr">
-                      <a:solidFill>
-                        <a:srgbClr val="D9D9D9"/>
-                      </a:solidFill>
-                      <a:prstDash val="solid"/>
-                      <a:round/>
-                      <a:headEnd type="none" w="med" len="med"/>
-                      <a:tailEnd type="none" w="med" len="med"/>
-                    </a:lnB>
-                    <a:solidFill>
-                      <a:srgbClr val="F5F5F5"/>
-                    </a:solidFill>
-                  </a:tcPr>
-                </a:tc>
-                <a:tc>
-                  <a:txBody>
-                    <a:bodyPr/>
-                    <a:lstStyle/>
-                    <a:p>
-                      <a:pPr indent="0" marL="0">
-                        <a:buNone/>
-                      </a:pPr>
-                      <a:r>
-                        <a:rPr lang="en-US" sz="1200" dirty="0">
-                          <a:solidFill>
-                            <a:srgbClr val="222222"/>
-                          </a:solidFill>
-                        </a:rPr>
-                        <a:t>リマインド</a:t>
-                      </a:r>
-                      <a:endParaRPr lang="en-US" sz="1200" dirty="0"/>
-                    </a:p>
-                  </a:txBody>
-                  <a:tcPr marL="76200" marR="76200" marT="25400" marB="25400" anchor="ctr">
-                    <a:lnL w="6350" cap="flat" cmpd="sng" algn="ctr">
-                      <a:solidFill>
-                        <a:srgbClr val="D9D9D9"/>
-                      </a:solidFill>
-                      <a:prstDash val="solid"/>
-                      <a:round/>
-                      <a:headEnd type="none" w="med" len="med"/>
-                      <a:tailEnd type="none" w="med" len="med"/>
-                    </a:lnL>
-                    <a:lnR w="6350" cap="flat" cmpd="sng" algn="ctr">
-                      <a:solidFill>
-                        <a:srgbClr val="D9D9D9"/>
-                      </a:solidFill>
-                      <a:prstDash val="solid"/>
-                      <a:round/>
-                      <a:headEnd type="none" w="med" len="med"/>
-                      <a:tailEnd type="none" w="med" len="med"/>
-                    </a:lnR>
-                    <a:lnT w="6350" cap="flat" cmpd="sng" algn="ctr">
-                      <a:solidFill>
-                        <a:srgbClr val="D9D9D9"/>
-                      </a:solidFill>
-                      <a:prstDash val="solid"/>
-                      <a:round/>
-                      <a:headEnd type="none" w="med" len="med"/>
-                      <a:tailEnd type="none" w="med" len="med"/>
-                    </a:lnT>
-                    <a:lnB w="6350" cap="flat" cmpd="sng" algn="ctr">
-                      <a:solidFill>
-                        <a:srgbClr val="D9D9D9"/>
-                      </a:solidFill>
-                      <a:prstDash val="solid"/>
-                      <a:round/>
-                      <a:headEnd type="none" w="med" len="med"/>
-                      <a:tailEnd type="none" w="med" len="med"/>
-                    </a:lnB>
-                    <a:solidFill>
-                      <a:srgbClr val="F5F5F5"/>
-                    </a:solidFill>
-                  </a:tcPr>
-                </a:tc>
-                <a:tc>
-                  <a:txBody>
-                    <a:bodyPr/>
-                    <a:lstStyle/>
-                    <a:p>
-                      <a:pPr indent="0" marL="0">
-                        <a:buNone/>
-                      </a:pPr>
-                      <a:r>
-                        <a:rPr lang="en-US" sz="1200" dirty="0">
-                          <a:solidFill>
-                            <a:srgbClr val="222222"/>
-                          </a:solidFill>
-                        </a:rPr>
-                        <a:t>「残り3日」</a:t>
-                      </a:r>
-                      <a:endParaRPr lang="en-US" sz="1200" dirty="0"/>
-                    </a:p>
-                  </a:txBody>
-                  <a:tcPr marL="76200" marR="76200" marT="25400" marB="25400" anchor="ctr">
-                    <a:lnL w="6350" cap="flat" cmpd="sng" algn="ctr">
-                      <a:solidFill>
-                        <a:srgbClr val="D9D9D9"/>
-                      </a:solidFill>
-                      <a:prstDash val="solid"/>
-                      <a:round/>
-                      <a:headEnd type="none" w="med" len="med"/>
-                      <a:tailEnd type="none" w="med" len="med"/>
-                    </a:lnL>
-                    <a:lnR w="6350" cap="flat" cmpd="sng" algn="ctr">
-                      <a:solidFill>
-                        <a:srgbClr val="D9D9D9"/>
-                      </a:solidFill>
-                      <a:prstDash val="solid"/>
-                      <a:round/>
-                      <a:headEnd type="none" w="med" len="med"/>
-                      <a:tailEnd type="none" w="med" len="med"/>
-                    </a:lnR>
-                    <a:lnT w="6350" cap="flat" cmpd="sng" algn="ctr">
-                      <a:solidFill>
-                        <a:srgbClr val="D9D9D9"/>
-                      </a:solidFill>
-                      <a:prstDash val="solid"/>
-                      <a:round/>
-                      <a:headEnd type="none" w="med" len="med"/>
-                      <a:tailEnd type="none" w="med" len="med"/>
-                    </a:lnT>
-                    <a:lnB w="6350" cap="flat" cmpd="sng" algn="ctr">
-                      <a:solidFill>
-                        <a:srgbClr val="D9D9D9"/>
-                      </a:solidFill>
-                      <a:prstDash val="solid"/>
-                      <a:round/>
-                      <a:headEnd type="none" w="med" len="med"/>
-                      <a:tailEnd type="none" w="med" len="med"/>
-                    </a:lnB>
-                    <a:solidFill>
-                      <a:srgbClr val="F5F5F5"/>
-                    </a:solidFill>
-                  </a:tcPr>
-                </a:tc>
-                <a:tc>
-                  <a:txBody>
-                    <a:bodyPr/>
-                    <a:lstStyle/>
-                    <a:p>
-                      <a:pPr algn="ctr" indent="0" marL="0">
-                        <a:buNone/>
-                      </a:pPr>
-                      <a:endParaRPr lang="en-US" sz="1200" dirty="0"/>
-                    </a:p>
-                  </a:txBody>
-                  <a:tcPr marL="76200" marR="76200" marT="25400" marB="25400" anchor="ctr">
-                    <a:lnL w="6350" cap="flat" cmpd="sng" algn="ctr">
-                      <a:solidFill>
-                        <a:srgbClr val="D9D9D9"/>
-                      </a:solidFill>
-                      <a:prstDash val="solid"/>
-                      <a:round/>
-                      <a:headEnd type="none" w="med" len="med"/>
-                      <a:tailEnd type="none" w="med" len="med"/>
-                    </a:lnL>
-                    <a:lnR w="6350" cap="flat" cmpd="sng" algn="ctr">
-                      <a:solidFill>
-                        <a:srgbClr val="D9D9D9"/>
-                      </a:solidFill>
-                      <a:prstDash val="solid"/>
-                      <a:round/>
-                      <a:headEnd type="none" w="med" len="med"/>
-                      <a:tailEnd type="none" w="med" len="med"/>
-                    </a:lnR>
-                    <a:lnT w="6350" cap="flat" cmpd="sng" algn="ctr">
-                      <a:solidFill>
-                        <a:srgbClr val="D9D9D9"/>
-                      </a:solidFill>
-                      <a:prstDash val="solid"/>
-                      <a:round/>
-                      <a:headEnd type="none" w="med" len="med"/>
-                      <a:tailEnd type="none" w="med" len="med"/>
-                    </a:lnT>
-                    <a:lnB w="6350" cap="flat" cmpd="sng" algn="ctr">
-                      <a:solidFill>
-                        <a:srgbClr val="D9D9D9"/>
-                      </a:solidFill>
-                      <a:prstDash val="solid"/>
-                      <a:round/>
-                      <a:headEnd type="none" w="med" len="med"/>
-                      <a:tailEnd type="none" w="med" len="med"/>
-                    </a:lnB>
-                    <a:solidFill>
-                      <a:srgbClr val="F5F5F5"/>
-                    </a:solidFill>
-                  </a:tcPr>
-                </a:tc>
-              </a:tr>
-              <a:tr h="301752">
-                <a:tc>
-                  <a:txBody>
-                    <a:bodyPr/>
-                    <a:lstStyle/>
-                    <a:p>
-                      <a:pPr indent="0" marL="0">
-                        <a:buNone/>
-                      </a:pPr>
-                      <a:r>
-                        <a:rPr lang="en-US" sz="1200" b="1" dirty="0">
-                          <a:solidFill>
-                            <a:srgbClr val="222222"/>
-                          </a:solidFill>
-                        </a:rPr>
-                        <a:t>12/11（金）</a:t>
-                      </a:r>
-                      <a:endParaRPr lang="en-US" sz="1200" dirty="0"/>
-                    </a:p>
-                  </a:txBody>
-                  <a:tcPr marL="76200" marR="76200" marT="25400" marB="25400" anchor="ctr">
-                    <a:lnL w="6350" cap="flat" cmpd="sng" algn="ctr">
-                      <a:solidFill>
-                        <a:srgbClr val="D9D9D9"/>
-                      </a:solidFill>
-                      <a:prstDash val="solid"/>
-                      <a:round/>
-                      <a:headEnd type="none" w="med" len="med"/>
-                      <a:tailEnd type="none" w="med" len="med"/>
-                    </a:lnL>
-                    <a:lnR w="6350" cap="flat" cmpd="sng" algn="ctr">
-                      <a:solidFill>
-                        <a:srgbClr val="D9D9D9"/>
-                      </a:solidFill>
-                      <a:prstDash val="solid"/>
-                      <a:round/>
-                      <a:headEnd type="none" w="med" len="med"/>
-                      <a:tailEnd type="none" w="med" len="med"/>
-                    </a:lnR>
-                    <a:lnT w="6350" cap="flat" cmpd="sng" algn="ctr">
-                      <a:solidFill>
-                        <a:srgbClr val="D9D9D9"/>
-                      </a:solidFill>
-                      <a:prstDash val="solid"/>
-                      <a:round/>
-                      <a:headEnd type="none" w="med" len="med"/>
-                      <a:tailEnd type="none" w="med" len="med"/>
-                    </a:lnT>
-                    <a:lnB w="6350" cap="flat" cmpd="sng" algn="ctr">
-                      <a:solidFill>
-                        <a:srgbClr val="D9D9D9"/>
-                      </a:solidFill>
-                      <a:prstDash val="solid"/>
-                      <a:round/>
-                      <a:headEnd type="none" w="med" len="med"/>
-                      <a:tailEnd type="none" w="med" len="med"/>
-                    </a:lnB>
-                    <a:solidFill>
-                      <a:srgbClr val="FFFFFF"/>
-                    </a:solidFill>
-                  </a:tcPr>
-                </a:tc>
-                <a:tc>
-                  <a:txBody>
-                    <a:bodyPr/>
-                    <a:lstStyle/>
-                    <a:p>
-                      <a:pPr indent="0" marL="0">
-                        <a:buNone/>
-                      </a:pPr>
-                      <a:r>
-                        <a:rPr lang="en-US" sz="1200" dirty="0">
-                          <a:solidFill>
-                            <a:srgbClr val="222222"/>
-                          </a:solidFill>
-                        </a:rPr>
-                        <a:t>17:00</a:t>
-                      </a:r>
-                      <a:endParaRPr lang="en-US" sz="1200" dirty="0"/>
-                    </a:p>
-                  </a:txBody>
-                  <a:tcPr marL="76200" marR="76200" marT="25400" marB="25400" anchor="ctr">
-                    <a:lnL w="6350" cap="flat" cmpd="sng" algn="ctr">
-                      <a:solidFill>
-                        <a:srgbClr val="D9D9D9"/>
-                      </a:solidFill>
-                      <a:prstDash val="solid"/>
-                      <a:round/>
-                      <a:headEnd type="none" w="med" len="med"/>
-                      <a:tailEnd type="none" w="med" len="med"/>
-                    </a:lnL>
-                    <a:lnR w="6350" cap="flat" cmpd="sng" algn="ctr">
-                      <a:solidFill>
-                        <a:srgbClr val="D9D9D9"/>
-                      </a:solidFill>
-                      <a:prstDash val="solid"/>
-                      <a:round/>
-                      <a:headEnd type="none" w="med" len="med"/>
-                      <a:tailEnd type="none" w="med" len="med"/>
-                    </a:lnR>
-                    <a:lnT w="6350" cap="flat" cmpd="sng" algn="ctr">
-                      <a:solidFill>
-                        <a:srgbClr val="D9D9D9"/>
-                      </a:solidFill>
-                      <a:prstDash val="solid"/>
-                      <a:round/>
-                      <a:headEnd type="none" w="med" len="med"/>
-                      <a:tailEnd type="none" w="med" len="med"/>
-                    </a:lnT>
-                    <a:lnB w="6350" cap="flat" cmpd="sng" algn="ctr">
-                      <a:solidFill>
-                        <a:srgbClr val="D9D9D9"/>
-                      </a:solidFill>
-                      <a:prstDash val="solid"/>
-                      <a:round/>
-                      <a:headEnd type="none" w="med" len="med"/>
-                      <a:tailEnd type="none" w="med" len="med"/>
-                    </a:lnB>
-                    <a:solidFill>
-                      <a:srgbClr val="FFFFFF"/>
-                    </a:solidFill>
-                  </a:tcPr>
-                </a:tc>
-                <a:tc>
-                  <a:txBody>
-                    <a:bodyPr/>
-                    <a:lstStyle/>
-                    <a:p>
-                      <a:pPr indent="0" marL="0">
-                        <a:buNone/>
-                      </a:pPr>
-                      <a:r>
-                        <a:rPr lang="en-US" sz="1200" b="1" dirty="0">
-                          <a:solidFill>
-                            <a:srgbClr val="C8102E"/>
-                          </a:solidFill>
-                        </a:rPr>
-                        <a:t>リマインド</a:t>
-                      </a:r>
-                      <a:endParaRPr lang="en-US" sz="1200" dirty="0"/>
-                    </a:p>
-                  </a:txBody>
-                  <a:tcPr marL="76200" marR="76200" marT="25400" marB="25400" anchor="ctr">
-                    <a:lnL w="6350" cap="flat" cmpd="sng" algn="ctr">
-                      <a:solidFill>
-                        <a:srgbClr val="D9D9D9"/>
-                      </a:solidFill>
-                      <a:prstDash val="solid"/>
-                      <a:round/>
-                      <a:headEnd type="none" w="med" len="med"/>
-                      <a:tailEnd type="none" w="med" len="med"/>
-                    </a:lnL>
-                    <a:lnR w="6350" cap="flat" cmpd="sng" algn="ctr">
-                      <a:solidFill>
-                        <a:srgbClr val="D9D9D9"/>
-                      </a:solidFill>
-                      <a:prstDash val="solid"/>
-                      <a:round/>
-                      <a:headEnd type="none" w="med" len="med"/>
-                      <a:tailEnd type="none" w="med" len="med"/>
-                    </a:lnR>
-                    <a:lnT w="6350" cap="flat" cmpd="sng" algn="ctr">
-                      <a:solidFill>
-                        <a:srgbClr val="D9D9D9"/>
-                      </a:solidFill>
-                      <a:prstDash val="solid"/>
-                      <a:round/>
-                      <a:headEnd type="none" w="med" len="med"/>
-                      <a:tailEnd type="none" w="med" len="med"/>
-                    </a:lnT>
-                    <a:lnB w="6350" cap="flat" cmpd="sng" algn="ctr">
-                      <a:solidFill>
-                        <a:srgbClr val="D9D9D9"/>
-                      </a:solidFill>
-                      <a:prstDash val="solid"/>
-                      <a:round/>
-                      <a:headEnd type="none" w="med" len="med"/>
-                      <a:tailEnd type="none" w="med" len="med"/>
-                    </a:lnB>
-                    <a:solidFill>
-                      <a:srgbClr val="FFFFFF"/>
-                    </a:solidFill>
-                  </a:tcPr>
-                </a:tc>
-                <a:tc>
-                  <a:txBody>
-                    <a:bodyPr/>
-                    <a:lstStyle/>
-                    <a:p>
-                      <a:pPr indent="0" marL="0">
-                        <a:buNone/>
-                      </a:pPr>
-                      <a:r>
-                        <a:rPr lang="en-US" sz="1200" dirty="0">
-                          <a:solidFill>
-                            <a:srgbClr val="222222"/>
-                          </a:solidFill>
-                        </a:rPr>
-                        <a:t>締切前日（ラストスパート）</a:t>
-                      </a:r>
-                      <a:endParaRPr lang="en-US" sz="1200" dirty="0"/>
-                    </a:p>
-                  </a:txBody>
-                  <a:tcPr marL="76200" marR="76200" marT="25400" marB="25400" anchor="ctr">
-                    <a:lnL w="6350" cap="flat" cmpd="sng" algn="ctr">
-                      <a:solidFill>
-                        <a:srgbClr val="D9D9D9"/>
-                      </a:solidFill>
-                      <a:prstDash val="solid"/>
-                      <a:round/>
-                      <a:headEnd type="none" w="med" len="med"/>
-                      <a:tailEnd type="none" w="med" len="med"/>
-                    </a:lnL>
-                    <a:lnR w="6350" cap="flat" cmpd="sng" algn="ctr">
-                      <a:solidFill>
-                        <a:srgbClr val="D9D9D9"/>
-                      </a:solidFill>
-                      <a:prstDash val="solid"/>
-                      <a:round/>
-                      <a:headEnd type="none" w="med" len="med"/>
-                      <a:tailEnd type="none" w="med" len="med"/>
-                    </a:lnR>
-                    <a:lnT w="6350" cap="flat" cmpd="sng" algn="ctr">
-                      <a:solidFill>
-                        <a:srgbClr val="D9D9D9"/>
-                      </a:solidFill>
-                      <a:prstDash val="solid"/>
-                      <a:round/>
-                      <a:headEnd type="none" w="med" len="med"/>
-                      <a:tailEnd type="none" w="med" len="med"/>
-                    </a:lnT>
-                    <a:lnB w="6350" cap="flat" cmpd="sng" algn="ctr">
-                      <a:solidFill>
-                        <a:srgbClr val="D9D9D9"/>
-                      </a:solidFill>
-                      <a:prstDash val="solid"/>
-                      <a:round/>
-                      <a:headEnd type="none" w="med" len="med"/>
-                      <a:tailEnd type="none" w="med" len="med"/>
-                    </a:lnB>
-                    <a:solidFill>
-                      <a:srgbClr val="FFFFFF"/>
-                    </a:solidFill>
-                  </a:tcPr>
-                </a:tc>
-                <a:tc>
-                  <a:txBody>
-                    <a:bodyPr/>
-                    <a:lstStyle/>
-                    <a:p>
-                      <a:pPr algn="ctr" indent="0" marL="0">
-                        <a:buNone/>
-                      </a:pPr>
-                      <a:r>
-                        <a:rPr lang="en-US" sz="1200" b="1" dirty="0">
-                          <a:solidFill>
-                            <a:srgbClr val="C8102E"/>
-                          </a:solidFill>
-                        </a:rPr>
-                        <a:t>◎</a:t>
-                      </a:r>
-                      <a:endParaRPr lang="en-US" sz="1200" dirty="0"/>
-                    </a:p>
-                  </a:txBody>
-                  <a:tcPr marL="76200" marR="76200" marT="25400" marB="25400" anchor="ctr">
-                    <a:lnL w="6350" cap="flat" cmpd="sng" algn="ctr">
-                      <a:solidFill>
-                        <a:srgbClr val="D9D9D9"/>
-                      </a:solidFill>
-                      <a:prstDash val="solid"/>
-                      <a:round/>
-                      <a:headEnd type="none" w="med" len="med"/>
-                      <a:tailEnd type="none" w="med" len="med"/>
-                    </a:lnL>
-                    <a:lnR w="6350" cap="flat" cmpd="sng" algn="ctr">
-                      <a:solidFill>
-                        <a:srgbClr val="D9D9D9"/>
-                      </a:solidFill>
-                      <a:prstDash val="solid"/>
-                      <a:round/>
-                      <a:headEnd type="none" w="med" len="med"/>
-                      <a:tailEnd type="none" w="med" len="med"/>
-                    </a:lnR>
-                    <a:lnT w="6350" cap="flat" cmpd="sng" algn="ctr">
-                      <a:solidFill>
-                        <a:srgbClr val="D9D9D9"/>
-                      </a:solidFill>
-                      <a:prstDash val="solid"/>
-                      <a:round/>
-                      <a:headEnd type="none" w="med" len="med"/>
-                      <a:tailEnd type="none" w="med" len="med"/>
-                    </a:lnT>
-                    <a:lnB w="6350" cap="flat" cmpd="sng" algn="ctr">
-                      <a:solidFill>
-                        <a:srgbClr val="D9D9D9"/>
-                      </a:solidFill>
-                      <a:prstDash val="solid"/>
-                      <a:round/>
-                      <a:headEnd type="none" w="med" len="med"/>
-                      <a:tailEnd type="none" w="med" len="med"/>
-                    </a:lnB>
-                    <a:solidFill>
-                      <a:srgbClr val="FFFFFF"/>
                     </a:solidFill>
                   </a:tcPr>
                 </a:tc>
@@ -11937,7 +13268,7 @@
                       <a:tailEnd type="none" w="med" len="med"/>
                     </a:lnB>
                     <a:solidFill>
-                      <a:srgbClr val="F5F5F5"/>
+                      <a:srgbClr val="FFFFFF"/>
                     </a:solidFill>
                   </a:tcPr>
                 </a:tc>
@@ -11998,7 +13329,7 @@
                       <a:tailEnd type="none" w="med" len="med"/>
                     </a:lnB>
                     <a:solidFill>
-                      <a:srgbClr val="F5F5F5"/>
+                      <a:srgbClr val="FFFFFF"/>
                     </a:solidFill>
                   </a:tcPr>
                 </a:tc>
@@ -12016,7 +13347,7 @@
                             <a:srgbClr val="222222"/>
                           </a:solidFill>
                         </a:rPr>
-                        <a:t>リマインド／動画公開</a:t>
+                        <a:t>予約投稿</a:t>
                       </a:r>
                       <a:endParaRPr lang="en-US" sz="1200" dirty="0"/>
                     </a:p>
@@ -12059,7 +13390,7 @@
                       <a:tailEnd type="none" w="med" len="med"/>
                     </a:lnB>
                     <a:solidFill>
-                      <a:srgbClr val="F5F5F5"/>
+                      <a:srgbClr val="FFFFFF"/>
                     </a:solidFill>
                   </a:tcPr>
                 </a:tc>
@@ -12077,7 +13408,7 @@
                             <a:srgbClr val="222222"/>
                           </a:solidFill>
                         </a:rPr>
-                        <a:t>締切当日「本日23:59まで」→ 第4弾公開</a:t>
+                        <a:t>締切当日「本日23:59まで」＋第4弾公開</a:t>
                       </a:r>
                       <a:endParaRPr lang="en-US" sz="1200" dirty="0"/>
                     </a:p>
@@ -12120,7 +13451,7 @@
                       <a:tailEnd type="none" w="med" len="med"/>
                     </a:lnB>
                     <a:solidFill>
-                      <a:srgbClr val="F5F5F5"/>
+                      <a:srgbClr val="FFFFFF"/>
                     </a:solidFill>
                   </a:tcPr>
                 </a:tc>
@@ -12173,7 +13504,60 @@
                       <a:tailEnd type="none" w="med" len="med"/>
                     </a:lnB>
                     <a:solidFill>
-                      <a:srgbClr val="F5F5F5"/>
+                      <a:srgbClr val="FFFFFF"/>
+                    </a:solidFill>
+                  </a:tcPr>
+                </a:tc>
+                <a:tc>
+                  <a:txBody>
+                    <a:bodyPr/>
+                    <a:lstStyle/>
+                    <a:p>
+                      <a:pPr algn="ctr" indent="0" marL="0">
+                        <a:buNone/>
+                      </a:pPr>
+                      <a:endParaRPr lang="en-US" sz="1200" dirty="0"/>
+                    </a:p>
+                  </a:txBody>
+                  <a:tcPr marL="76200" marR="76200" marT="25400" marB="25400" anchor="ctr">
+                    <a:lnL w="6350" cap="flat" cmpd="sng" algn="ctr">
+                      <a:solidFill>
+                        <a:srgbClr val="D9D9D9"/>
+                      </a:solidFill>
+                      <a:prstDash val="solid"/>
+                      <a:round/>
+                      <a:headEnd type="none" w="med" len="med"/>
+                      <a:tailEnd type="none" w="med" len="med"/>
+                    </a:lnL>
+                    <a:lnR w="6350" cap="flat" cmpd="sng" algn="ctr">
+                      <a:solidFill>
+                        <a:srgbClr val="D9D9D9"/>
+                      </a:solidFill>
+                      <a:prstDash val="solid"/>
+                      <a:round/>
+                      <a:headEnd type="none" w="med" len="med"/>
+                      <a:tailEnd type="none" w="med" len="med"/>
+                    </a:lnR>
+                    <a:lnT w="6350" cap="flat" cmpd="sng" algn="ctr">
+                      <a:solidFill>
+                        <a:srgbClr val="D9D9D9"/>
+                      </a:solidFill>
+                      <a:prstDash val="solid"/>
+                      <a:round/>
+                      <a:headEnd type="none" w="med" len="med"/>
+                      <a:tailEnd type="none" w="med" len="med"/>
+                    </a:lnT>
+                    <a:lnB w="6350" cap="flat" cmpd="sng" algn="ctr">
+                      <a:solidFill>
+                        <a:srgbClr val="D9D9D9"/>
+                      </a:solidFill>
+                      <a:prstDash val="solid"/>
+                      <a:round/>
+                      <a:headEnd type="none" w="med" len="med"/>
+                      <a:tailEnd type="none" w="med" len="med"/>
+                    </a:lnB>
+                    <a:solidFill>
+                      <a:srgbClr val="FFFFFF"/>
                     </a:solidFill>
                   </a:tcPr>
                 </a:tc>
@@ -12212,7 +13596,7 @@
                   <a:srgbClr val="7F7F7F"/>
                 </a:solidFill>
               </a:rPr>
-              <a:t>※両国国技館公演（12/13）前日に締切。ライブ後のデジタルコンテンツはOWV公式X・d ticket公式Xにて別途公開</a:t>
+              <a:t>※11/21（土）のリマインドを削除（土曜対応不可のため）。12/12は予約投稿とし、文面は12/11夜の到達状況で確定</a:t>
             </a:r>
             <a:endParaRPr lang="en-US" sz="1000" dirty="0"/>
           </a:p>
@@ -12274,6 +13658,772 @@
 <file path=ppt/slides/slide4.xml><?xml version="1.0" encoding="utf-8"?>
 <p:sld xmlns:a="http://schemas.openxmlformats.org/drawingml/2006/main" xmlns:r="http://schemas.openxmlformats.org/officeDocument/2006/relationships" xmlns:p="http://schemas.openxmlformats.org/presentationml/2006/main">
   <p:cSld name="Slide 4">
+    <p:spTree>
+      <p:nvGrpSpPr>
+        <p:cNvPr id="1" name=""/>
+        <p:cNvGrpSpPr/>
+        <p:nvPr/>
+      </p:nvGrpSpPr>
+      <p:grpSpPr>
+        <a:xfrm>
+          <a:off x="0" y="0"/>
+          <a:ext cx="0" cy="0"/>
+          <a:chOff x="0" y="0"/>
+          <a:chExt cx="0" cy="0"/>
+        </a:xfrm>
+      </p:grpSpPr>
+      <p:sp>
+        <p:nvSpPr>
+          <p:cNvPr id="2" name="Text 6"/>
+          <p:cNvSpPr/>
+          <p:nvPr>
+            <p:ph idx="106" type="title" hasCustomPrompt="1"/>
+          </p:nvPr>
+        </p:nvSpPr>
+        <p:spPr>
+          <a:xfrm>
+            <a:off x="1325880" y="274320"/>
+            <a:ext cx="8778240" cy="658368"/>
+          </a:xfrm>
+          <a:prstGeom prst="rect">
+            <a:avLst/>
+          </a:prstGeom>
+          <a:noFill/>
+          <a:ln/>
+        </p:spPr>
+        <p:txBody>
+          <a:bodyPr wrap="square" lIns="0" tIns="0" rIns="0" bIns="0" rtlCol="0" anchor="ctr"/>
+          <a:lstStyle/>
+          <a:p>
+            <a:pPr algn="l" indent="0" marL="0">
+              <a:buNone/>
+            </a:pPr>
+            <a:r>
+              <a:rPr lang="en-US" sz="2800" b="1" dirty="0">
+                <a:solidFill>
+                  <a:srgbClr val="222222"/>
+                </a:solidFill>
+              </a:rPr>
+              <a:t>リマインドの狙い　いつ・何のために打つか</a:t>
+            </a:r>
+            <a:endParaRPr lang="en-US" sz="2800" dirty="0"/>
+          </a:p>
+        </p:txBody>
+      </p:sp>
+      <p:sp>
+        <p:nvSpPr>
+          <p:cNvPr id="3" name="lead-box"/>
+          <p:cNvSpPr/>
+          <p:nvPr/>
+        </p:nvSpPr>
+        <p:spPr>
+          <a:xfrm>
+            <a:off x="457200" y="1115568"/>
+            <a:ext cx="11277295" cy="1234440"/>
+          </a:xfrm>
+          <a:prstGeom prst="rect">
+            <a:avLst/>
+          </a:prstGeom>
+          <a:solidFill>
+            <a:srgbClr val="FFFFFF"/>
+          </a:solidFill>
+          <a:ln w="9525">
+            <a:solidFill>
+              <a:srgbClr val="333333"/>
+            </a:solidFill>
+            <a:prstDash val="solid"/>
+          </a:ln>
+        </p:spPr>
+      </p:sp>
+      <p:sp>
+        <p:nvSpPr>
+          <p:cNvPr id="4" name="lead-text"/>
+          <p:cNvSpPr txBox="1"/>
+          <p:nvPr/>
+        </p:nvSpPr>
+        <p:spPr>
+          <a:xfrm>
+            <a:off x="594360" y="1161288"/>
+            <a:ext cx="11002975" cy="1143000"/>
+          </a:xfrm>
+          <a:prstGeom prst="rect">
+            <a:avLst/>
+          </a:prstGeom>
+          <a:noFill/>
+          <a:ln/>
+        </p:spPr>
+        <p:txBody>
+          <a:bodyPr wrap="square" lIns="25400" tIns="0" rIns="50800" bIns="25400" rtlCol="0" anchor="ctr"/>
+          <a:lstStyle/>
+          <a:p>
+            <a:pPr indent="0" marL="0">
+              <a:spcAft>
+                <a:spcPts val="300"/>
+              </a:spcAft>
+              <a:buNone/>
+            </a:pPr>
+            <a:r>
+              <a:rPr lang="en-US" sz="1500" dirty="0">
+                <a:solidFill>
+                  <a:srgbClr val="222222"/>
+                </a:solidFill>
+              </a:rPr>
+              <a:t>・自然減衰だけでは累計約1,040件で止まるため、</a:t>
+            </a:r>
+            <a:pPr indent="0" marL="0">
+              <a:spcAft>
+                <a:spcPts val="300"/>
+              </a:spcAft>
+              <a:buNone/>
+            </a:pPr>
+            <a:r>
+              <a:rPr lang="en-US" sz="1500" b="1" dirty="0">
+                <a:solidFill>
+                  <a:srgbClr val="C8102E"/>
+                </a:solidFill>
+              </a:rPr>
+              <a:t>勢いが落ちる前に再露出を重ね、日々のリポストを底上げ</a:t>
+            </a:r>
+            <a:pPr indent="0" marL="0">
+              <a:spcAft>
+                <a:spcPts val="300"/>
+              </a:spcAft>
+              <a:buNone/>
+            </a:pPr>
+            <a:r>
+              <a:rPr lang="en-US" sz="1500" dirty="0">
+                <a:solidFill>
+                  <a:srgbClr val="222222"/>
+                </a:solidFill>
+              </a:rPr>
+              <a:t>する</a:t>
+            </a:r>
+            <a:endParaRPr lang="en-US" sz="1500" dirty="0"/>
+          </a:p>
+          <a:p>
+            <a:pPr indent="0" marL="0">
+              <a:spcAft>
+                <a:spcPts val="300"/>
+              </a:spcAft>
+              <a:buNone/>
+            </a:pPr>
+            <a:r>
+              <a:rPr lang="en-US" sz="1500" dirty="0">
+                <a:solidFill>
+                  <a:srgbClr val="222222"/>
+                </a:solidFill>
+              </a:rPr>
+              <a:t>・新スケジュールの想定累計は</a:t>
+            </a:r>
+            <a:pPr indent="0" marL="0">
+              <a:spcAft>
+                <a:spcPts val="300"/>
+              </a:spcAft>
+              <a:buNone/>
+            </a:pPr>
+            <a:r>
+              <a:rPr lang="en-US" sz="1500" b="1" dirty="0">
+                <a:solidFill>
+                  <a:srgbClr val="C8102E"/>
+                </a:solidFill>
+              </a:rPr>
+              <a:t>約1,960件</a:t>
+            </a:r>
+            <a:pPr indent="0" marL="0">
+              <a:spcAft>
+                <a:spcPts val="300"/>
+              </a:spcAft>
+              <a:buNone/>
+            </a:pPr>
+            <a:r>
+              <a:rPr lang="en-US" sz="1500" dirty="0">
+                <a:solidFill>
+                  <a:srgbClr val="222222"/>
+                </a:solidFill>
+              </a:rPr>
+              <a:t>（旧案：約2,130件）。12時枠の効果は17時の約6割と保守的に設定</a:t>
+            </a:r>
+            <a:endParaRPr lang="en-US" sz="1500" dirty="0"/>
+          </a:p>
+          <a:p>
+            <a:pPr indent="0" marL="0">
+              <a:spcAft>
+                <a:spcPts val="300"/>
+              </a:spcAft>
+              <a:buNone/>
+            </a:pPr>
+            <a:r>
+              <a:rPr lang="en-US" sz="1500" dirty="0">
+                <a:solidFill>
+                  <a:srgbClr val="222222"/>
+                </a:solidFill>
+              </a:rPr>
+              <a:t>・→ AB検証で12時の方が伸びれば上振れ。</a:t>
+            </a:r>
+            <a:pPr indent="0" marL="0">
+              <a:spcAft>
+                <a:spcPts val="300"/>
+              </a:spcAft>
+              <a:buNone/>
+            </a:pPr>
+            <a:r>
+              <a:rPr lang="en-US" sz="1500" b="1" dirty="0">
+                <a:solidFill>
+                  <a:srgbClr val="C8102E"/>
+                </a:solidFill>
+              </a:rPr>
+              <a:t>検証の機会コストは約170件</a:t>
+            </a:r>
+            <a:pPr indent="0" marL="0">
+              <a:spcAft>
+                <a:spcPts val="300"/>
+              </a:spcAft>
+              <a:buNone/>
+            </a:pPr>
+            <a:r>
+              <a:rPr lang="en-US" sz="1500" dirty="0">
+                <a:solidFill>
+                  <a:srgbClr val="222222"/>
+                </a:solidFill>
+              </a:rPr>
+              <a:t>（土曜削除の分を含む）</a:t>
+            </a:r>
+            <a:endParaRPr lang="en-US" sz="1500" dirty="0"/>
+          </a:p>
+        </p:txBody>
+      </p:sp>
+      <p:graphicFrame>
+        <p:nvGraphicFramePr>
+          <p:cNvPr id="5" name="Chart 0" descr=""/>
+          <p:cNvGraphicFramePr/>
+          <p:nvPr/>
+        </p:nvGraphicFramePr>
+        <p:xfrm>
+          <a:off x="457200" y="2514600"/>
+          <a:ext cx="6858000" cy="3611880"/>
+        </p:xfrm>
+        <a:graphic xmlns:a="http://schemas.openxmlformats.org/drawingml/2006/main">
+          <a:graphicData uri="http://schemas.openxmlformats.org/drawingml/2006/chart">
+            <c:chart xmlns:c="http://schemas.openxmlformats.org/drawingml/2006/chart" r:id="rId1"/>
+          </a:graphicData>
+        </a:graphic>
+      </p:graphicFrame>
+      <p:sp>
+        <p:nvSpPr>
+          <p:cNvPr id="6" name="Text 3"/>
+          <p:cNvSpPr txBox="1"/>
+          <p:nvPr/>
+        </p:nvSpPr>
+        <p:spPr>
+          <a:xfrm>
+            <a:off x="1005840" y="3246120"/>
+            <a:ext cx="1188720" cy="256032"/>
+          </a:xfrm>
+          <a:prstGeom prst="rect">
+            <a:avLst/>
+          </a:prstGeom>
+          <a:noFill/>
+          <a:ln/>
+        </p:spPr>
+        <p:txBody>
+          <a:bodyPr wrap="square" lIns="0" tIns="0" rIns="0" bIns="0" rtlCol="0" anchor="ctr"/>
+          <a:lstStyle/>
+          <a:p>
+            <a:pPr indent="0" marL="0">
+              <a:buNone/>
+            </a:pPr>
+            <a:r>
+              <a:rPr lang="en-US" sz="1000" b="1" dirty="0">
+                <a:solidFill>
+                  <a:srgbClr val="222222"/>
+                </a:solidFill>
+              </a:rPr>
+              <a:t>初日 650件↑</a:t>
+            </a:r>
+            <a:endParaRPr lang="en-US" sz="1000" dirty="0"/>
+          </a:p>
+        </p:txBody>
+      </p:sp>
+      <p:sp>
+        <p:nvSpPr>
+          <p:cNvPr id="7" name="intent-0"/>
+          <p:cNvSpPr/>
+          <p:nvPr/>
+        </p:nvSpPr>
+        <p:spPr>
+          <a:xfrm>
+            <a:off x="7498080" y="2560320"/>
+            <a:ext cx="4233672" cy="804672"/>
+          </a:xfrm>
+          <a:prstGeom prst="rect">
+            <a:avLst/>
+          </a:prstGeom>
+          <a:solidFill>
+            <a:srgbClr val="F5F5F5"/>
+          </a:solidFill>
+          <a:ln w="9525">
+            <a:solidFill>
+              <a:srgbClr val="D9D9D9"/>
+            </a:solidFill>
+            <a:prstDash val="solid"/>
+          </a:ln>
+        </p:spPr>
+      </p:sp>
+      <p:sp>
+        <p:nvSpPr>
+          <p:cNvPr id="8" name="Text 5"/>
+          <p:cNvSpPr txBox="1"/>
+          <p:nvPr/>
+        </p:nvSpPr>
+        <p:spPr>
+          <a:xfrm>
+            <a:off x="7635240" y="2615184"/>
+            <a:ext cx="4023360" cy="292608"/>
+          </a:xfrm>
+          <a:prstGeom prst="rect">
+            <a:avLst/>
+          </a:prstGeom>
+          <a:noFill/>
+          <a:ln/>
+        </p:spPr>
+        <p:txBody>
+          <a:bodyPr wrap="square" lIns="0" tIns="0" rIns="0" bIns="0" rtlCol="0" anchor="ctr"/>
+          <a:lstStyle/>
+          <a:p>
+            <a:pPr indent="0" marL="0">
+              <a:buNone/>
+            </a:pPr>
+            <a:r>
+              <a:rPr lang="en-US" sz="1200" b="1" dirty="0">
+                <a:solidFill>
+                  <a:srgbClr val="222222"/>
+                </a:solidFill>
+              </a:rPr>
+              <a:t>① 翌日リマインド（11/17）</a:t>
+            </a:r>
+            <a:endParaRPr lang="en-US" sz="1200" dirty="0"/>
+          </a:p>
+        </p:txBody>
+      </p:sp>
+      <p:sp>
+        <p:nvSpPr>
+          <p:cNvPr id="9" name="Text 6"/>
+          <p:cNvSpPr txBox="1"/>
+          <p:nvPr/>
+        </p:nvSpPr>
+        <p:spPr>
+          <a:xfrm>
+            <a:off x="7635240" y="2907792"/>
+            <a:ext cx="4023360" cy="411480"/>
+          </a:xfrm>
+          <a:prstGeom prst="rect">
+            <a:avLst/>
+          </a:prstGeom>
+          <a:noFill/>
+          <a:ln/>
+        </p:spPr>
+        <p:txBody>
+          <a:bodyPr wrap="square" lIns="0" tIns="0" rIns="0" bIns="0" rtlCol="0" anchor="t"/>
+          <a:lstStyle/>
+          <a:p>
+            <a:pPr indent="0" marL="0">
+              <a:buNone/>
+            </a:pPr>
+            <a:r>
+              <a:rPr lang="en-US" sz="1100" dirty="0">
+                <a:solidFill>
+                  <a:srgbClr val="404040"/>
+                </a:solidFill>
+              </a:rPr>
+              <a:t>勢いが尽きる約24時間後に再露出し、初日の取りこぼしを回収</a:t>
+            </a:r>
+            <a:endParaRPr lang="en-US" sz="1100" dirty="0"/>
+          </a:p>
+        </p:txBody>
+      </p:sp>
+      <p:sp>
+        <p:nvSpPr>
+          <p:cNvPr id="10" name="intent-1"/>
+          <p:cNvSpPr/>
+          <p:nvPr/>
+        </p:nvSpPr>
+        <p:spPr>
+          <a:xfrm>
+            <a:off x="7498080" y="3456432"/>
+            <a:ext cx="4233672" cy="804672"/>
+          </a:xfrm>
+          <a:prstGeom prst="rect">
+            <a:avLst/>
+          </a:prstGeom>
+          <a:solidFill>
+            <a:srgbClr val="F5F5F5"/>
+          </a:solidFill>
+          <a:ln w="9525">
+            <a:solidFill>
+              <a:srgbClr val="D9D9D9"/>
+            </a:solidFill>
+            <a:prstDash val="solid"/>
+          </a:ln>
+        </p:spPr>
+      </p:sp>
+      <p:sp>
+        <p:nvSpPr>
+          <p:cNvPr id="11" name="Text 8"/>
+          <p:cNvSpPr txBox="1"/>
+          <p:nvPr/>
+        </p:nvSpPr>
+        <p:spPr>
+          <a:xfrm>
+            <a:off x="7635240" y="3511296"/>
+            <a:ext cx="4023360" cy="292608"/>
+          </a:xfrm>
+          <a:prstGeom prst="rect">
+            <a:avLst/>
+          </a:prstGeom>
+          <a:noFill/>
+          <a:ln/>
+        </p:spPr>
+        <p:txBody>
+          <a:bodyPr wrap="square" lIns="0" tIns="0" rIns="0" bIns="0" rtlCol="0" anchor="ctr"/>
+          <a:lstStyle/>
+          <a:p>
+            <a:pPr indent="0" marL="0">
+              <a:buNone/>
+            </a:pPr>
+            <a:r>
+              <a:rPr lang="en-US" sz="1200" b="1" dirty="0">
+                <a:solidFill>
+                  <a:srgbClr val="222222"/>
+                </a:solidFill>
+              </a:rPr>
+              <a:t>② 動画公開＝リマインド（11/19・23、12/3）</a:t>
+            </a:r>
+            <a:endParaRPr lang="en-US" sz="1200" dirty="0"/>
+          </a:p>
+        </p:txBody>
+      </p:sp>
+      <p:sp>
+        <p:nvSpPr>
+          <p:cNvPr id="12" name="Text 9"/>
+          <p:cNvSpPr txBox="1"/>
+          <p:nvPr/>
+        </p:nvSpPr>
+        <p:spPr>
+          <a:xfrm>
+            <a:off x="7635240" y="3803904"/>
+            <a:ext cx="4023360" cy="411480"/>
+          </a:xfrm>
+          <a:prstGeom prst="rect">
+            <a:avLst/>
+          </a:prstGeom>
+          <a:noFill/>
+          <a:ln/>
+        </p:spPr>
+        <p:txBody>
+          <a:bodyPr wrap="square" lIns="0" tIns="0" rIns="0" bIns="0" rtlCol="0" anchor="t"/>
+          <a:lstStyle/>
+          <a:p>
+            <a:pPr indent="0" marL="0">
+              <a:buNone/>
+            </a:pPr>
+            <a:r>
+              <a:rPr lang="en-US" sz="1100" dirty="0">
+                <a:solidFill>
+                  <a:srgbClr val="404040"/>
+                </a:solidFill>
+              </a:rPr>
+              <a:t>コンテンツで再露出しつつ「次はあと◯件」で次の目標へ誘導</a:t>
+            </a:r>
+            <a:endParaRPr lang="en-US" sz="1100" dirty="0"/>
+          </a:p>
+        </p:txBody>
+      </p:sp>
+      <p:sp>
+        <p:nvSpPr>
+          <p:cNvPr id="13" name="intent-2"/>
+          <p:cNvSpPr/>
+          <p:nvPr/>
+        </p:nvSpPr>
+        <p:spPr>
+          <a:xfrm>
+            <a:off x="7498080" y="4352544"/>
+            <a:ext cx="4233672" cy="804672"/>
+          </a:xfrm>
+          <a:prstGeom prst="rect">
+            <a:avLst/>
+          </a:prstGeom>
+          <a:solidFill>
+            <a:srgbClr val="F5F5F5"/>
+          </a:solidFill>
+          <a:ln w="9525">
+            <a:solidFill>
+              <a:srgbClr val="D9D9D9"/>
+            </a:solidFill>
+            <a:prstDash val="solid"/>
+          </a:ln>
+        </p:spPr>
+      </p:sp>
+      <p:sp>
+        <p:nvSpPr>
+          <p:cNvPr id="14" name="Text 11"/>
+          <p:cNvSpPr txBox="1"/>
+          <p:nvPr/>
+        </p:nvSpPr>
+        <p:spPr>
+          <a:xfrm>
+            <a:off x="7635240" y="4407408"/>
+            <a:ext cx="4023360" cy="292608"/>
+          </a:xfrm>
+          <a:prstGeom prst="rect">
+            <a:avLst/>
+          </a:prstGeom>
+          <a:noFill/>
+          <a:ln/>
+        </p:spPr>
+        <p:txBody>
+          <a:bodyPr wrap="square" lIns="0" tIns="0" rIns="0" bIns="0" rtlCol="0" anchor="ctr"/>
+          <a:lstStyle/>
+          <a:p>
+            <a:pPr indent="0" marL="0">
+              <a:buNone/>
+            </a:pPr>
+            <a:r>
+              <a:rPr lang="en-US" sz="1200" b="1" dirty="0">
+                <a:solidFill>
+                  <a:srgbClr val="C8102E"/>
+                </a:solidFill>
+              </a:rPr>
+              <a:t>③ OWV公式RPの山場（11/16・29、12/11）</a:t>
+            </a:r>
+            <a:endParaRPr lang="en-US" sz="1200" dirty="0"/>
+          </a:p>
+        </p:txBody>
+      </p:sp>
+      <p:sp>
+        <p:nvSpPr>
+          <p:cNvPr id="15" name="Text 12"/>
+          <p:cNvSpPr txBox="1"/>
+          <p:nvPr/>
+        </p:nvSpPr>
+        <p:spPr>
+          <a:xfrm>
+            <a:off x="7635240" y="4700016"/>
+            <a:ext cx="4023360" cy="411480"/>
+          </a:xfrm>
+          <a:prstGeom prst="rect">
+            <a:avLst/>
+          </a:prstGeom>
+          <a:noFill/>
+          <a:ln/>
+        </p:spPr>
+        <p:txBody>
+          <a:bodyPr wrap="square" lIns="0" tIns="0" rIns="0" bIns="0" rtlCol="0" anchor="t"/>
+          <a:lstStyle/>
+          <a:p>
+            <a:pPr indent="0" marL="0">
+              <a:buNone/>
+            </a:pPr>
+            <a:r>
+              <a:rPr lang="en-US" sz="1100" dirty="0">
+                <a:solidFill>
+                  <a:srgbClr val="404040"/>
+                </a:solidFill>
+              </a:rPr>
+              <a:t>ファン層に届く関係先RPで初日の約3割を再獲得（10/26実績）</a:t>
+            </a:r>
+            <a:endParaRPr lang="en-US" sz="1100" dirty="0"/>
+          </a:p>
+        </p:txBody>
+      </p:sp>
+      <p:sp>
+        <p:nvSpPr>
+          <p:cNvPr id="16" name="intent-3"/>
+          <p:cNvSpPr/>
+          <p:nvPr/>
+        </p:nvSpPr>
+        <p:spPr>
+          <a:xfrm>
+            <a:off x="7498080" y="5248656"/>
+            <a:ext cx="4233672" cy="804672"/>
+          </a:xfrm>
+          <a:prstGeom prst="rect">
+            <a:avLst/>
+          </a:prstGeom>
+          <a:solidFill>
+            <a:srgbClr val="F5F5F5"/>
+          </a:solidFill>
+          <a:ln w="9525">
+            <a:solidFill>
+              <a:srgbClr val="D9D9D9"/>
+            </a:solidFill>
+            <a:prstDash val="solid"/>
+          </a:ln>
+        </p:spPr>
+      </p:sp>
+      <p:sp>
+        <p:nvSpPr>
+          <p:cNvPr id="17" name="Text 14"/>
+          <p:cNvSpPr txBox="1"/>
+          <p:nvPr/>
+        </p:nvSpPr>
+        <p:spPr>
+          <a:xfrm>
+            <a:off x="7635240" y="5303520"/>
+            <a:ext cx="4023360" cy="292608"/>
+          </a:xfrm>
+          <a:prstGeom prst="rect">
+            <a:avLst/>
+          </a:prstGeom>
+          <a:noFill/>
+          <a:ln/>
+        </p:spPr>
+        <p:txBody>
+          <a:bodyPr wrap="square" lIns="0" tIns="0" rIns="0" bIns="0" rtlCol="0" anchor="ctr"/>
+          <a:lstStyle/>
+          <a:p>
+            <a:pPr indent="0" marL="0">
+              <a:buNone/>
+            </a:pPr>
+            <a:r>
+              <a:rPr lang="en-US" sz="1200" b="1" dirty="0">
+                <a:solidFill>
+                  <a:srgbClr val="222222"/>
+                </a:solidFill>
+              </a:rPr>
+              <a:t>④ 締切前の駆け込み（12/6・10・11・12）</a:t>
+            </a:r>
+            <a:endParaRPr lang="en-US" sz="1200" dirty="0"/>
+          </a:p>
+        </p:txBody>
+      </p:sp>
+      <p:sp>
+        <p:nvSpPr>
+          <p:cNvPr id="18" name="Text 15"/>
+          <p:cNvSpPr txBox="1"/>
+          <p:nvPr/>
+        </p:nvSpPr>
+        <p:spPr>
+          <a:xfrm>
+            <a:off x="7635240" y="5596128"/>
+            <a:ext cx="4023360" cy="411480"/>
+          </a:xfrm>
+          <a:prstGeom prst="rect">
+            <a:avLst/>
+          </a:prstGeom>
+          <a:noFill/>
+          <a:ln/>
+        </p:spPr>
+        <p:txBody>
+          <a:bodyPr wrap="square" lIns="0" tIns="0" rIns="0" bIns="0" rtlCol="0" anchor="t"/>
+          <a:lstStyle/>
+          <a:p>
+            <a:pPr indent="0" marL="0">
+              <a:buNone/>
+            </a:pPr>
+            <a:r>
+              <a:rPr lang="en-US" sz="1100" dirty="0">
+                <a:solidFill>
+                  <a:srgbClr val="404040"/>
+                </a:solidFill>
+              </a:rPr>
+              <a:t>残り日数を示して、迷っている層の最後の参加を促す</a:t>
+            </a:r>
+            <a:endParaRPr lang="en-US" sz="1100" dirty="0"/>
+          </a:p>
+        </p:txBody>
+      </p:sp>
+      <p:sp>
+        <p:nvSpPr>
+          <p:cNvPr id="19" name="Text 16"/>
+          <p:cNvSpPr txBox="1"/>
+          <p:nvPr/>
+        </p:nvSpPr>
+        <p:spPr>
+          <a:xfrm>
+            <a:off x="457200" y="6199632"/>
+            <a:ext cx="11277295" cy="274320"/>
+          </a:xfrm>
+          <a:prstGeom prst="rect">
+            <a:avLst/>
+          </a:prstGeom>
+          <a:noFill/>
+          <a:ln/>
+        </p:spPr>
+        <p:txBody>
+          <a:bodyPr wrap="square" lIns="0" tIns="0" rIns="0" bIns="0" rtlCol="0" anchor="ctr"/>
+          <a:lstStyle/>
+          <a:p>
+            <a:pPr indent="0" marL="0">
+              <a:buNone/>
+            </a:pPr>
+            <a:r>
+              <a:rPr lang="en-US" sz="1000" dirty="0">
+                <a:solidFill>
+                  <a:srgbClr val="7F7F7F"/>
+                </a:solidFill>
+              </a:rPr>
+              <a:t>※試算前提：初日650件（井上実績×1.3）→初日比8%・4%・2%で減衰。上乗せ：リマインド10%・動画公開14%・OWV公式RP30%・締切当日15%、12時投稿は×0.59</a:t>
+            </a:r>
+            <a:endParaRPr lang="en-US" sz="1000" dirty="0"/>
+          </a:p>
+        </p:txBody>
+      </p:sp>
+      <p:sp>
+        <p:nvSpPr>
+          <p:cNvPr id="25" name="Slide Number Placeholder 0"/>
+          <p:cNvSpPr>
+            <a:spLocks noGrp="1"/>
+          </p:cNvSpPr>
+          <p:nvPr>
+            <p:ph type="sldNum" sz="quarter" idx="4294967295"/>
+          </p:nvPr>
+        </p:nvSpPr>
+        <p:spPr>
+          <a:xfrm>
+            <a:off x="11384280" y="457200"/>
+            <a:ext cx="457200" cy="365760"/>
+          </a:xfrm>
+          <a:prstGeom prst="rect">
+            <a:avLst/>
+          </a:prstGeom>
+          <a:extLst>
+            <a:ext uri="{C572A759-6A51-4108-AA02-DFA0A04FC94B}">
+              <ma14:wrappingTextBoxFlag xmlns:ma14="http://schemas.microsoft.com/office/mac/drawingml/2011/main" val="0"/>
+            </a:ext>
+          </a:extLst>
+        </p:spPr>
+        <p:txBody>
+          <a:bodyPr anchor="ctr"/>
+          <a:lstStyle>
+            <a:lvl1pPr>
+              <a:defRPr sz="1600">
+                <a:solidFill>
+                  <a:srgbClr val="222222"/>
+                </a:solidFill>
+              </a:defRPr>
+            </a:lvl1pPr>
+          </a:lstStyle>
+          <a:p>
+            <a:pPr algn="r"/>
+            <a:fld id="{F7021451-1387-4CA6-816F-3879F97B5CBC}" type="slidenum">
+              <a:rPr b="0" lang="en-US"/>
+              <a:t>4</a:t>
+            </a:fld>
+            <a:endParaRPr lang="en-US"/>
+          </a:p>
+        </p:txBody>
+      </p:sp>
+    </p:spTree>
+  </p:cSld>
+  <p:clrMapOvr>
+    <a:masterClrMapping/>
+  </p:clrMapOvr>
+</p:sld>
+</file>
+
+<file path=ppt/slides/slide5.xml><?xml version="1.0" encoding="utf-8"?>
+<p:sld xmlns:a="http://schemas.openxmlformats.org/drawingml/2006/main" xmlns:r="http://schemas.openxmlformats.org/officeDocument/2006/relationships" xmlns:p="http://schemas.openxmlformats.org/presentationml/2006/main">
+  <p:cSld name="Slide 5">
     <p:spTree>
       <p:nvGrpSpPr>
         <p:cNvPr id="1" name=""/>
@@ -12443,7 +14593,7 @@
                   <a:srgbClr val="C8102E"/>
                 </a:solidFill>
               </a:rPr>
-              <a:t>リマインドなしだと約1,000件で頭打ち</a:t>
+              <a:t>リマインドなしだと約1,040件で頭打ち</a:t>
             </a:r>
             <a:pPr indent="0" marL="0">
               <a:spcAft>
@@ -12457,7 +14607,7 @@
                   <a:srgbClr val="222222"/>
                 </a:solidFill>
               </a:rPr>
-              <a:t>。計画どおりなら</a:t>
+              <a:t>。新スケジュールは</a:t>
             </a:r>
             <a:pPr indent="0" marL="0">
               <a:spcAft>
@@ -12471,7 +14621,7 @@
                   <a:srgbClr val="C8102E"/>
                 </a:solidFill>
               </a:rPr>
-              <a:t>締切前日（12/11）のOWV公式RPで2,000件に到達</a:t>
+              <a:t>締切時点で約1,960件（2,000件はストレッチ）</a:t>
             </a:r>
             <a:endParaRPr lang="en-US" sz="1500" dirty="0"/>
           </a:p>
@@ -12563,7 +14713,7 @@
                   <a:srgbClr val="404040"/>
                 </a:solidFill>
               </a:rPr>
-              <a:t>計画どおり運用</a:t>
+              <a:t>新スケジュール</a:t>
             </a:r>
             <a:endParaRPr lang="en-US" sz="1000" dirty="0"/>
           </a:p>
@@ -12689,7 +14839,7 @@
       </p:sp>
       <p:graphicFrame>
         <p:nvGraphicFramePr>
-          <p:cNvPr id="5" name="Table 0"/>
+          <p:cNvPr id="6" name="Table 0"/>
           <p:cNvGraphicFramePr>
             <a:graphicFrameLocks noGrp="1"/>
           </p:cNvGraphicFramePr>
@@ -13651,7 +15801,7 @@
                             <a:srgbClr val="222222"/>
                           </a:solidFill>
                         </a:rPr>
-                        <a:t>11/26</a:t>
+                        <a:t>11/29</a:t>
                       </a:r>
                       <a:endParaRPr lang="en-US" sz="1100" dirty="0"/>
                     </a:p>
@@ -13836,7 +15986,7 @@
                             <a:srgbClr val="222222"/>
                           </a:solidFill>
                         </a:rPr>
-                        <a:t>OWV公式RP（中間・前日）で到達</a:t>
+                        <a:t>OWV公式RP＋締切の駆け込み</a:t>
                       </a:r>
                       <a:endParaRPr lang="en-US" sz="1100" dirty="0"/>
                     </a:p>
@@ -13892,12 +16042,12 @@
                         <a:buNone/>
                       </a:pPr>
                       <a:r>
-                        <a:rPr lang="en-US" sz="1100" dirty="0">
+                        <a:rPr lang="en-US" sz="1100" b="1" dirty="0">
                           <a:solidFill>
-                            <a:srgbClr val="222222"/>
+                            <a:srgbClr val="C8102E"/>
                           </a:solidFill>
                         </a:rPr>
-                        <a:t>12/11</a:t>
+                        <a:t>締切前後</a:t>
                       </a:r>
                       <a:endParaRPr lang="en-US" sz="1100" dirty="0"/>
                     </a:p>
@@ -13979,7 +16129,7 @@
                   <a:srgbClr val="7F7F7F"/>
                 </a:solidFill>
               </a:rPr>
-              <a:t>※試算前提：初日650件（井上実績×1.3）→初日比8%・4%・2%で減衰。上乗せ：リマインド10%（仮）・動画公開14%・OWV公式RP30%</a:t>
+              <a:t>※試算前提はP4と同じ。初日実績が出た時点で再試算し、必要に応じて第4弾ラインを見直す</a:t>
             </a:r>
             <a:endParaRPr lang="en-US" sz="1000" dirty="0"/>
           </a:p>
@@ -14024,7 +16174,7 @@
             <a:pPr algn="r"/>
             <a:fld id="{F7021451-1387-4CA6-816F-3879F97B5CBC}" type="slidenum">
               <a:rPr b="0" lang="en-US"/>
-              <a:t>4</a:t>
+              <a:t>5</a:t>
             </a:fld>
             <a:endParaRPr lang="en-US"/>
           </a:p>

--- a/OWV_リマインド・リポスト目標設計.pptx
+++ b/OWV_リマインド・リポスト目標設計.pptx
@@ -111,7 +111,7 @@
   <p:extLst>
     <p:ext uri="{521415D9-36F7-43E2-AB2F-B90AF26B5E84}">
       <p14:sectionLst xmlns:p14="http://schemas.microsoft.com/office/powerpoint/2010/main">
-        <p14:section name="OWV CP リマインド設計" id="{1ce354cd-c976-dfff-a999-663c8ae2090b}">
+        <p14:section name="OWV CP リマインド設計" id="{ce09c10c-051d-5fd0-61e6-5a08d682826d}">
           <p14:sldIdLst>
             <p14:sldId id="256"/>
             <p14:sldId id="257"/>
@@ -2795,10 +2795,10 @@
                   <c:v>0</c:v>
                 </c:pt>
                 <c:pt idx="7">
+                  <c:v>0</c:v>
+                </c:pt>
+                <c:pt idx="8">
                   <c:v>91</c:v>
-                </c:pt>
-                <c:pt idx="8">
-                  <c:v>0</c:v>
                 </c:pt>
                 <c:pt idx="9">
                   <c:v>0</c:v>
@@ -2813,10 +2813,10 @@
                   <c:v>0</c:v>
                 </c:pt>
                 <c:pt idx="13">
+                  <c:v>0</c:v>
+                </c:pt>
+                <c:pt idx="14">
                   <c:v>195</c:v>
-                </c:pt>
-                <c:pt idx="14">
-                  <c:v>0</c:v>
                 </c:pt>
                 <c:pt idx="15">
                   <c:v>0</c:v>
@@ -2834,10 +2834,10 @@
                   <c:v>0</c:v>
                 </c:pt>
                 <c:pt idx="20">
+                  <c:v>0</c:v>
+                </c:pt>
+                <c:pt idx="21">
                   <c:v>65</c:v>
-                </c:pt>
-                <c:pt idx="21">
-                  <c:v>0</c:v>
                 </c:pt>
                 <c:pt idx="22">
                   <c:v>0</c:v>
@@ -3079,7 +3079,7 @@
                   <c:v>0</c:v>
                 </c:pt>
                 <c:pt idx="26">
-                  <c:v>58</c:v>
+                  <c:v>0</c:v>
                 </c:pt>
               </c:numCache>
             </c:numRef>
@@ -3478,7 +3478,7 @@
                   <c:v>936</c:v>
                 </c:pt>
                 <c:pt idx="7">
-                  <c:v>1040</c:v>
+                  <c:v>949</c:v>
                 </c:pt>
                 <c:pt idx="8">
                   <c:v>1053</c:v>
@@ -3496,7 +3496,7 @@
                   <c:v>1144</c:v>
                 </c:pt>
                 <c:pt idx="13">
-                  <c:v>1352</c:v>
+                  <c:v>1157</c:v>
                 </c:pt>
                 <c:pt idx="14">
                   <c:v>1365</c:v>
@@ -3517,7 +3517,7 @@
                   <c:v>1484</c:v>
                 </c:pt>
                 <c:pt idx="20">
-                  <c:v>1562</c:v>
+                  <c:v>1497</c:v>
                 </c:pt>
                 <c:pt idx="21">
                   <c:v>1575</c:v>
@@ -3535,7 +3535,7 @@
                   <c:v>1887</c:v>
                 </c:pt>
                 <c:pt idx="26">
-                  <c:v>1957</c:v>
+                  <c:v>1900</c:v>
                 </c:pt>
               </c:numCache>
             </c:numRef>
@@ -7166,14 +7166,6 @@
               </a:spcAft>
               <a:buNone/>
             </a:pPr>
-            <a:r>
-              <a:rPr lang="en-US" sz="1500" dirty="0">
-                <a:solidFill>
-                  <a:srgbClr val="222222"/>
-                </a:solidFill>
-              </a:rPr>
-              <a:t>（締切当日のみ12:00）</a:t>
-            </a:r>
             <a:endParaRPr lang="en-US" sz="1500" dirty="0"/>
           </a:p>
         </p:txBody>
@@ -9126,7 +9118,7 @@
                   <a:srgbClr val="222222"/>
                 </a:solidFill>
               </a:rPr>
-              <a:t>・27日間で計11回（</a:t>
+              <a:t>・平日のみで計10回（</a:t>
             </a:r>
             <a:pPr indent="0" marL="0">
               <a:spcAft>
@@ -9140,7 +9132,7 @@
                   <a:srgbClr val="C8102E"/>
                 </a:solidFill>
               </a:rPr>
-              <a:t>土曜は締切当日の予約投稿のみ</a:t>
+              <a:t>土日祝は投稿なし</a:t>
             </a:r>
             <a:pPr indent="0" marL="0">
               <a:spcAft>
@@ -9154,7 +9146,7 @@
                   <a:srgbClr val="222222"/>
                 </a:solidFill>
               </a:rPr>
-              <a:t>）。原則17:00、OWV公式RPは11/16・11/29・12/11</a:t>
+              <a:t>）。原則17:00、OWV公式RPは11/16・11/30・12/11の3回</a:t>
             </a:r>
             <a:endParaRPr lang="en-US" sz="1500" dirty="0"/>
           </a:p>
@@ -10721,7 +10713,7 @@
                             <a:srgbClr val="222222"/>
                           </a:solidFill>
                         </a:rPr>
-                        <a:t>11/23（月・祝）</a:t>
+                        <a:t>11/24（火）</a:t>
                       </a:r>
                       <a:endParaRPr lang="en-US" sz="1200" dirty="0"/>
                     </a:p>
@@ -10904,7 +10896,7 @@
                             <a:srgbClr val="222222"/>
                           </a:solidFill>
                         </a:rPr>
-                        <a:t>第2弾ダイジェスト公開＋次の目標</a:t>
+                        <a:t>第2弾ダイジェスト公開＋次の目標（祝日明け）</a:t>
                       </a:r>
                       <a:endParaRPr lang="en-US" sz="1200" dirty="0"/>
                     </a:p>
@@ -11433,7 +11425,7 @@
                             <a:srgbClr val="222222"/>
                           </a:solidFill>
                         </a:rPr>
-                        <a:t>11/29（日）</a:t>
+                        <a:t>11/30（月）</a:t>
                       </a:r>
                       <a:endParaRPr lang="en-US" sz="1200" dirty="0"/>
                     </a:p>
@@ -11616,7 +11608,7 @@
                             <a:srgbClr val="222222"/>
                           </a:solidFill>
                         </a:rPr>
-                        <a:t>中間の山場リマインド</a:t>
+                        <a:t>中間の山場リマインド（週明けに再点火）</a:t>
                       </a:r>
                       <a:endParaRPr lang="en-US" sz="1200" dirty="0"/>
                     </a:p>
@@ -12153,7 +12145,7 @@
                             <a:srgbClr val="222222"/>
                           </a:solidFill>
                         </a:rPr>
-                        <a:t>12/6（日）</a:t>
+                        <a:t>12/7（月）</a:t>
                       </a:r>
                       <a:endParaRPr lang="en-US" sz="1200" dirty="0"/>
                     </a:p>
@@ -12336,7 +12328,7 @@
                             <a:srgbClr val="222222"/>
                           </a:solidFill>
                         </a:rPr>
-                        <a:t>「ラスト1週間」（動画ペアの結果で時刻を見直し）</a:t>
+                        <a:t>「最終週」（動画ペアの結果で時刻を見直し）</a:t>
                       </a:r>
                       <a:endParaRPr lang="en-US" sz="1200" dirty="0"/>
                     </a:p>
@@ -13048,7 +13040,7 @@
                             <a:srgbClr val="222222"/>
                           </a:solidFill>
                         </a:rPr>
-                        <a:t>締切前日（ラストスパート）</a:t>
+                        <a:t>最終投稿「明日23:59締切」＋第4弾の公開告知</a:t>
                       </a:r>
                       <a:endParaRPr lang="en-US" sz="1200" dirty="0"/>
                     </a:p>
@@ -13206,358 +13198,6 @@
                     </a:lnB>
                     <a:solidFill>
                       <a:srgbClr val="F5F5F5"/>
-                    </a:solidFill>
-                  </a:tcPr>
-                </a:tc>
-              </a:tr>
-              <a:tr h="301752">
-                <a:tc>
-                  <a:txBody>
-                    <a:bodyPr/>
-                    <a:lstStyle/>
-                    <a:p>
-                      <a:pPr indent="0" marL="0">
-                        <a:buNone/>
-                      </a:pPr>
-                      <a:r>
-                        <a:rPr lang="en-US" sz="1200" dirty="0">
-                          <a:solidFill>
-                            <a:srgbClr val="222222"/>
-                          </a:solidFill>
-                        </a:rPr>
-                        <a:t>12/12（土）</a:t>
-                      </a:r>
-                      <a:endParaRPr lang="en-US" sz="1200" dirty="0"/>
-                    </a:p>
-                  </a:txBody>
-                  <a:tcPr marL="76200" marR="76200" marT="25400" marB="25400" anchor="ctr">
-                    <a:lnL w="6350" cap="flat" cmpd="sng" algn="ctr">
-                      <a:solidFill>
-                        <a:srgbClr val="D9D9D9"/>
-                      </a:solidFill>
-                      <a:prstDash val="solid"/>
-                      <a:round/>
-                      <a:headEnd type="none" w="med" len="med"/>
-                      <a:tailEnd type="none" w="med" len="med"/>
-                    </a:lnL>
-                    <a:lnR w="6350" cap="flat" cmpd="sng" algn="ctr">
-                      <a:solidFill>
-                        <a:srgbClr val="D9D9D9"/>
-                      </a:solidFill>
-                      <a:prstDash val="solid"/>
-                      <a:round/>
-                      <a:headEnd type="none" w="med" len="med"/>
-                      <a:tailEnd type="none" w="med" len="med"/>
-                    </a:lnR>
-                    <a:lnT w="6350" cap="flat" cmpd="sng" algn="ctr">
-                      <a:solidFill>
-                        <a:srgbClr val="D9D9D9"/>
-                      </a:solidFill>
-                      <a:prstDash val="solid"/>
-                      <a:round/>
-                      <a:headEnd type="none" w="med" len="med"/>
-                      <a:tailEnd type="none" w="med" len="med"/>
-                    </a:lnT>
-                    <a:lnB w="6350" cap="flat" cmpd="sng" algn="ctr">
-                      <a:solidFill>
-                        <a:srgbClr val="D9D9D9"/>
-                      </a:solidFill>
-                      <a:prstDash val="solid"/>
-                      <a:round/>
-                      <a:headEnd type="none" w="med" len="med"/>
-                      <a:tailEnd type="none" w="med" len="med"/>
-                    </a:lnB>
-                    <a:solidFill>
-                      <a:srgbClr val="FFFFFF"/>
-                    </a:solidFill>
-                  </a:tcPr>
-                </a:tc>
-                <a:tc>
-                  <a:txBody>
-                    <a:bodyPr/>
-                    <a:lstStyle/>
-                    <a:p>
-                      <a:pPr indent="0" marL="0">
-                        <a:buNone/>
-                      </a:pPr>
-                      <a:r>
-                        <a:rPr lang="en-US" sz="1200" dirty="0">
-                          <a:solidFill>
-                            <a:srgbClr val="222222"/>
-                          </a:solidFill>
-                        </a:rPr>
-                        <a:t>12:00</a:t>
-                      </a:r>
-                      <a:endParaRPr lang="en-US" sz="1200" dirty="0"/>
-                    </a:p>
-                  </a:txBody>
-                  <a:tcPr marL="76200" marR="76200" marT="25400" marB="25400" anchor="ctr">
-                    <a:lnL w="6350" cap="flat" cmpd="sng" algn="ctr">
-                      <a:solidFill>
-                        <a:srgbClr val="D9D9D9"/>
-                      </a:solidFill>
-                      <a:prstDash val="solid"/>
-                      <a:round/>
-                      <a:headEnd type="none" w="med" len="med"/>
-                      <a:tailEnd type="none" w="med" len="med"/>
-                    </a:lnL>
-                    <a:lnR w="6350" cap="flat" cmpd="sng" algn="ctr">
-                      <a:solidFill>
-                        <a:srgbClr val="D9D9D9"/>
-                      </a:solidFill>
-                      <a:prstDash val="solid"/>
-                      <a:round/>
-                      <a:headEnd type="none" w="med" len="med"/>
-                      <a:tailEnd type="none" w="med" len="med"/>
-                    </a:lnR>
-                    <a:lnT w="6350" cap="flat" cmpd="sng" algn="ctr">
-                      <a:solidFill>
-                        <a:srgbClr val="D9D9D9"/>
-                      </a:solidFill>
-                      <a:prstDash val="solid"/>
-                      <a:round/>
-                      <a:headEnd type="none" w="med" len="med"/>
-                      <a:tailEnd type="none" w="med" len="med"/>
-                    </a:lnT>
-                    <a:lnB w="6350" cap="flat" cmpd="sng" algn="ctr">
-                      <a:solidFill>
-                        <a:srgbClr val="D9D9D9"/>
-                      </a:solidFill>
-                      <a:prstDash val="solid"/>
-                      <a:round/>
-                      <a:headEnd type="none" w="med" len="med"/>
-                      <a:tailEnd type="none" w="med" len="med"/>
-                    </a:lnB>
-                    <a:solidFill>
-                      <a:srgbClr val="FFFFFF"/>
-                    </a:solidFill>
-                  </a:tcPr>
-                </a:tc>
-                <a:tc>
-                  <a:txBody>
-                    <a:bodyPr/>
-                    <a:lstStyle/>
-                    <a:p>
-                      <a:pPr indent="0" marL="0">
-                        <a:buNone/>
-                      </a:pPr>
-                      <a:r>
-                        <a:rPr lang="en-US" sz="1200" dirty="0">
-                          <a:solidFill>
-                            <a:srgbClr val="222222"/>
-                          </a:solidFill>
-                        </a:rPr>
-                        <a:t>予約投稿</a:t>
-                      </a:r>
-                      <a:endParaRPr lang="en-US" sz="1200" dirty="0"/>
-                    </a:p>
-                  </a:txBody>
-                  <a:tcPr marL="76200" marR="76200" marT="25400" marB="25400" anchor="ctr">
-                    <a:lnL w="6350" cap="flat" cmpd="sng" algn="ctr">
-                      <a:solidFill>
-                        <a:srgbClr val="D9D9D9"/>
-                      </a:solidFill>
-                      <a:prstDash val="solid"/>
-                      <a:round/>
-                      <a:headEnd type="none" w="med" len="med"/>
-                      <a:tailEnd type="none" w="med" len="med"/>
-                    </a:lnL>
-                    <a:lnR w="6350" cap="flat" cmpd="sng" algn="ctr">
-                      <a:solidFill>
-                        <a:srgbClr val="D9D9D9"/>
-                      </a:solidFill>
-                      <a:prstDash val="solid"/>
-                      <a:round/>
-                      <a:headEnd type="none" w="med" len="med"/>
-                      <a:tailEnd type="none" w="med" len="med"/>
-                    </a:lnR>
-                    <a:lnT w="6350" cap="flat" cmpd="sng" algn="ctr">
-                      <a:solidFill>
-                        <a:srgbClr val="D9D9D9"/>
-                      </a:solidFill>
-                      <a:prstDash val="solid"/>
-                      <a:round/>
-                      <a:headEnd type="none" w="med" len="med"/>
-                      <a:tailEnd type="none" w="med" len="med"/>
-                    </a:lnT>
-                    <a:lnB w="6350" cap="flat" cmpd="sng" algn="ctr">
-                      <a:solidFill>
-                        <a:srgbClr val="D9D9D9"/>
-                      </a:solidFill>
-                      <a:prstDash val="solid"/>
-                      <a:round/>
-                      <a:headEnd type="none" w="med" len="med"/>
-                      <a:tailEnd type="none" w="med" len="med"/>
-                    </a:lnB>
-                    <a:solidFill>
-                      <a:srgbClr val="FFFFFF"/>
-                    </a:solidFill>
-                  </a:tcPr>
-                </a:tc>
-                <a:tc>
-                  <a:txBody>
-                    <a:bodyPr/>
-                    <a:lstStyle/>
-                    <a:p>
-                      <a:pPr indent="0" marL="0">
-                        <a:buNone/>
-                      </a:pPr>
-                      <a:r>
-                        <a:rPr lang="en-US" sz="1200" dirty="0">
-                          <a:solidFill>
-                            <a:srgbClr val="222222"/>
-                          </a:solidFill>
-                        </a:rPr>
-                        <a:t>締切当日「本日23:59まで」＋第4弾公開</a:t>
-                      </a:r>
-                      <a:endParaRPr lang="en-US" sz="1200" dirty="0"/>
-                    </a:p>
-                  </a:txBody>
-                  <a:tcPr marL="76200" marR="76200" marT="25400" marB="25400" anchor="ctr">
-                    <a:lnL w="6350" cap="flat" cmpd="sng" algn="ctr">
-                      <a:solidFill>
-                        <a:srgbClr val="D9D9D9"/>
-                      </a:solidFill>
-                      <a:prstDash val="solid"/>
-                      <a:round/>
-                      <a:headEnd type="none" w="med" len="med"/>
-                      <a:tailEnd type="none" w="med" len="med"/>
-                    </a:lnL>
-                    <a:lnR w="6350" cap="flat" cmpd="sng" algn="ctr">
-                      <a:solidFill>
-                        <a:srgbClr val="D9D9D9"/>
-                      </a:solidFill>
-                      <a:prstDash val="solid"/>
-                      <a:round/>
-                      <a:headEnd type="none" w="med" len="med"/>
-                      <a:tailEnd type="none" w="med" len="med"/>
-                    </a:lnR>
-                    <a:lnT w="6350" cap="flat" cmpd="sng" algn="ctr">
-                      <a:solidFill>
-                        <a:srgbClr val="D9D9D9"/>
-                      </a:solidFill>
-                      <a:prstDash val="solid"/>
-                      <a:round/>
-                      <a:headEnd type="none" w="med" len="med"/>
-                      <a:tailEnd type="none" w="med" len="med"/>
-                    </a:lnT>
-                    <a:lnB w="6350" cap="flat" cmpd="sng" algn="ctr">
-                      <a:solidFill>
-                        <a:srgbClr val="D9D9D9"/>
-                      </a:solidFill>
-                      <a:prstDash val="solid"/>
-                      <a:round/>
-                      <a:headEnd type="none" w="med" len="med"/>
-                      <a:tailEnd type="none" w="med" len="med"/>
-                    </a:lnB>
-                    <a:solidFill>
-                      <a:srgbClr val="FFFFFF"/>
-                    </a:solidFill>
-                  </a:tcPr>
-                </a:tc>
-                <a:tc>
-                  <a:txBody>
-                    <a:bodyPr/>
-                    <a:lstStyle/>
-                    <a:p>
-                      <a:pPr algn="ctr" indent="0" marL="0">
-                        <a:buNone/>
-                      </a:pPr>
-                      <a:endParaRPr lang="en-US" sz="1200" dirty="0"/>
-                    </a:p>
-                  </a:txBody>
-                  <a:tcPr marL="76200" marR="76200" marT="25400" marB="25400" anchor="ctr">
-                    <a:lnL w="6350" cap="flat" cmpd="sng" algn="ctr">
-                      <a:solidFill>
-                        <a:srgbClr val="D9D9D9"/>
-                      </a:solidFill>
-                      <a:prstDash val="solid"/>
-                      <a:round/>
-                      <a:headEnd type="none" w="med" len="med"/>
-                      <a:tailEnd type="none" w="med" len="med"/>
-                    </a:lnL>
-                    <a:lnR w="6350" cap="flat" cmpd="sng" algn="ctr">
-                      <a:solidFill>
-                        <a:srgbClr val="D9D9D9"/>
-                      </a:solidFill>
-                      <a:prstDash val="solid"/>
-                      <a:round/>
-                      <a:headEnd type="none" w="med" len="med"/>
-                      <a:tailEnd type="none" w="med" len="med"/>
-                    </a:lnR>
-                    <a:lnT w="6350" cap="flat" cmpd="sng" algn="ctr">
-                      <a:solidFill>
-                        <a:srgbClr val="D9D9D9"/>
-                      </a:solidFill>
-                      <a:prstDash val="solid"/>
-                      <a:round/>
-                      <a:headEnd type="none" w="med" len="med"/>
-                      <a:tailEnd type="none" w="med" len="med"/>
-                    </a:lnT>
-                    <a:lnB w="6350" cap="flat" cmpd="sng" algn="ctr">
-                      <a:solidFill>
-                        <a:srgbClr val="D9D9D9"/>
-                      </a:solidFill>
-                      <a:prstDash val="solid"/>
-                      <a:round/>
-                      <a:headEnd type="none" w="med" len="med"/>
-                      <a:tailEnd type="none" w="med" len="med"/>
-                    </a:lnB>
-                    <a:solidFill>
-                      <a:srgbClr val="FFFFFF"/>
-                    </a:solidFill>
-                  </a:tcPr>
-                </a:tc>
-                <a:tc>
-                  <a:txBody>
-                    <a:bodyPr/>
-                    <a:lstStyle/>
-                    <a:p>
-                      <a:pPr algn="ctr" indent="0" marL="0">
-                        <a:buNone/>
-                      </a:pPr>
-                      <a:endParaRPr lang="en-US" sz="1200" dirty="0"/>
-                    </a:p>
-                  </a:txBody>
-                  <a:tcPr marL="76200" marR="76200" marT="25400" marB="25400" anchor="ctr">
-                    <a:lnL w="6350" cap="flat" cmpd="sng" algn="ctr">
-                      <a:solidFill>
-                        <a:srgbClr val="D9D9D9"/>
-                      </a:solidFill>
-                      <a:prstDash val="solid"/>
-                      <a:round/>
-                      <a:headEnd type="none" w="med" len="med"/>
-                      <a:tailEnd type="none" w="med" len="med"/>
-                    </a:lnL>
-                    <a:lnR w="6350" cap="flat" cmpd="sng" algn="ctr">
-                      <a:solidFill>
-                        <a:srgbClr val="D9D9D9"/>
-                      </a:solidFill>
-                      <a:prstDash val="solid"/>
-                      <a:round/>
-                      <a:headEnd type="none" w="med" len="med"/>
-                      <a:tailEnd type="none" w="med" len="med"/>
-                    </a:lnR>
-                    <a:lnT w="6350" cap="flat" cmpd="sng" algn="ctr">
-                      <a:solidFill>
-                        <a:srgbClr val="D9D9D9"/>
-                      </a:solidFill>
-                      <a:prstDash val="solid"/>
-                      <a:round/>
-                      <a:headEnd type="none" w="med" len="med"/>
-                      <a:tailEnd type="none" w="med" len="med"/>
-                    </a:lnT>
-                    <a:lnB w="6350" cap="flat" cmpd="sng" algn="ctr">
-                      <a:solidFill>
-                        <a:srgbClr val="D9D9D9"/>
-                      </a:solidFill>
-                      <a:prstDash val="solid"/>
-                      <a:round/>
-                      <a:headEnd type="none" w="med" len="med"/>
-                      <a:tailEnd type="none" w="med" len="med"/>
-                    </a:lnB>
-                    <a:solidFill>
-                      <a:srgbClr val="FFFFFF"/>
                     </a:solidFill>
                   </a:tcPr>
                 </a:tc>
@@ -13596,7 +13236,7 @@
                   <a:srgbClr val="7F7F7F"/>
                 </a:solidFill>
               </a:rPr>
-              <a:t>※11/21（土）のリマインドを削除（土曜対応不可のため）。12/12は予約投稿とし、文面は12/11夜の到達状況で確定</a:t>
+              <a:t>※土日祝（11/21・22・23・28・29、12/5・6・12）は投稿なし。12/12（土）締切のため、12/11が最終投稿</a:t>
             </a:r>
             <a:endParaRPr lang="en-US" sz="1000" dirty="0"/>
           </a:p>
@@ -13827,7 +13467,7 @@
                   <a:srgbClr val="C8102E"/>
                 </a:solidFill>
               </a:rPr>
-              <a:t>約1,960件</a:t>
+              <a:t>約1,900件</a:t>
             </a:r>
             <a:pPr indent="0" marL="0">
               <a:spcAft>
@@ -13841,7 +13481,7 @@
                   <a:srgbClr val="222222"/>
                 </a:solidFill>
               </a:rPr>
-              <a:t>（旧案：約2,130件）。12時枠の効果は17時の約6割と保守的に設定</a:t>
+              <a:t>（当初案：約2,130件）。12時枠の効果は17時の約6割と保守的に設定</a:t>
             </a:r>
             <a:endParaRPr lang="en-US" sz="1500" dirty="0"/>
           </a:p>
@@ -13858,7 +13498,7 @@
                   <a:srgbClr val="222222"/>
                 </a:solidFill>
               </a:rPr>
-              <a:t>・→ AB検証で12時の方が伸びれば上振れ。</a:t>
+              <a:t>・→ 土日祝なし・ABテスト分で</a:t>
             </a:r>
             <a:pPr indent="0" marL="0">
               <a:spcAft>
@@ -13872,7 +13512,7 @@
                   <a:srgbClr val="C8102E"/>
                 </a:solidFill>
               </a:rPr>
-              <a:t>検証の機会コストは約170件</a:t>
+              <a:t>当初案より約230件減</a:t>
             </a:r>
             <a:pPr indent="0" marL="0">
               <a:spcAft>
@@ -13886,7 +13526,7 @@
                   <a:srgbClr val="222222"/>
                 </a:solidFill>
               </a:rPr>
-              <a:t>（土曜削除の分を含む）</a:t>
+              <a:t>。12時の方が伸びれば上振れする</a:t>
             </a:r>
             <a:endParaRPr lang="en-US" sz="1500" dirty="0"/>
           </a:p>
@@ -14096,7 +13736,7 @@
                   <a:srgbClr val="222222"/>
                 </a:solidFill>
               </a:rPr>
-              <a:t>② 動画公開＝リマインド（11/19・23、12/3）</a:t>
+              <a:t>② 動画公開＝リマインド（11/19・24、12/3）</a:t>
             </a:r>
             <a:endParaRPr lang="en-US" sz="1200" dirty="0"/>
           </a:p>
@@ -14193,7 +13833,7 @@
                   <a:srgbClr val="C8102E"/>
                 </a:solidFill>
               </a:rPr>
-              <a:t>③ OWV公式RPの山場（11/16・29、12/11）</a:t>
+              <a:t>③ OWV公式RPの山場（11/16・30、12/11）</a:t>
             </a:r>
             <a:endParaRPr lang="en-US" sz="1200" dirty="0"/>
           </a:p>
@@ -14290,7 +13930,7 @@
                   <a:srgbClr val="222222"/>
                 </a:solidFill>
               </a:rPr>
-              <a:t>④ 締切前の駆け込み（12/6・10・11・12）</a:t>
+              <a:t>④ 締切前の駆け込み（12/7・10・11）</a:t>
             </a:r>
             <a:endParaRPr lang="en-US" sz="1200" dirty="0"/>
           </a:p>
@@ -14362,7 +14002,7 @@
                   <a:srgbClr val="7F7F7F"/>
                 </a:solidFill>
               </a:rPr>
-              <a:t>※試算前提：初日650件（井上実績×1.3）→初日比8%・4%・2%で減衰。上乗せ：リマインド10%・動画公開14%・OWV公式RP30%・締切当日15%、12時投稿は×0.59</a:t>
+              <a:t>※試算前提：初日650件（井上実績×1.3）→初日比8%・4%・2%で減衰。上乗せ：リマインド10%・動画公開14%・OWV公式RP30%、12時投稿は×0.59</a:t>
             </a:r>
             <a:endParaRPr lang="en-US" sz="1000" dirty="0"/>
           </a:p>
@@ -14621,7 +14261,7 @@
                   <a:srgbClr val="C8102E"/>
                 </a:solidFill>
               </a:rPr>
-              <a:t>締切時点で約1,960件（2,000件はストレッチ）</a:t>
+              <a:t>締切時点で約1,900件（2,000件はストレッチ）</a:t>
             </a:r>
             <a:endParaRPr lang="en-US" sz="1500" dirty="0"/>
           </a:p>
@@ -15801,7 +15441,7 @@
                             <a:srgbClr val="222222"/>
                           </a:solidFill>
                         </a:rPr>
-                        <a:t>11/29</a:t>
+                        <a:t>11/30</a:t>
                       </a:r>
                       <a:endParaRPr lang="en-US" sz="1100" dirty="0"/>
                     </a:p>
@@ -15986,7 +15626,7 @@
                             <a:srgbClr val="222222"/>
                           </a:solidFill>
                         </a:rPr>
-                        <a:t>OWV公式RP＋締切の駆け込み</a:t>
+                        <a:t>OWV公式RP＋締切前の駆け込み</a:t>
                       </a:r>
                       <a:endParaRPr lang="en-US" sz="1100" dirty="0"/>
                     </a:p>
@@ -16047,7 +15687,7 @@
                             <a:srgbClr val="C8102E"/>
                           </a:solidFill>
                         </a:rPr>
-                        <a:t>締切前後</a:t>
+                        <a:t>未達の恐れ</a:t>
                       </a:r>
                       <a:endParaRPr lang="en-US" sz="1100" dirty="0"/>
                     </a:p>
